--- a/Office_stuff/Tarpinio Gynimo skaidrės.pptx
+++ b/Office_stuff/Tarpinio Gynimo skaidrės.pptx
@@ -5,20 +5,25 @@
     <p:sldMasterId id="2147483660" r:id="rId1"/>
   </p:sldMasterIdLst>
   <p:notesMasterIdLst>
-    <p:notesMasterId r:id="rId13"/>
+    <p:notesMasterId r:id="rId18"/>
   </p:notesMasterIdLst>
   <p:sldIdLst>
     <p:sldId id="283" r:id="rId2"/>
     <p:sldId id="260" r:id="rId3"/>
     <p:sldId id="284" r:id="rId4"/>
     <p:sldId id="262" r:id="rId5"/>
-    <p:sldId id="286" r:id="rId6"/>
+    <p:sldId id="294" r:id="rId6"/>
     <p:sldId id="288" r:id="rId7"/>
-    <p:sldId id="291" r:id="rId8"/>
-    <p:sldId id="265" r:id="rId9"/>
-    <p:sldId id="290" r:id="rId10"/>
-    <p:sldId id="287" r:id="rId11"/>
-    <p:sldId id="289" r:id="rId12"/>
+    <p:sldId id="295" r:id="rId8"/>
+    <p:sldId id="298" r:id="rId9"/>
+    <p:sldId id="297" r:id="rId10"/>
+    <p:sldId id="301" r:id="rId11"/>
+    <p:sldId id="299" r:id="rId12"/>
+    <p:sldId id="265" r:id="rId13"/>
+    <p:sldId id="296" r:id="rId14"/>
+    <p:sldId id="290" r:id="rId15"/>
+    <p:sldId id="287" r:id="rId16"/>
+    <p:sldId id="289" r:id="rId17"/>
   </p:sldIdLst>
   <p:sldSz cx="24382413" cy="13716000"/>
   <p:notesSz cx="6858000" cy="9144000"/>
@@ -207,7 +212,7 @@
           <a:p>
             <a:fld id="{94D01F65-ADE3-4424-A0F2-5E1F648B8E51}" type="datetimeFigureOut">
               <a:rPr lang="en-US" smtClean="0"/>
-              <a:t>5/6/2025</a:t>
+              <a:t>5/10/2026</a:t>
             </a:fld>
             <a:endParaRPr lang="en-US"/>
           </a:p>
@@ -539,7 +544,7 @@
           <a:p>
             <a:fld id="{7D3D8D8B-2BC7-463E-BFD7-61670D39E088}" type="slidenum">
               <a:rPr lang="en-US" smtClean="0"/>
-              <a:t>8</a:t>
+              <a:t>12</a:t>
             </a:fld>
             <a:endParaRPr lang="en-US"/>
           </a:p>
@@ -559,6 +564,114 @@
 </file>
 
 <file path=ppt/notesSlides/notesSlide2.xml><?xml version="1.0" encoding="utf-8"?>
+<p:notes xmlns:a="http://schemas.openxmlformats.org/drawingml/2006/main" xmlns:r="http://schemas.openxmlformats.org/officeDocument/2006/relationships" xmlns:p="http://schemas.openxmlformats.org/presentationml/2006/main">
+  <p:cSld>
+    <p:spTree>
+      <p:nvGrpSpPr>
+        <p:cNvPr id="1" name="">
+          <a:extLst>
+            <a:ext uri="{FF2B5EF4-FFF2-40B4-BE49-F238E27FC236}">
+              <a16:creationId xmlns:a16="http://schemas.microsoft.com/office/drawing/2014/main" id="{A293E260-F5D1-6C67-D4E0-05991553105E}"/>
+            </a:ext>
+          </a:extLst>
+        </p:cNvPr>
+        <p:cNvGrpSpPr/>
+        <p:nvPr/>
+      </p:nvGrpSpPr>
+      <p:grpSpPr>
+        <a:xfrm>
+          <a:off x="0" y="0"/>
+          <a:ext cx="0" cy="0"/>
+          <a:chOff x="0" y="0"/>
+          <a:chExt cx="0" cy="0"/>
+        </a:xfrm>
+      </p:grpSpPr>
+      <p:sp>
+        <p:nvSpPr>
+          <p:cNvPr id="2" name="Slide Image Placeholder 1">
+            <a:extLst>
+              <a:ext uri="{FF2B5EF4-FFF2-40B4-BE49-F238E27FC236}">
+                <a16:creationId xmlns:a16="http://schemas.microsoft.com/office/drawing/2014/main" id="{AD081F14-8B5E-A169-A4EB-9AB31D3068F3}"/>
+              </a:ext>
+            </a:extLst>
+          </p:cNvPr>
+          <p:cNvSpPr>
+            <a:spLocks noGrp="1" noRot="1" noChangeAspect="1"/>
+          </p:cNvSpPr>
+          <p:nvPr>
+            <p:ph type="sldImg"/>
+          </p:nvPr>
+        </p:nvSpPr>
+        <p:spPr/>
+      </p:sp>
+      <p:sp>
+        <p:nvSpPr>
+          <p:cNvPr id="3" name="Notes Placeholder 2">
+            <a:extLst>
+              <a:ext uri="{FF2B5EF4-FFF2-40B4-BE49-F238E27FC236}">
+                <a16:creationId xmlns:a16="http://schemas.microsoft.com/office/drawing/2014/main" id="{353D1728-E3C7-614A-E607-8723F8BEE200}"/>
+              </a:ext>
+            </a:extLst>
+          </p:cNvPr>
+          <p:cNvSpPr>
+            <a:spLocks noGrp="1"/>
+          </p:cNvSpPr>
+          <p:nvPr>
+            <p:ph type="body" idx="1"/>
+          </p:nvPr>
+        </p:nvSpPr>
+        <p:spPr/>
+        <p:txBody>
+          <a:bodyPr/>
+          <a:lstStyle/>
+          <a:p>
+            <a:endParaRPr lang="en-US" dirty="0"/>
+          </a:p>
+        </p:txBody>
+      </p:sp>
+      <p:sp>
+        <p:nvSpPr>
+          <p:cNvPr id="4" name="Slide Number Placeholder 3">
+            <a:extLst>
+              <a:ext uri="{FF2B5EF4-FFF2-40B4-BE49-F238E27FC236}">
+                <a16:creationId xmlns:a16="http://schemas.microsoft.com/office/drawing/2014/main" id="{F0505FBD-C22A-0AE0-C737-8BBDA0B298A6}"/>
+              </a:ext>
+            </a:extLst>
+          </p:cNvPr>
+          <p:cNvSpPr>
+            <a:spLocks noGrp="1"/>
+          </p:cNvSpPr>
+          <p:nvPr>
+            <p:ph type="sldNum" sz="quarter" idx="5"/>
+          </p:nvPr>
+        </p:nvSpPr>
+        <p:spPr/>
+        <p:txBody>
+          <a:bodyPr/>
+          <a:lstStyle/>
+          <a:p>
+            <a:fld id="{7D3D8D8B-2BC7-463E-BFD7-61670D39E088}" type="slidenum">
+              <a:rPr lang="en-US" smtClean="0"/>
+              <a:t>13</a:t>
+            </a:fld>
+            <a:endParaRPr lang="en-US"/>
+          </a:p>
+        </p:txBody>
+      </p:sp>
+    </p:spTree>
+    <p:extLst>
+      <p:ext uri="{BB962C8B-B14F-4D97-AF65-F5344CB8AC3E}">
+        <p14:creationId xmlns:p14="http://schemas.microsoft.com/office/powerpoint/2010/main" val="655322297"/>
+      </p:ext>
+    </p:extLst>
+  </p:cSld>
+  <p:clrMapOvr>
+    <a:masterClrMapping/>
+  </p:clrMapOvr>
+</p:notes>
+</file>
+
+<file path=ppt/notesSlides/notesSlide3.xml><?xml version="1.0" encoding="utf-8"?>
 <p:notes xmlns:a="http://schemas.openxmlformats.org/drawingml/2006/main" xmlns:r="http://schemas.openxmlformats.org/officeDocument/2006/relationships" xmlns:p="http://schemas.openxmlformats.org/presentationml/2006/main">
   <p:cSld>
     <p:spTree>
@@ -647,7 +760,7 @@
           <a:p>
             <a:fld id="{7D3D8D8B-2BC7-463E-BFD7-61670D39E088}" type="slidenum">
               <a:rPr lang="en-US" smtClean="0"/>
-              <a:t>9</a:t>
+              <a:t>14</a:t>
             </a:fld>
             <a:endParaRPr lang="en-US"/>
           </a:p>
@@ -666,7 +779,7 @@
 </p:notes>
 </file>
 
-<file path=ppt/notesSlides/notesSlide3.xml><?xml version="1.0" encoding="utf-8"?>
+<file path=ppt/notesSlides/notesSlide4.xml><?xml version="1.0" encoding="utf-8"?>
 <p:notes xmlns:a="http://schemas.openxmlformats.org/drawingml/2006/main" xmlns:r="http://schemas.openxmlformats.org/officeDocument/2006/relationships" xmlns:p="http://schemas.openxmlformats.org/presentationml/2006/main">
   <p:cSld>
     <p:spTree>
@@ -755,7 +868,7 @@
           <a:p>
             <a:fld id="{7D3D8D8B-2BC7-463E-BFD7-61670D39E088}" type="slidenum">
               <a:rPr lang="en-US" smtClean="0"/>
-              <a:t>10</a:t>
+              <a:t>15</a:t>
             </a:fld>
             <a:endParaRPr lang="en-US"/>
           </a:p>
@@ -774,7 +887,7 @@
 </p:notes>
 </file>
 
-<file path=ppt/notesSlides/notesSlide4.xml><?xml version="1.0" encoding="utf-8"?>
+<file path=ppt/notesSlides/notesSlide5.xml><?xml version="1.0" encoding="utf-8"?>
 <p:notes xmlns:a="http://schemas.openxmlformats.org/drawingml/2006/main" xmlns:r="http://schemas.openxmlformats.org/officeDocument/2006/relationships" xmlns:p="http://schemas.openxmlformats.org/presentationml/2006/main">
   <p:cSld>
     <p:spTree>
@@ -863,7 +976,7 @@
           <a:p>
             <a:fld id="{7D3D8D8B-2BC7-463E-BFD7-61670D39E088}" type="slidenum">
               <a:rPr lang="en-US" smtClean="0"/>
-              <a:t>11</a:t>
+              <a:t>16</a:t>
             </a:fld>
             <a:endParaRPr lang="en-US"/>
           </a:p>
@@ -1011,9 +1124,9 @@
           <a:bodyPr/>
           <a:lstStyle/>
           <a:p>
-            <a:fld id="{98B4E30D-B8F9-B547-BB3B-87F030F16756}" type="datetimeFigureOut">
+            <a:fld id="{74F880E5-5F82-415C-9525-1F3631A7AE8F}" type="datetime1">
               <a:rPr lang="en-US" smtClean="0"/>
-              <a:t>5/6/2025</a:t>
+              <a:t>5/10/2026</a:t>
             </a:fld>
             <a:endParaRPr lang="en-US"/>
           </a:p>
@@ -1181,9 +1294,9 @@
           <a:bodyPr/>
           <a:lstStyle/>
           <a:p>
-            <a:fld id="{98B4E30D-B8F9-B547-BB3B-87F030F16756}" type="datetimeFigureOut">
+            <a:fld id="{63287B1D-AF4C-43BA-A2CC-3D3995A8E269}" type="datetime1">
               <a:rPr lang="en-US" smtClean="0"/>
-              <a:t>5/6/2025</a:t>
+              <a:t>5/10/2026</a:t>
             </a:fld>
             <a:endParaRPr lang="en-US"/>
           </a:p>
@@ -1361,9 +1474,9 @@
           <a:bodyPr/>
           <a:lstStyle/>
           <a:p>
-            <a:fld id="{98B4E30D-B8F9-B547-BB3B-87F030F16756}" type="datetimeFigureOut">
+            <a:fld id="{1EA15F11-500F-40CB-A231-56DAC8067F9F}" type="datetime1">
               <a:rPr lang="en-US" smtClean="0"/>
-              <a:t>5/6/2025</a:t>
+              <a:t>5/10/2026</a:t>
             </a:fld>
             <a:endParaRPr lang="en-US"/>
           </a:p>
@@ -1531,9 +1644,9 @@
           <a:bodyPr/>
           <a:lstStyle/>
           <a:p>
-            <a:fld id="{98B4E30D-B8F9-B547-BB3B-87F030F16756}" type="datetimeFigureOut">
+            <a:fld id="{7ED0485C-C0C8-49F5-A85A-1480642569F2}" type="datetime1">
               <a:rPr lang="en-US" smtClean="0"/>
-              <a:t>5/6/2025</a:t>
+              <a:t>5/10/2026</a:t>
             </a:fld>
             <a:endParaRPr lang="en-US"/>
           </a:p>
@@ -1777,9 +1890,9 @@
           <a:bodyPr/>
           <a:lstStyle/>
           <a:p>
-            <a:fld id="{98B4E30D-B8F9-B547-BB3B-87F030F16756}" type="datetimeFigureOut">
+            <a:fld id="{AFCA74A8-EEE6-4E2C-969F-BCCD7B351E6C}" type="datetime1">
               <a:rPr lang="en-US" smtClean="0"/>
-              <a:t>5/6/2025</a:t>
+              <a:t>5/10/2026</a:t>
             </a:fld>
             <a:endParaRPr lang="en-US"/>
           </a:p>
@@ -2009,9 +2122,9 @@
           <a:bodyPr/>
           <a:lstStyle/>
           <a:p>
-            <a:fld id="{98B4E30D-B8F9-B547-BB3B-87F030F16756}" type="datetimeFigureOut">
+            <a:fld id="{9E6162BC-34BB-45B1-BF1A-3FB9ED2801EB}" type="datetime1">
               <a:rPr lang="en-US" smtClean="0"/>
-              <a:t>5/6/2025</a:t>
+              <a:t>5/10/2026</a:t>
             </a:fld>
             <a:endParaRPr lang="en-US"/>
           </a:p>
@@ -2376,9 +2489,9 @@
           <a:bodyPr/>
           <a:lstStyle/>
           <a:p>
-            <a:fld id="{98B4E30D-B8F9-B547-BB3B-87F030F16756}" type="datetimeFigureOut">
+            <a:fld id="{60B5E9F1-B21A-41A2-B2F0-56E2FDED885B}" type="datetime1">
               <a:rPr lang="en-US" smtClean="0"/>
-              <a:t>5/6/2025</a:t>
+              <a:t>5/10/2026</a:t>
             </a:fld>
             <a:endParaRPr lang="en-US"/>
           </a:p>
@@ -2494,9 +2607,9 @@
           <a:bodyPr/>
           <a:lstStyle/>
           <a:p>
-            <a:fld id="{98B4E30D-B8F9-B547-BB3B-87F030F16756}" type="datetimeFigureOut">
+            <a:fld id="{F1579879-1CA8-4A23-B24B-EC9F3C303221}" type="datetime1">
               <a:rPr lang="en-US" smtClean="0"/>
-              <a:t>5/6/2025</a:t>
+              <a:t>5/10/2026</a:t>
             </a:fld>
             <a:endParaRPr lang="en-US"/>
           </a:p>
@@ -2589,9 +2702,9 @@
           <a:bodyPr/>
           <a:lstStyle/>
           <a:p>
-            <a:fld id="{98B4E30D-B8F9-B547-BB3B-87F030F16756}" type="datetimeFigureOut">
+            <a:fld id="{16B6C98E-CCA0-4AF2-8099-7186DF10A5E7}" type="datetime1">
               <a:rPr lang="en-US" smtClean="0"/>
-              <a:t>5/6/2025</a:t>
+              <a:t>5/10/2026</a:t>
             </a:fld>
             <a:endParaRPr lang="en-US"/>
           </a:p>
@@ -2866,9 +2979,9 @@
           <a:bodyPr/>
           <a:lstStyle/>
           <a:p>
-            <a:fld id="{98B4E30D-B8F9-B547-BB3B-87F030F16756}" type="datetimeFigureOut">
+            <a:fld id="{BED2C339-A0F1-478A-AFF9-60088043FEBD}" type="datetime1">
               <a:rPr lang="en-US" smtClean="0"/>
-              <a:t>5/6/2025</a:t>
+              <a:t>5/10/2026</a:t>
             </a:fld>
             <a:endParaRPr lang="en-US"/>
           </a:p>
@@ -3123,9 +3236,9 @@
           <a:bodyPr/>
           <a:lstStyle/>
           <a:p>
-            <a:fld id="{98B4E30D-B8F9-B547-BB3B-87F030F16756}" type="datetimeFigureOut">
+            <a:fld id="{8DB4C5FF-1ED0-424D-BFE3-4CED3A90D626}" type="datetime1">
               <a:rPr lang="en-US" smtClean="0"/>
-              <a:t>5/6/2025</a:t>
+              <a:t>5/10/2026</a:t>
             </a:fld>
             <a:endParaRPr lang="en-US"/>
           </a:p>
@@ -3336,9 +3449,9 @@
             </a:lvl1pPr>
           </a:lstStyle>
           <a:p>
-            <a:fld id="{98B4E30D-B8F9-B547-BB3B-87F030F16756}" type="datetimeFigureOut">
+            <a:fld id="{9190BF23-92F6-4A4D-B279-6F5D5BFDB7CE}" type="datetime1">
               <a:rPr lang="en-US" smtClean="0"/>
-              <a:t>5/6/2025</a:t>
+              <a:t>5/10/2026</a:t>
             </a:fld>
             <a:endParaRPr lang="en-US"/>
           </a:p>
@@ -3443,6 +3556,7 @@
     <p:sldLayoutId id="2147483670" r:id="rId10"/>
     <p:sldLayoutId id="2147483671" r:id="rId11"/>
   </p:sldLayoutIdLst>
+  <p:hf hdr="0" ftr="0" dt="0"/>
   <p:txStyles>
     <p:titleStyle>
       <a:lvl1pPr algn="l" defTabSz="1828709" rtl="0" eaLnBrk="1" latinLnBrk="0" hangingPunct="1">
@@ -3886,7 +4000,7 @@
         </p:nvSpPr>
         <p:spPr>
           <a:xfrm>
-            <a:off x="17775936" y="8449056"/>
+            <a:off x="17533716" y="7854896"/>
             <a:ext cx="5172406" cy="4857805"/>
           </a:xfrm>
           <a:prstGeom prst="rect">
@@ -3909,7 +4023,7 @@
             </a:br>
             <a:r>
               <a:rPr lang="lt-LT" dirty="0"/>
-              <a:t>Redas Niuklys IFF-1/3</a:t>
+              <a:t>Redas Niuklys IFF-2/3</a:t>
             </a:r>
             <a:br>
               <a:rPr lang="lt-LT" dirty="0"/>
@@ -3924,14 +4038,24 @@
           </a:p>
           <a:p>
             <a:r>
-              <a:rPr lang="lt-LT" b="0" i="0" dirty="0">
-                <a:solidFill>
-                  <a:srgbClr val="000000"/>
-                </a:solidFill>
-                <a:effectLst/>
-                <a:latin typeface="pf_dintext_promedium"/>
-              </a:rPr>
-              <a:t>Doc. dr. Eimutis Karčiauskas</a:t>
+              <a:rPr lang="lt-LT" dirty="0"/>
+              <a:t>A</a:t>
+            </a:r>
+            <a:r>
+              <a:rPr lang="en-GB" dirty="0"/>
+              <a:t>sist. dr. </a:t>
+            </a:r>
+            <a:r>
+              <a:rPr lang="en-GB" dirty="0" err="1"/>
+              <a:t>Žitkus</a:t>
+            </a:r>
+            <a:r>
+              <a:rPr lang="lt-LT" dirty="0"/>
+              <a:t> </a:t>
+            </a:r>
+            <a:r>
+              <a:rPr lang="en-GB" dirty="0"/>
+              <a:t>Voldemaras</a:t>
             </a:r>
             <a:br>
               <a:rPr lang="lt-LT" b="0" i="0" dirty="0">
@@ -3957,54 +4081,17 @@
             </a:r>
           </a:p>
           <a:p>
-            <a:pPr algn="l">
+            <a:pPr>
               <a:lnSpc>
                 <a:spcPts val="2175"/>
               </a:lnSpc>
               <a:spcAft>
                 <a:spcPts val="2400"/>
               </a:spcAft>
-              <a:buNone/>
             </a:pPr>
             <a:r>
-              <a:rPr lang="lt-LT" b="0" i="0" dirty="0">
-                <a:solidFill>
-                  <a:srgbClr val="000000"/>
-                </a:solidFill>
-                <a:effectLst/>
-                <a:latin typeface="pf_dintext_promedium"/>
-              </a:rPr>
-              <a:t>Asist. dr. </a:t>
-            </a:r>
-            <a:r>
-              <a:rPr lang="lt-LT" b="0" i="0" dirty="0" err="1">
-                <a:solidFill>
-                  <a:srgbClr val="000000"/>
-                </a:solidFill>
-                <a:effectLst/>
-                <a:latin typeface="pf_dintext_promedium"/>
-              </a:rPr>
-              <a:t>Andrej</a:t>
-            </a:r>
-            <a:r>
-              <a:rPr lang="lt-LT" b="0" i="0" dirty="0">
-                <a:solidFill>
-                  <a:srgbClr val="000000"/>
-                </a:solidFill>
-                <a:effectLst/>
-                <a:latin typeface="pf_dintext_promedium"/>
-              </a:rPr>
-              <a:t> </a:t>
-            </a:r>
-            <a:r>
-              <a:rPr lang="lt-LT" b="0" i="0" dirty="0" err="1">
-                <a:solidFill>
-                  <a:srgbClr val="000000"/>
-                </a:solidFill>
-                <a:effectLst/>
-                <a:latin typeface="pf_dintext_promedium"/>
-              </a:rPr>
-              <a:t>Ušaniov</a:t>
+              <a:rPr lang="lt-LT" dirty="0"/>
+              <a:t>doc. pr. Mažutienė Rasa</a:t>
             </a:r>
             <a:endParaRPr lang="lt-LT" b="0" i="0" dirty="0">
               <a:solidFill>
@@ -4013,6 +4100,35 @@
               <a:effectLst/>
               <a:latin typeface="pf_dintext_promedium"/>
             </a:endParaRPr>
+          </a:p>
+        </p:txBody>
+      </p:sp>
+      <p:sp>
+        <p:nvSpPr>
+          <p:cNvPr id="2" name="Slide Number Placeholder 1">
+            <a:extLst>
+              <a:ext uri="{FF2B5EF4-FFF2-40B4-BE49-F238E27FC236}">
+                <a16:creationId xmlns:a16="http://schemas.microsoft.com/office/drawing/2014/main" id="{83407A3A-65EB-7846-D597-BC7375A30B48}"/>
+              </a:ext>
+            </a:extLst>
+          </p:cNvPr>
+          <p:cNvSpPr>
+            <a:spLocks noGrp="1"/>
+          </p:cNvSpPr>
+          <p:nvPr>
+            <p:ph type="sldNum" sz="quarter" idx="12"/>
+          </p:nvPr>
+        </p:nvSpPr>
+        <p:spPr/>
+        <p:txBody>
+          <a:bodyPr/>
+          <a:lstStyle/>
+          <a:p>
+            <a:fld id="{29B01A02-16AD-7D4A-AF4C-AE522BCC74EA}" type="slidenum">
+              <a:rPr lang="en-US" sz="3600" smtClean="0"/>
+              <a:t>1</a:t>
+            </a:fld>
+            <a:endParaRPr lang="en-US" sz="3600" dirty="0"/>
           </a:p>
         </p:txBody>
       </p:sp>
@@ -4030,6 +4146,780 @@
 </file>
 
 <file path=ppt/slides/slide10.xml><?xml version="1.0" encoding="utf-8"?>
+<p:sld xmlns:a="http://schemas.openxmlformats.org/drawingml/2006/main" xmlns:r="http://schemas.openxmlformats.org/officeDocument/2006/relationships" xmlns:p="http://schemas.openxmlformats.org/presentationml/2006/main">
+  <p:cSld>
+    <p:bg>
+      <p:bgPr>
+        <a:blipFill dpi="0" rotWithShape="1">
+          <a:blip r:embed="rId2">
+            <a:lum/>
+          </a:blip>
+          <a:srcRect/>
+          <a:stretch>
+            <a:fillRect/>
+          </a:stretch>
+        </a:blipFill>
+        <a:effectLst/>
+      </p:bgPr>
+    </p:bg>
+    <p:spTree>
+      <p:nvGrpSpPr>
+        <p:cNvPr id="1" name="">
+          <a:extLst>
+            <a:ext uri="{FF2B5EF4-FFF2-40B4-BE49-F238E27FC236}">
+              <a16:creationId xmlns:a16="http://schemas.microsoft.com/office/drawing/2014/main" id="{80422217-42FE-3E66-BD1D-7FB9F5EE19E5}"/>
+            </a:ext>
+          </a:extLst>
+        </p:cNvPr>
+        <p:cNvGrpSpPr/>
+        <p:nvPr/>
+      </p:nvGrpSpPr>
+      <p:grpSpPr>
+        <a:xfrm>
+          <a:off x="0" y="0"/>
+          <a:ext cx="0" cy="0"/>
+          <a:chOff x="0" y="0"/>
+          <a:chExt cx="0" cy="0"/>
+        </a:xfrm>
+      </p:grpSpPr>
+      <p:sp>
+        <p:nvSpPr>
+          <p:cNvPr id="10" name="Title 1">
+            <a:extLst>
+              <a:ext uri="{FF2B5EF4-FFF2-40B4-BE49-F238E27FC236}">
+                <a16:creationId xmlns:a16="http://schemas.microsoft.com/office/drawing/2014/main" id="{663911A1-8ECD-EEA0-6DA8-79FF0F4C2066}"/>
+              </a:ext>
+            </a:extLst>
+          </p:cNvPr>
+          <p:cNvSpPr>
+            <a:spLocks noGrp="1"/>
+          </p:cNvSpPr>
+          <p:nvPr>
+            <p:ph type="title"/>
+          </p:nvPr>
+        </p:nvSpPr>
+        <p:spPr>
+          <a:xfrm>
+            <a:off x="3631216" y="269297"/>
+            <a:ext cx="21029831" cy="2651126"/>
+          </a:xfrm>
+        </p:spPr>
+        <p:txBody>
+          <a:bodyPr>
+            <a:normAutofit/>
+          </a:bodyPr>
+          <a:lstStyle/>
+          <a:p>
+            <a:r>
+              <a:rPr lang="lt-LT" sz="5900" b="1" dirty="0">
+                <a:latin typeface="Arial" panose="020B0604020202020204" pitchFamily="34" charset="0"/>
+                <a:ea typeface="Inter" panose="020B0502030000000004" pitchFamily="34" charset="0"/>
+                <a:cs typeface="Arial" panose="020B0604020202020204" pitchFamily="34" charset="0"/>
+              </a:rPr>
+              <a:t>Sekų diagrama – sukurti įrangą</a:t>
+            </a:r>
+            <a:endParaRPr lang="en-US" sz="5900" b="1" dirty="0">
+              <a:latin typeface="Arial" panose="020B0604020202020204" pitchFamily="34" charset="0"/>
+              <a:ea typeface="Inter" panose="020B0502030000000004" pitchFamily="34" charset="0"/>
+              <a:cs typeface="Arial" panose="020B0604020202020204" pitchFamily="34" charset="0"/>
+            </a:endParaRPr>
+          </a:p>
+        </p:txBody>
+      </p:sp>
+      <p:sp>
+        <p:nvSpPr>
+          <p:cNvPr id="2" name="Slide Number Placeholder 1">
+            <a:extLst>
+              <a:ext uri="{FF2B5EF4-FFF2-40B4-BE49-F238E27FC236}">
+                <a16:creationId xmlns:a16="http://schemas.microsoft.com/office/drawing/2014/main" id="{AAB04D49-1CC6-CD90-1D51-D3A1FB0DE0FC}"/>
+              </a:ext>
+            </a:extLst>
+          </p:cNvPr>
+          <p:cNvSpPr>
+            <a:spLocks noGrp="1"/>
+          </p:cNvSpPr>
+          <p:nvPr>
+            <p:ph type="sldNum" sz="quarter" idx="12"/>
+          </p:nvPr>
+        </p:nvSpPr>
+        <p:spPr/>
+        <p:txBody>
+          <a:bodyPr/>
+          <a:lstStyle/>
+          <a:p>
+            <a:r>
+              <a:rPr lang="lt-LT" sz="3600" dirty="0"/>
+              <a:t>9</a:t>
+            </a:r>
+            <a:endParaRPr lang="en-US" dirty="0"/>
+          </a:p>
+        </p:txBody>
+      </p:sp>
+      <p:pic>
+        <p:nvPicPr>
+          <p:cNvPr id="7" name="Picture 6">
+            <a:extLst>
+              <a:ext uri="{FF2B5EF4-FFF2-40B4-BE49-F238E27FC236}">
+                <a16:creationId xmlns:a16="http://schemas.microsoft.com/office/drawing/2014/main" id="{CC7156D8-51C0-5022-E408-4EF5D49BD439}"/>
+              </a:ext>
+            </a:extLst>
+          </p:cNvPr>
+          <p:cNvPicPr>
+            <a:picLocks noChangeAspect="1"/>
+          </p:cNvPicPr>
+          <p:nvPr/>
+        </p:nvPicPr>
+        <p:blipFill>
+          <a:blip r:embed="rId3"/>
+          <a:stretch>
+            <a:fillRect/>
+          </a:stretch>
+        </p:blipFill>
+        <p:spPr>
+          <a:xfrm>
+            <a:off x="4620295" y="1974225"/>
+            <a:ext cx="15141822" cy="11741775"/>
+          </a:xfrm>
+          <a:prstGeom prst="rect">
+            <a:avLst/>
+          </a:prstGeom>
+        </p:spPr>
+      </p:pic>
+    </p:spTree>
+    <p:extLst>
+      <p:ext uri="{BB962C8B-B14F-4D97-AF65-F5344CB8AC3E}">
+        <p14:creationId xmlns:p14="http://schemas.microsoft.com/office/powerpoint/2010/main" val="897796696"/>
+      </p:ext>
+    </p:extLst>
+  </p:cSld>
+  <p:clrMapOvr>
+    <a:masterClrMapping/>
+  </p:clrMapOvr>
+</p:sld>
+</file>
+
+<file path=ppt/slides/slide11.xml><?xml version="1.0" encoding="utf-8"?>
+<p:sld xmlns:a="http://schemas.openxmlformats.org/drawingml/2006/main" xmlns:r="http://schemas.openxmlformats.org/officeDocument/2006/relationships" xmlns:p="http://schemas.openxmlformats.org/presentationml/2006/main">
+  <p:cSld>
+    <p:bg>
+      <p:bgPr>
+        <a:blipFill dpi="0" rotWithShape="1">
+          <a:blip r:embed="rId2">
+            <a:lum/>
+          </a:blip>
+          <a:srcRect/>
+          <a:stretch>
+            <a:fillRect/>
+          </a:stretch>
+        </a:blipFill>
+        <a:effectLst/>
+      </p:bgPr>
+    </p:bg>
+    <p:spTree>
+      <p:nvGrpSpPr>
+        <p:cNvPr id="1" name="">
+          <a:extLst>
+            <a:ext uri="{FF2B5EF4-FFF2-40B4-BE49-F238E27FC236}">
+              <a16:creationId xmlns:a16="http://schemas.microsoft.com/office/drawing/2014/main" id="{E1A77D7B-B3B5-0BEC-15CD-51819927554C}"/>
+            </a:ext>
+          </a:extLst>
+        </p:cNvPr>
+        <p:cNvGrpSpPr/>
+        <p:nvPr/>
+      </p:nvGrpSpPr>
+      <p:grpSpPr>
+        <a:xfrm>
+          <a:off x="0" y="0"/>
+          <a:ext cx="0" cy="0"/>
+          <a:chOff x="0" y="0"/>
+          <a:chExt cx="0" cy="0"/>
+        </a:xfrm>
+      </p:grpSpPr>
+      <p:sp>
+        <p:nvSpPr>
+          <p:cNvPr id="10" name="Title 1">
+            <a:extLst>
+              <a:ext uri="{FF2B5EF4-FFF2-40B4-BE49-F238E27FC236}">
+                <a16:creationId xmlns:a16="http://schemas.microsoft.com/office/drawing/2014/main" id="{1E57A983-EB20-6E70-D729-D19F80C6AA3F}"/>
+              </a:ext>
+            </a:extLst>
+          </p:cNvPr>
+          <p:cNvSpPr>
+            <a:spLocks noGrp="1"/>
+          </p:cNvSpPr>
+          <p:nvPr>
+            <p:ph type="title"/>
+          </p:nvPr>
+        </p:nvSpPr>
+        <p:spPr>
+          <a:xfrm>
+            <a:off x="3631216" y="269297"/>
+            <a:ext cx="21029831" cy="2651126"/>
+          </a:xfrm>
+        </p:spPr>
+        <p:txBody>
+          <a:bodyPr>
+            <a:normAutofit/>
+          </a:bodyPr>
+          <a:lstStyle/>
+          <a:p>
+            <a:r>
+              <a:rPr lang="lt-LT" sz="5900" b="1" dirty="0">
+                <a:latin typeface="Arial" panose="020B0604020202020204" pitchFamily="34" charset="0"/>
+                <a:ea typeface="Inter" panose="020B0502030000000004" pitchFamily="34" charset="0"/>
+                <a:cs typeface="Arial" panose="020B0604020202020204" pitchFamily="34" charset="0"/>
+              </a:rPr>
+              <a:t>Panaudojimo atvejų diagrama</a:t>
+            </a:r>
+            <a:endParaRPr lang="en-US" sz="5900" b="1" dirty="0">
+              <a:latin typeface="Arial" panose="020B0604020202020204" pitchFamily="34" charset="0"/>
+              <a:ea typeface="Inter" panose="020B0502030000000004" pitchFamily="34" charset="0"/>
+              <a:cs typeface="Arial" panose="020B0604020202020204" pitchFamily="34" charset="0"/>
+            </a:endParaRPr>
+          </a:p>
+        </p:txBody>
+      </p:sp>
+      <p:sp>
+        <p:nvSpPr>
+          <p:cNvPr id="2" name="Slide Number Placeholder 1">
+            <a:extLst>
+              <a:ext uri="{FF2B5EF4-FFF2-40B4-BE49-F238E27FC236}">
+                <a16:creationId xmlns:a16="http://schemas.microsoft.com/office/drawing/2014/main" id="{83CCAD05-832E-6C65-6E5E-C9A7C4032CFA}"/>
+              </a:ext>
+            </a:extLst>
+          </p:cNvPr>
+          <p:cNvSpPr>
+            <a:spLocks noGrp="1"/>
+          </p:cNvSpPr>
+          <p:nvPr>
+            <p:ph type="sldNum" sz="quarter" idx="12"/>
+          </p:nvPr>
+        </p:nvSpPr>
+        <p:spPr/>
+        <p:txBody>
+          <a:bodyPr/>
+          <a:lstStyle/>
+          <a:p>
+            <a:r>
+              <a:rPr lang="lt-LT" sz="3600" dirty="0"/>
+              <a:t>10</a:t>
+            </a:r>
+          </a:p>
+        </p:txBody>
+      </p:sp>
+      <p:pic>
+        <p:nvPicPr>
+          <p:cNvPr id="6" name="Picture 5">
+            <a:extLst>
+              <a:ext uri="{FF2B5EF4-FFF2-40B4-BE49-F238E27FC236}">
+                <a16:creationId xmlns:a16="http://schemas.microsoft.com/office/drawing/2014/main" id="{1EE2F712-A7DB-3D77-D13C-C1D6CEC5ACE8}"/>
+              </a:ext>
+            </a:extLst>
+          </p:cNvPr>
+          <p:cNvPicPr>
+            <a:picLocks noChangeAspect="1"/>
+          </p:cNvPicPr>
+          <p:nvPr/>
+        </p:nvPicPr>
+        <p:blipFill>
+          <a:blip r:embed="rId3"/>
+          <a:stretch>
+            <a:fillRect/>
+          </a:stretch>
+        </p:blipFill>
+        <p:spPr>
+          <a:xfrm>
+            <a:off x="152918" y="2936496"/>
+            <a:ext cx="14018831" cy="10506455"/>
+          </a:xfrm>
+          <a:prstGeom prst="rect">
+            <a:avLst/>
+          </a:prstGeom>
+        </p:spPr>
+      </p:pic>
+      <p:pic>
+        <p:nvPicPr>
+          <p:cNvPr id="7" name="Picture 6">
+            <a:extLst>
+              <a:ext uri="{FF2B5EF4-FFF2-40B4-BE49-F238E27FC236}">
+                <a16:creationId xmlns:a16="http://schemas.microsoft.com/office/drawing/2014/main" id="{24826011-4B50-D999-D662-17887662F54B}"/>
+              </a:ext>
+            </a:extLst>
+          </p:cNvPr>
+          <p:cNvPicPr>
+            <a:picLocks noChangeAspect="1"/>
+          </p:cNvPicPr>
+          <p:nvPr/>
+        </p:nvPicPr>
+        <p:blipFill>
+          <a:blip r:embed="rId4"/>
+          <a:stretch>
+            <a:fillRect/>
+          </a:stretch>
+        </p:blipFill>
+        <p:spPr>
+          <a:xfrm>
+            <a:off x="14146131" y="6580882"/>
+            <a:ext cx="9824305" cy="4198622"/>
+          </a:xfrm>
+          <a:prstGeom prst="rect">
+            <a:avLst/>
+          </a:prstGeom>
+        </p:spPr>
+      </p:pic>
+    </p:spTree>
+    <p:extLst>
+      <p:ext uri="{BB962C8B-B14F-4D97-AF65-F5344CB8AC3E}">
+        <p14:creationId xmlns:p14="http://schemas.microsoft.com/office/powerpoint/2010/main" val="2009668715"/>
+      </p:ext>
+    </p:extLst>
+  </p:cSld>
+  <p:clrMapOvr>
+    <a:masterClrMapping/>
+  </p:clrMapOvr>
+</p:sld>
+</file>
+
+<file path=ppt/slides/slide12.xml><?xml version="1.0" encoding="utf-8"?>
+<p:sld xmlns:a="http://schemas.openxmlformats.org/drawingml/2006/main" xmlns:r="http://schemas.openxmlformats.org/officeDocument/2006/relationships" xmlns:p="http://schemas.openxmlformats.org/presentationml/2006/main">
+  <p:cSld>
+    <p:bg>
+      <p:bgPr>
+        <a:blipFill dpi="0" rotWithShape="1">
+          <a:blip r:embed="rId3">
+            <a:lum/>
+          </a:blip>
+          <a:srcRect/>
+          <a:stretch>
+            <a:fillRect/>
+          </a:stretch>
+        </a:blipFill>
+        <a:effectLst/>
+      </p:bgPr>
+    </p:bg>
+    <p:spTree>
+      <p:nvGrpSpPr>
+        <p:cNvPr id="1" name=""/>
+        <p:cNvGrpSpPr/>
+        <p:nvPr/>
+      </p:nvGrpSpPr>
+      <p:grpSpPr>
+        <a:xfrm>
+          <a:off x="0" y="0"/>
+          <a:ext cx="0" cy="0"/>
+          <a:chOff x="0" y="0"/>
+          <a:chExt cx="0" cy="0"/>
+        </a:xfrm>
+      </p:grpSpPr>
+      <p:sp>
+        <p:nvSpPr>
+          <p:cNvPr id="5" name="Title 1">
+            <a:extLst>
+              <a:ext uri="{FF2B5EF4-FFF2-40B4-BE49-F238E27FC236}">
+                <a16:creationId xmlns:a16="http://schemas.microsoft.com/office/drawing/2014/main" id="{50F2B085-A039-BC41-8AB9-1DFB69B06CAD}"/>
+              </a:ext>
+            </a:extLst>
+          </p:cNvPr>
+          <p:cNvSpPr>
+            <a:spLocks noGrp="1"/>
+          </p:cNvSpPr>
+          <p:nvPr>
+            <p:ph type="title"/>
+          </p:nvPr>
+        </p:nvSpPr>
+        <p:spPr>
+          <a:xfrm>
+            <a:off x="3631216" y="269297"/>
+            <a:ext cx="14904434" cy="2651126"/>
+          </a:xfrm>
+        </p:spPr>
+        <p:txBody>
+          <a:bodyPr>
+            <a:normAutofit/>
+          </a:bodyPr>
+          <a:lstStyle/>
+          <a:p>
+            <a:r>
+              <a:rPr lang="lt-LT" sz="6000" b="1" dirty="0">
+                <a:latin typeface="Arial" panose="020B0604020202020204" pitchFamily="34" charset="0"/>
+                <a:cs typeface="Arial" panose="020B0604020202020204" pitchFamily="34" charset="0"/>
+              </a:rPr>
+              <a:t>Duomenų bazės esybių-ryšių modelis</a:t>
+            </a:r>
+          </a:p>
+        </p:txBody>
+      </p:sp>
+      <p:pic>
+        <p:nvPicPr>
+          <p:cNvPr id="3" name="Picture 2">
+            <a:extLst>
+              <a:ext uri="{FF2B5EF4-FFF2-40B4-BE49-F238E27FC236}">
+                <a16:creationId xmlns:a16="http://schemas.microsoft.com/office/drawing/2014/main" id="{54AEE9AD-9034-E36B-0CC3-8FDA76C9139E}"/>
+              </a:ext>
+            </a:extLst>
+          </p:cNvPr>
+          <p:cNvPicPr>
+            <a:picLocks noChangeAspect="1"/>
+          </p:cNvPicPr>
+          <p:nvPr/>
+        </p:nvPicPr>
+        <p:blipFill>
+          <a:blip r:embed="rId4"/>
+          <a:stretch>
+            <a:fillRect/>
+          </a:stretch>
+        </p:blipFill>
+        <p:spPr>
+          <a:xfrm>
+            <a:off x="2626771" y="3094143"/>
+            <a:ext cx="19128870" cy="10621857"/>
+          </a:xfrm>
+          <a:prstGeom prst="rect">
+            <a:avLst/>
+          </a:prstGeom>
+        </p:spPr>
+      </p:pic>
+      <p:sp>
+        <p:nvSpPr>
+          <p:cNvPr id="2" name="Slide Number Placeholder 1">
+            <a:extLst>
+              <a:ext uri="{FF2B5EF4-FFF2-40B4-BE49-F238E27FC236}">
+                <a16:creationId xmlns:a16="http://schemas.microsoft.com/office/drawing/2014/main" id="{A5B559B8-0E9B-A983-C6D9-901595478C41}"/>
+              </a:ext>
+            </a:extLst>
+          </p:cNvPr>
+          <p:cNvSpPr>
+            <a:spLocks noGrp="1"/>
+          </p:cNvSpPr>
+          <p:nvPr>
+            <p:ph type="sldNum" sz="quarter" idx="12"/>
+          </p:nvPr>
+        </p:nvSpPr>
+        <p:spPr/>
+        <p:txBody>
+          <a:bodyPr/>
+          <a:lstStyle/>
+          <a:p>
+            <a:r>
+              <a:rPr lang="lt-LT" sz="3600" dirty="0"/>
+              <a:t>11</a:t>
+            </a:r>
+            <a:endParaRPr lang="en-US" sz="3600" dirty="0"/>
+          </a:p>
+        </p:txBody>
+      </p:sp>
+    </p:spTree>
+    <p:extLst>
+      <p:ext uri="{BB962C8B-B14F-4D97-AF65-F5344CB8AC3E}">
+        <p14:creationId xmlns:p14="http://schemas.microsoft.com/office/powerpoint/2010/main" val="1504982506"/>
+      </p:ext>
+    </p:extLst>
+  </p:cSld>
+  <p:clrMapOvr>
+    <a:masterClrMapping/>
+  </p:clrMapOvr>
+</p:sld>
+</file>
+
+<file path=ppt/slides/slide13.xml><?xml version="1.0" encoding="utf-8"?>
+<p:sld xmlns:a="http://schemas.openxmlformats.org/drawingml/2006/main" xmlns:r="http://schemas.openxmlformats.org/officeDocument/2006/relationships" xmlns:p="http://schemas.openxmlformats.org/presentationml/2006/main" show="0">
+  <p:cSld>
+    <p:bg>
+      <p:bgPr>
+        <a:blipFill dpi="0" rotWithShape="1">
+          <a:blip r:embed="rId3">
+            <a:lum/>
+          </a:blip>
+          <a:srcRect/>
+          <a:stretch>
+            <a:fillRect/>
+          </a:stretch>
+        </a:blipFill>
+        <a:effectLst/>
+      </p:bgPr>
+    </p:bg>
+    <p:spTree>
+      <p:nvGrpSpPr>
+        <p:cNvPr id="1" name="">
+          <a:extLst>
+            <a:ext uri="{FF2B5EF4-FFF2-40B4-BE49-F238E27FC236}">
+              <a16:creationId xmlns:a16="http://schemas.microsoft.com/office/drawing/2014/main" id="{4421F496-A378-6480-7F3F-1A8988153AF3}"/>
+            </a:ext>
+          </a:extLst>
+        </p:cNvPr>
+        <p:cNvGrpSpPr/>
+        <p:nvPr/>
+      </p:nvGrpSpPr>
+      <p:grpSpPr>
+        <a:xfrm>
+          <a:off x="0" y="0"/>
+          <a:ext cx="0" cy="0"/>
+          <a:chOff x="0" y="0"/>
+          <a:chExt cx="0" cy="0"/>
+        </a:xfrm>
+      </p:grpSpPr>
+      <p:sp>
+        <p:nvSpPr>
+          <p:cNvPr id="5" name="Title 1">
+            <a:extLst>
+              <a:ext uri="{FF2B5EF4-FFF2-40B4-BE49-F238E27FC236}">
+                <a16:creationId xmlns:a16="http://schemas.microsoft.com/office/drawing/2014/main" id="{1E7146C1-B33E-3ECF-FE34-21D988954AE3}"/>
+              </a:ext>
+            </a:extLst>
+          </p:cNvPr>
+          <p:cNvSpPr>
+            <a:spLocks noGrp="1"/>
+          </p:cNvSpPr>
+          <p:nvPr>
+            <p:ph type="title"/>
+          </p:nvPr>
+        </p:nvSpPr>
+        <p:spPr>
+          <a:xfrm>
+            <a:off x="3631216" y="269297"/>
+            <a:ext cx="14904434" cy="2651126"/>
+          </a:xfrm>
+        </p:spPr>
+        <p:txBody>
+          <a:bodyPr>
+            <a:normAutofit/>
+          </a:bodyPr>
+          <a:lstStyle/>
+          <a:p>
+            <a:r>
+              <a:rPr lang="lt-LT" sz="6000" b="1" dirty="0">
+                <a:latin typeface="Arial" panose="020B0604020202020204" pitchFamily="34" charset="0"/>
+                <a:cs typeface="Arial" panose="020B0604020202020204" pitchFamily="34" charset="0"/>
+              </a:rPr>
+              <a:t>Duomenų bazės modelis</a:t>
+            </a:r>
+          </a:p>
+        </p:txBody>
+      </p:sp>
+      <p:pic>
+        <p:nvPicPr>
+          <p:cNvPr id="6" name="Picture 5">
+            <a:extLst>
+              <a:ext uri="{FF2B5EF4-FFF2-40B4-BE49-F238E27FC236}">
+                <a16:creationId xmlns:a16="http://schemas.microsoft.com/office/drawing/2014/main" id="{1E5917BD-3993-302D-9834-50EF361604C4}"/>
+              </a:ext>
+            </a:extLst>
+          </p:cNvPr>
+          <p:cNvPicPr>
+            <a:picLocks noChangeAspect="1"/>
+          </p:cNvPicPr>
+          <p:nvPr/>
+        </p:nvPicPr>
+        <p:blipFill>
+          <a:blip r:embed="rId4"/>
+          <a:stretch>
+            <a:fillRect/>
+          </a:stretch>
+        </p:blipFill>
+        <p:spPr>
+          <a:xfrm>
+            <a:off x="1189754" y="2920424"/>
+            <a:ext cx="23261014" cy="10283512"/>
+          </a:xfrm>
+          <a:prstGeom prst="rect">
+            <a:avLst/>
+          </a:prstGeom>
+        </p:spPr>
+      </p:pic>
+      <p:sp>
+        <p:nvSpPr>
+          <p:cNvPr id="2" name="Slide Number Placeholder 1">
+            <a:extLst>
+              <a:ext uri="{FF2B5EF4-FFF2-40B4-BE49-F238E27FC236}">
+                <a16:creationId xmlns:a16="http://schemas.microsoft.com/office/drawing/2014/main" id="{E797DF00-D812-3E5E-C0D4-B596949781D4}"/>
+              </a:ext>
+            </a:extLst>
+          </p:cNvPr>
+          <p:cNvSpPr>
+            <a:spLocks noGrp="1"/>
+          </p:cNvSpPr>
+          <p:nvPr>
+            <p:ph type="sldNum" sz="quarter" idx="12"/>
+          </p:nvPr>
+        </p:nvSpPr>
+        <p:spPr/>
+        <p:txBody>
+          <a:bodyPr/>
+          <a:lstStyle/>
+          <a:p>
+            <a:r>
+              <a:rPr lang="lt-LT" sz="3600" dirty="0"/>
+              <a:t>12</a:t>
+            </a:r>
+          </a:p>
+        </p:txBody>
+      </p:sp>
+    </p:spTree>
+    <p:extLst>
+      <p:ext uri="{BB962C8B-B14F-4D97-AF65-F5344CB8AC3E}">
+        <p14:creationId xmlns:p14="http://schemas.microsoft.com/office/powerpoint/2010/main" val="46777873"/>
+      </p:ext>
+    </p:extLst>
+  </p:cSld>
+  <p:clrMapOvr>
+    <a:masterClrMapping/>
+  </p:clrMapOvr>
+</p:sld>
+</file>
+
+<file path=ppt/slides/slide14.xml><?xml version="1.0" encoding="utf-8"?>
+<p:sld xmlns:a="http://schemas.openxmlformats.org/drawingml/2006/main" xmlns:r="http://schemas.openxmlformats.org/officeDocument/2006/relationships" xmlns:p="http://schemas.openxmlformats.org/presentationml/2006/main">
+  <p:cSld>
+    <p:bg>
+      <p:bgPr>
+        <a:blipFill dpi="0" rotWithShape="1">
+          <a:blip r:embed="rId3">
+            <a:lum/>
+          </a:blip>
+          <a:srcRect/>
+          <a:stretch>
+            <a:fillRect/>
+          </a:stretch>
+        </a:blipFill>
+        <a:effectLst/>
+      </p:bgPr>
+    </p:bg>
+    <p:spTree>
+      <p:nvGrpSpPr>
+        <p:cNvPr id="1" name="">
+          <a:extLst>
+            <a:ext uri="{FF2B5EF4-FFF2-40B4-BE49-F238E27FC236}">
+              <a16:creationId xmlns:a16="http://schemas.microsoft.com/office/drawing/2014/main" id="{F4622C24-B3D5-4DDF-CB55-14435A8876D9}"/>
+            </a:ext>
+          </a:extLst>
+        </p:cNvPr>
+        <p:cNvGrpSpPr/>
+        <p:nvPr/>
+      </p:nvGrpSpPr>
+      <p:grpSpPr>
+        <a:xfrm>
+          <a:off x="0" y="0"/>
+          <a:ext cx="0" cy="0"/>
+          <a:chOff x="0" y="0"/>
+          <a:chExt cx="0" cy="0"/>
+        </a:xfrm>
+      </p:grpSpPr>
+      <p:sp>
+        <p:nvSpPr>
+          <p:cNvPr id="5" name="Title 1">
+            <a:extLst>
+              <a:ext uri="{FF2B5EF4-FFF2-40B4-BE49-F238E27FC236}">
+                <a16:creationId xmlns:a16="http://schemas.microsoft.com/office/drawing/2014/main" id="{06EFC3D0-032B-B51F-E9B1-13EC501D495C}"/>
+              </a:ext>
+            </a:extLst>
+          </p:cNvPr>
+          <p:cNvSpPr>
+            <a:spLocks noGrp="1"/>
+          </p:cNvSpPr>
+          <p:nvPr>
+            <p:ph type="title"/>
+          </p:nvPr>
+        </p:nvSpPr>
+        <p:spPr>
+          <a:xfrm>
+            <a:off x="3631216" y="269297"/>
+            <a:ext cx="12470175" cy="2651126"/>
+          </a:xfrm>
+        </p:spPr>
+        <p:txBody>
+          <a:bodyPr>
+            <a:normAutofit/>
+          </a:bodyPr>
+          <a:lstStyle/>
+          <a:p>
+            <a:r>
+              <a:rPr lang="lt-LT" sz="5900" b="1" dirty="0">
+                <a:latin typeface="Arial" panose="020B0604020202020204" pitchFamily="34" charset="0"/>
+                <a:ea typeface="Inter" panose="020B0502030000000004" pitchFamily="34" charset="0"/>
+                <a:cs typeface="Arial" panose="020B0604020202020204" pitchFamily="34" charset="0"/>
+              </a:rPr>
+              <a:t>Diegimo diagrama</a:t>
+            </a:r>
+            <a:endParaRPr lang="en-US" sz="5900" b="1" dirty="0">
+              <a:latin typeface="Arial" panose="020B0604020202020204" pitchFamily="34" charset="0"/>
+              <a:ea typeface="Inter" panose="020B0502030000000004" pitchFamily="34" charset="0"/>
+              <a:cs typeface="Arial" panose="020B0604020202020204" pitchFamily="34" charset="0"/>
+            </a:endParaRPr>
+          </a:p>
+        </p:txBody>
+      </p:sp>
+      <p:pic>
+        <p:nvPicPr>
+          <p:cNvPr id="4" name="Picture 3">
+            <a:extLst>
+              <a:ext uri="{FF2B5EF4-FFF2-40B4-BE49-F238E27FC236}">
+                <a16:creationId xmlns:a16="http://schemas.microsoft.com/office/drawing/2014/main" id="{9C860D56-69A0-3714-8A16-E41614D0F641}"/>
+              </a:ext>
+            </a:extLst>
+          </p:cNvPr>
+          <p:cNvPicPr>
+            <a:picLocks noChangeAspect="1"/>
+          </p:cNvPicPr>
+          <p:nvPr/>
+        </p:nvPicPr>
+        <p:blipFill>
+          <a:blip r:embed="rId4"/>
+          <a:stretch>
+            <a:fillRect/>
+          </a:stretch>
+        </p:blipFill>
+        <p:spPr>
+          <a:xfrm>
+            <a:off x="3017377" y="3745004"/>
+            <a:ext cx="18347658" cy="8866095"/>
+          </a:xfrm>
+          <a:prstGeom prst="rect">
+            <a:avLst/>
+          </a:prstGeom>
+        </p:spPr>
+      </p:pic>
+      <p:sp>
+        <p:nvSpPr>
+          <p:cNvPr id="2" name="Slide Number Placeholder 1">
+            <a:extLst>
+              <a:ext uri="{FF2B5EF4-FFF2-40B4-BE49-F238E27FC236}">
+                <a16:creationId xmlns:a16="http://schemas.microsoft.com/office/drawing/2014/main" id="{B4C5E6BE-83E2-6C07-A654-B953AB5D7BBD}"/>
+              </a:ext>
+            </a:extLst>
+          </p:cNvPr>
+          <p:cNvSpPr>
+            <a:spLocks noGrp="1"/>
+          </p:cNvSpPr>
+          <p:nvPr>
+            <p:ph type="sldNum" sz="quarter" idx="12"/>
+          </p:nvPr>
+        </p:nvSpPr>
+        <p:spPr/>
+        <p:txBody>
+          <a:bodyPr/>
+          <a:lstStyle/>
+          <a:p>
+            <a:r>
+              <a:rPr lang="lt-LT" sz="3600" dirty="0"/>
+              <a:t>13</a:t>
+            </a:r>
+          </a:p>
+        </p:txBody>
+      </p:sp>
+    </p:spTree>
+    <p:extLst>
+      <p:ext uri="{BB962C8B-B14F-4D97-AF65-F5344CB8AC3E}">
+        <p14:creationId xmlns:p14="http://schemas.microsoft.com/office/powerpoint/2010/main" val="2146565914"/>
+      </p:ext>
+    </p:extLst>
+  </p:cSld>
+  <p:clrMapOvr>
+    <a:masterClrMapping/>
+  </p:clrMapOvr>
+</p:sld>
+</file>
+
+<file path=ppt/slides/slide15.xml><?xml version="1.0" encoding="utf-8"?>
 <p:sld xmlns:a="http://schemas.openxmlformats.org/drawingml/2006/main" xmlns:r="http://schemas.openxmlformats.org/officeDocument/2006/relationships" xmlns:p="http://schemas.openxmlformats.org/presentationml/2006/main">
   <p:cSld>
     <p:bg>
@@ -4112,10 +5002,10 @@
       </p:sp>
       <p:sp>
         <p:nvSpPr>
-          <p:cNvPr id="2" name="TextBox 1">
+          <p:cNvPr id="4" name="TextBox 3">
             <a:extLst>
               <a:ext uri="{FF2B5EF4-FFF2-40B4-BE49-F238E27FC236}">
-                <a16:creationId xmlns:a16="http://schemas.microsoft.com/office/drawing/2014/main" id="{52151EF8-223A-CAA9-20D7-0FAD0F78E7BC}"/>
+                <a16:creationId xmlns:a16="http://schemas.microsoft.com/office/drawing/2014/main" id="{2C2714BD-02FF-B945-990E-E6BF883F9517}"/>
               </a:ext>
             </a:extLst>
           </p:cNvPr>
@@ -4124,8 +5014,8 @@
         </p:nvSpPr>
         <p:spPr>
           <a:xfrm>
-            <a:off x="2103120" y="3712464"/>
-            <a:ext cx="20793456" cy="769441"/>
+            <a:off x="2847159" y="5657671"/>
+            <a:ext cx="9105179" cy="1200329"/>
           </a:xfrm>
           <a:prstGeom prst="rect">
             <a:avLst/>
@@ -4133,16 +5023,301 @@
           <a:noFill/>
         </p:spPr>
         <p:txBody>
-          <a:bodyPr wrap="square" rtlCol="0">
+          <a:bodyPr wrap="square">
             <a:spAutoFit/>
           </a:bodyPr>
           <a:lstStyle/>
           <a:p>
-            <a:pPr algn="ctr"/>
-            <a:r>
-              <a:rPr lang="lt-LT" sz="4400" dirty="0"/>
-              <a:t>WIP. </a:t>
-            </a:r>
+            <a:r>
+              <a:rPr lang="lt-LT" noProof="0" dirty="0"/>
+              <a:t>Testų kiekis – 256</a:t>
+            </a:r>
+          </a:p>
+          <a:p>
+            <a:r>
+              <a:rPr lang="lt-LT" dirty="0"/>
+              <a:t>Naudotas t</a:t>
+            </a:r>
+            <a:r>
+              <a:rPr lang="lt-LT" noProof="0" dirty="0"/>
+              <a:t>estavimo įrankis – xUnit biblioteka</a:t>
+            </a:r>
+          </a:p>
+        </p:txBody>
+      </p:sp>
+      <p:sp>
+        <p:nvSpPr>
+          <p:cNvPr id="7" name="TextBox 6">
+            <a:extLst>
+              <a:ext uri="{FF2B5EF4-FFF2-40B4-BE49-F238E27FC236}">
+                <a16:creationId xmlns:a16="http://schemas.microsoft.com/office/drawing/2014/main" id="{BEA04E80-22B6-9A22-1F66-B677C04B0A6C}"/>
+              </a:ext>
+            </a:extLst>
+          </p:cNvPr>
+          <p:cNvSpPr txBox="1"/>
+          <p:nvPr/>
+        </p:nvSpPr>
+        <p:spPr>
+          <a:xfrm>
+            <a:off x="2847159" y="5060186"/>
+            <a:ext cx="3589093" cy="707886"/>
+          </a:xfrm>
+          <a:prstGeom prst="rect">
+            <a:avLst/>
+          </a:prstGeom>
+          <a:noFill/>
+        </p:spPr>
+        <p:txBody>
+          <a:bodyPr wrap="square">
+            <a:spAutoFit/>
+          </a:bodyPr>
+          <a:lstStyle/>
+          <a:p>
+            <a:r>
+              <a:rPr lang="lt-LT" sz="4000" b="1" noProof="0" dirty="0"/>
+              <a:t>Vienetų testai</a:t>
+            </a:r>
+          </a:p>
+        </p:txBody>
+      </p:sp>
+      <p:sp>
+        <p:nvSpPr>
+          <p:cNvPr id="9" name="TextBox 8">
+            <a:extLst>
+              <a:ext uri="{FF2B5EF4-FFF2-40B4-BE49-F238E27FC236}">
+                <a16:creationId xmlns:a16="http://schemas.microsoft.com/office/drawing/2014/main" id="{A0C9775E-66FC-2366-8E9F-EC74C615AACC}"/>
+              </a:ext>
+            </a:extLst>
+          </p:cNvPr>
+          <p:cNvSpPr txBox="1"/>
+          <p:nvPr/>
+        </p:nvSpPr>
+        <p:spPr>
+          <a:xfrm>
+            <a:off x="6436252" y="8940814"/>
+            <a:ext cx="12188952" cy="2308324"/>
+          </a:xfrm>
+          <a:prstGeom prst="rect">
+            <a:avLst/>
+          </a:prstGeom>
+          <a:noFill/>
+        </p:spPr>
+        <p:txBody>
+          <a:bodyPr wrap="square">
+            <a:spAutoFit/>
+          </a:bodyPr>
+          <a:lstStyle/>
+          <a:p>
+            <a:r>
+              <a:rPr lang="lt-LT" noProof="0" dirty="0"/>
+              <a:t>Tikslas - </a:t>
+            </a:r>
+            <a:r>
+              <a:rPr lang="lt-LT" sz="3600" noProof="0" dirty="0">
+                <a:effectLst/>
+                <a:latin typeface="Times New Roman" panose="02020603050405020304" pitchFamily="18" charset="0"/>
+                <a:ea typeface="Calibri" panose="020F0502020204030204" pitchFamily="34" charset="0"/>
+              </a:rPr>
+              <a:t>Serverinės dalies metodai turi būti padengti bent 85% vienetų testais, turi būti padengta bent </a:t>
+            </a:r>
+            <a:r>
+              <a:rPr lang="lt-LT" dirty="0">
+                <a:latin typeface="Times New Roman" panose="02020603050405020304" pitchFamily="18" charset="0"/>
+                <a:ea typeface="Calibri" panose="020F0502020204030204" pitchFamily="34" charset="0"/>
+              </a:rPr>
+              <a:t>70% bendrų eilučių</a:t>
+            </a:r>
+            <a:endParaRPr lang="lt-LT" sz="3600" noProof="0" dirty="0">
+              <a:effectLst/>
+              <a:latin typeface="Times New Roman" panose="02020603050405020304" pitchFamily="18" charset="0"/>
+              <a:ea typeface="Calibri" panose="020F0502020204030204" pitchFamily="34" charset="0"/>
+            </a:endParaRPr>
+          </a:p>
+          <a:p>
+            <a:r>
+              <a:rPr lang="lt-LT" sz="3600" noProof="0" dirty="0">
+                <a:effectLst/>
+                <a:latin typeface="Times New Roman" panose="02020603050405020304" pitchFamily="18" charset="0"/>
+                <a:ea typeface="Calibri" panose="020F0502020204030204" pitchFamily="34" charset="0"/>
+              </a:rPr>
+              <a:t>Padengta </a:t>
+            </a:r>
+            <a:r>
+              <a:rPr lang="lt-LT" dirty="0">
+                <a:latin typeface="Times New Roman" panose="02020603050405020304" pitchFamily="18" charset="0"/>
+                <a:ea typeface="Calibri" panose="020F0502020204030204" pitchFamily="34" charset="0"/>
+              </a:rPr>
+              <a:t>-</a:t>
+            </a:r>
+            <a:r>
+              <a:rPr lang="lt-LT" sz="3600" noProof="0" dirty="0">
+                <a:effectLst/>
+                <a:latin typeface="Times New Roman" panose="02020603050405020304" pitchFamily="18" charset="0"/>
+                <a:ea typeface="Calibri" panose="020F0502020204030204" pitchFamily="34" charset="0"/>
+              </a:rPr>
+              <a:t> </a:t>
+            </a:r>
+            <a:r>
+              <a:rPr lang="lt-LT" dirty="0">
+                <a:latin typeface="Times New Roman" panose="02020603050405020304" pitchFamily="18" charset="0"/>
+                <a:ea typeface="Calibri" panose="020F0502020204030204" pitchFamily="34" charset="0"/>
+              </a:rPr>
+              <a:t>90,5</a:t>
+            </a:r>
+            <a:r>
+              <a:rPr lang="lt-LT" sz="3600" noProof="0" dirty="0">
+                <a:effectLst/>
+                <a:latin typeface="Times New Roman" panose="02020603050405020304" pitchFamily="18" charset="0"/>
+                <a:ea typeface="Calibri" panose="020F0502020204030204" pitchFamily="34" charset="0"/>
+              </a:rPr>
+              <a:t>% serverio dalies metodai</a:t>
+            </a:r>
+          </a:p>
+          <a:p>
+            <a:r>
+              <a:rPr lang="lt-LT" sz="3600" noProof="0" dirty="0">
+                <a:effectLst/>
+                <a:latin typeface="Times New Roman" panose="02020603050405020304" pitchFamily="18" charset="0"/>
+                <a:ea typeface="Calibri" panose="020F0502020204030204" pitchFamily="34" charset="0"/>
+              </a:rPr>
+              <a:t>Padengta – 75,7% serverio dalies eilučių</a:t>
+            </a:r>
+          </a:p>
+        </p:txBody>
+      </p:sp>
+      <p:sp>
+        <p:nvSpPr>
+          <p:cNvPr id="11" name="TextBox 10">
+            <a:extLst>
+              <a:ext uri="{FF2B5EF4-FFF2-40B4-BE49-F238E27FC236}">
+                <a16:creationId xmlns:a16="http://schemas.microsoft.com/office/drawing/2014/main" id="{A42EDD9E-B122-7D30-DC31-28802F00469C}"/>
+              </a:ext>
+            </a:extLst>
+          </p:cNvPr>
+          <p:cNvSpPr txBox="1"/>
+          <p:nvPr/>
+        </p:nvSpPr>
+        <p:spPr>
+          <a:xfrm>
+            <a:off x="6436252" y="8292465"/>
+            <a:ext cx="12188952" cy="707886"/>
+          </a:xfrm>
+          <a:prstGeom prst="rect">
+            <a:avLst/>
+          </a:prstGeom>
+          <a:noFill/>
+        </p:spPr>
+        <p:txBody>
+          <a:bodyPr wrap="square">
+            <a:spAutoFit/>
+          </a:bodyPr>
+          <a:lstStyle/>
+          <a:p>
+            <a:r>
+              <a:rPr lang="lt-LT" sz="4000" b="1" noProof="0" dirty="0"/>
+              <a:t>Padengiamumas</a:t>
+            </a:r>
+          </a:p>
+        </p:txBody>
+      </p:sp>
+      <p:sp>
+        <p:nvSpPr>
+          <p:cNvPr id="12" name="TextBox 11">
+            <a:extLst>
+              <a:ext uri="{FF2B5EF4-FFF2-40B4-BE49-F238E27FC236}">
+                <a16:creationId xmlns:a16="http://schemas.microsoft.com/office/drawing/2014/main" id="{B9BC5759-248F-FFAD-19C4-C7910B2AF8AC}"/>
+              </a:ext>
+            </a:extLst>
+          </p:cNvPr>
+          <p:cNvSpPr txBox="1"/>
+          <p:nvPr/>
+        </p:nvSpPr>
+        <p:spPr>
+          <a:xfrm>
+            <a:off x="15808783" y="5240892"/>
+            <a:ext cx="3589093" cy="707886"/>
+          </a:xfrm>
+          <a:prstGeom prst="rect">
+            <a:avLst/>
+          </a:prstGeom>
+          <a:noFill/>
+        </p:spPr>
+        <p:txBody>
+          <a:bodyPr wrap="square">
+            <a:spAutoFit/>
+          </a:bodyPr>
+          <a:lstStyle/>
+          <a:p>
+            <a:r>
+              <a:rPr lang="lt-LT" sz="4000" b="1" noProof="0" dirty="0"/>
+              <a:t>Klientinė dalis</a:t>
+            </a:r>
+            <a:endParaRPr lang="lt-LT" sz="4000" b="1" dirty="0"/>
+          </a:p>
+        </p:txBody>
+      </p:sp>
+      <p:sp>
+        <p:nvSpPr>
+          <p:cNvPr id="14" name="TextBox 13">
+            <a:extLst>
+              <a:ext uri="{FF2B5EF4-FFF2-40B4-BE49-F238E27FC236}">
+                <a16:creationId xmlns:a16="http://schemas.microsoft.com/office/drawing/2014/main" id="{36B33A02-B050-2E64-790D-CD2877CFEC2C}"/>
+              </a:ext>
+            </a:extLst>
+          </p:cNvPr>
+          <p:cNvSpPr txBox="1"/>
+          <p:nvPr/>
+        </p:nvSpPr>
+        <p:spPr>
+          <a:xfrm>
+            <a:off x="13965776" y="6108430"/>
+            <a:ext cx="9318856" cy="646331"/>
+          </a:xfrm>
+          <a:prstGeom prst="rect">
+            <a:avLst/>
+          </a:prstGeom>
+          <a:noFill/>
+        </p:spPr>
+        <p:txBody>
+          <a:bodyPr wrap="square">
+            <a:spAutoFit/>
+          </a:bodyPr>
+          <a:lstStyle/>
+          <a:p>
+            <a:r>
+              <a:rPr lang="lt-LT" dirty="0"/>
+              <a:t>Klientinė dalis testuota ranka be įrankių pagalbos</a:t>
+            </a:r>
+            <a:endParaRPr lang="lt-LT" noProof="0" dirty="0"/>
+          </a:p>
+        </p:txBody>
+      </p:sp>
+      <p:sp>
+        <p:nvSpPr>
+          <p:cNvPr id="2" name="Slide Number Placeholder 1">
+            <a:extLst>
+              <a:ext uri="{FF2B5EF4-FFF2-40B4-BE49-F238E27FC236}">
+                <a16:creationId xmlns:a16="http://schemas.microsoft.com/office/drawing/2014/main" id="{B11379C9-C1BD-3213-61A3-DF9DFE731048}"/>
+              </a:ext>
+            </a:extLst>
+          </p:cNvPr>
+          <p:cNvSpPr>
+            <a:spLocks noGrp="1"/>
+          </p:cNvSpPr>
+          <p:nvPr>
+            <p:ph type="sldNum" sz="quarter" idx="12"/>
+          </p:nvPr>
+        </p:nvSpPr>
+        <p:spPr/>
+        <p:txBody>
+          <a:bodyPr/>
+          <a:lstStyle/>
+          <a:p>
+            <a:r>
+              <a:rPr lang="lt-LT" sz="3600" dirty="0"/>
+              <a:t>14</a:t>
+            </a:r>
+            <a:endParaRPr lang="en-US" sz="3600" dirty="0"/>
           </a:p>
         </p:txBody>
       </p:sp>
@@ -4159,7 +5334,7 @@
 </p:sld>
 </file>
 
-<file path=ppt/slides/slide11.xml><?xml version="1.0" encoding="utf-8"?>
+<file path=ppt/slides/slide16.xml><?xml version="1.0" encoding="utf-8"?>
 <p:sld xmlns:a="http://schemas.openxmlformats.org/drawingml/2006/main" xmlns:r="http://schemas.openxmlformats.org/officeDocument/2006/relationships" xmlns:p="http://schemas.openxmlformats.org/presentationml/2006/main">
   <p:cSld>
     <p:bg>
@@ -4242,10 +5417,10 @@
       </p:sp>
       <p:sp>
         <p:nvSpPr>
-          <p:cNvPr id="2" name="TextBox 1">
+          <p:cNvPr id="4" name="TextBox 3">
             <a:extLst>
               <a:ext uri="{FF2B5EF4-FFF2-40B4-BE49-F238E27FC236}">
-                <a16:creationId xmlns:a16="http://schemas.microsoft.com/office/drawing/2014/main" id="{D47CD5EB-1714-AD4E-BE12-97AF3EA8DAA3}"/>
+                <a16:creationId xmlns:a16="http://schemas.microsoft.com/office/drawing/2014/main" id="{B05B3DE5-290C-4AD4-07C3-8DB2EF9F94D3}"/>
               </a:ext>
             </a:extLst>
           </p:cNvPr>
@@ -4254,8 +5429,8 @@
         </p:nvSpPr>
         <p:spPr>
           <a:xfrm>
-            <a:off x="2103120" y="3712464"/>
-            <a:ext cx="20793456" cy="769441"/>
+            <a:off x="950976" y="3995678"/>
+            <a:ext cx="21755146" cy="8956298"/>
           </a:xfrm>
           <a:prstGeom prst="rect">
             <a:avLst/>
@@ -4263,16 +5438,88 @@
           <a:noFill/>
         </p:spPr>
         <p:txBody>
-          <a:bodyPr wrap="square" rtlCol="0">
+          <a:bodyPr wrap="square">
             <a:spAutoFit/>
           </a:bodyPr>
           <a:lstStyle/>
           <a:p>
-            <a:pPr algn="ctr"/>
-            <a:r>
-              <a:rPr lang="lt-LT" sz="4400" dirty="0"/>
-              <a:t>WIP. </a:t>
-            </a:r>
+            <a:pPr marL="742950" indent="-742950">
+              <a:buFont typeface="+mj-lt"/>
+              <a:buAutoNum type="arabicPeriod"/>
+            </a:pPr>
+            <a:r>
+              <a:rPr lang="lt-LT" dirty="0"/>
+              <a:t>Konkurentų analizės metu, nustatyta, jog esamos sistemos/alternatyvos suteikia tik komunikacijos galimybę tiesiogiai su savininku. Jos skirtos plačiajai auditorijai. Kurtas įrankis sprendžia problemą bei susistemizuoja rezervacijos procesą, leidžiantį įmonės/draugų rato asmenims lengviau ir su geresniu matomumu skolintis įrangą.</a:t>
+            </a:r>
+          </a:p>
+          <a:p>
+            <a:pPr marL="742950" indent="-742950">
+              <a:buFont typeface="+mj-lt"/>
+              <a:buAutoNum type="arabicPeriod"/>
+            </a:pPr>
+            <a:r>
+              <a:rPr lang="lt-LT" dirty="0"/>
+              <a:t>Sukurta sistema suprojektuota akcentuojant rezervacijos galimybę, paprastumą bei svarbiausia matomumą kitiems naudotojams. Naudotojo sąsaja projektuota pirmiausiai atsižvelgiant į mobiliąją aplikaciją.</a:t>
+            </a:r>
+          </a:p>
+          <a:p>
+            <a:pPr marL="742950" indent="-742950">
+              <a:buFont typeface="+mj-lt"/>
+              <a:buAutoNum type="arabicPeriod"/>
+            </a:pPr>
+            <a:r>
+              <a:rPr lang="lt-LT" dirty="0"/>
+              <a:t>Suprojektuota sistema naudotojo sąsajoje realizuota tiek naršyklėje, tiek dedikuotoje aplikacijoje, palengvinant koregavimus įrangos nuotraukoms. Palengvinti prisijungimą prie aplikacijos – pridėta galimybė prisijungti naudojant išorines paskyras (Gmail,Facebook,Microsoft)</a:t>
+            </a:r>
+          </a:p>
+          <a:p>
+            <a:pPr marL="742950" indent="-742950">
+              <a:buFont typeface="+mj-lt"/>
+              <a:buAutoNum type="arabicPeriod"/>
+            </a:pPr>
+            <a:r>
+              <a:rPr lang="lt-LT" dirty="0"/>
+              <a:t>Sistemos serverinė dalis patalpinta AWS debesijos paslaugose. Atskiriant duomenų bazę įprastiems duomenims ir papildoma talpykla paveikslėlių tipo failams. Naudotojo sąsajai galima aplikacija gali būti sudiegta Android/iOS įrenginiuose aplikaciją pasidalinus įmonės/draugų tarpe</a:t>
+            </a:r>
+          </a:p>
+          <a:p>
+            <a:pPr marL="742950" indent="-742950">
+              <a:buFont typeface="+mj-lt"/>
+              <a:buAutoNum type="arabicPeriod"/>
+            </a:pPr>
+            <a:r>
+              <a:rPr lang="lt-LT" dirty="0"/>
+              <a:t>Sukurtai platformai parašyta 256 vienetų testų padengti 75% serverinės dalies kodo eilučių, testuojant teigiamus bei neigiamus atsakymus iš kvietimų. Didesnį padengimą pasiekti yra nerealistiška, kadangi metodai naudoja išorinius autentifikacijos metodus, kurie neturi testinių variantų (Firebase, OAuth). Naudotojo sąsajai sukurtas naudotojo vadovas, nurodantis reikalingus veiksmus sistemoje iš savininko bei įprasto vartotojo pozicijos.</a:t>
+            </a:r>
+          </a:p>
+        </p:txBody>
+      </p:sp>
+      <p:sp>
+        <p:nvSpPr>
+          <p:cNvPr id="2" name="Slide Number Placeholder 1">
+            <a:extLst>
+              <a:ext uri="{FF2B5EF4-FFF2-40B4-BE49-F238E27FC236}">
+                <a16:creationId xmlns:a16="http://schemas.microsoft.com/office/drawing/2014/main" id="{BD4B563F-8760-FD72-3BE5-5B48CB825D18}"/>
+              </a:ext>
+            </a:extLst>
+          </p:cNvPr>
+          <p:cNvSpPr>
+            <a:spLocks noGrp="1"/>
+          </p:cNvSpPr>
+          <p:nvPr>
+            <p:ph type="sldNum" sz="quarter" idx="12"/>
+          </p:nvPr>
+        </p:nvSpPr>
+        <p:spPr/>
+        <p:txBody>
+          <a:bodyPr/>
+          <a:lstStyle/>
+          <a:p>
+            <a:r>
+              <a:rPr lang="lt-LT" sz="3600" dirty="0"/>
+              <a:t>15</a:t>
+            </a:r>
+            <a:endParaRPr lang="en-US" sz="3600" dirty="0"/>
           </a:p>
         </p:txBody>
       </p:sp>
@@ -4335,7 +5582,7 @@
         <p:spPr>
           <a:xfrm>
             <a:off x="751699" y="4099033"/>
-            <a:ext cx="11592701" cy="1724896"/>
+            <a:ext cx="11592701" cy="1166281"/>
           </a:xfrm>
           <a:prstGeom prst="rect">
             <a:avLst/>
@@ -4348,12 +5595,10 @@
           </a:bodyPr>
           <a:lstStyle/>
           <a:p>
-            <a:pPr marL="742950" indent="-742950">
+            <a:pPr>
               <a:lnSpc>
                 <a:spcPct val="110000"/>
               </a:lnSpc>
-              <a:buFont typeface="Arial" panose="020B0604020202020204" pitchFamily="34" charset="0"/>
-              <a:buChar char="•"/>
             </a:pPr>
             <a:r>
               <a:rPr lang="lt-LT" sz="3300" b="1" dirty="0">
@@ -4437,8 +5682,8 @@
         </p:nvSpPr>
         <p:spPr>
           <a:xfrm>
-            <a:off x="1005840" y="6510528"/>
-            <a:ext cx="11185366" cy="2862322"/>
+            <a:off x="804671" y="7046082"/>
+            <a:ext cx="11592701" cy="3970318"/>
           </a:xfrm>
           <a:prstGeom prst="rect">
             <a:avLst/>
@@ -4460,9 +5705,9 @@
             <a:endParaRPr lang="lt-LT" b="1" dirty="0"/>
           </a:p>
           <a:p>
-            <a:pPr marL="571500" indent="-571500">
-              <a:buFont typeface="Arial" panose="020B0604020202020204" pitchFamily="34" charset="0"/>
-              <a:buChar char="•"/>
+            <a:pPr marL="742950" indent="-742950">
+              <a:buFont typeface="+mj-lt"/>
+              <a:buAutoNum type="arabicPeriod"/>
             </a:pPr>
             <a:r>
               <a:rPr lang="lt-LT" dirty="0"/>
@@ -4470,9 +5715,9 @@
             </a:r>
           </a:p>
           <a:p>
-            <a:pPr marL="571500" indent="-571500">
-              <a:buFont typeface="Arial" panose="020B0604020202020204" pitchFamily="34" charset="0"/>
-              <a:buChar char="•"/>
+            <a:pPr marL="742950" indent="-742950">
+              <a:buFont typeface="+mj-lt"/>
+              <a:buAutoNum type="arabicPeriod"/>
             </a:pPr>
             <a:r>
               <a:rPr lang="lt-LT" dirty="0"/>
@@ -4480,14 +5725,63 @@
             </a:r>
           </a:p>
           <a:p>
-            <a:pPr marL="571500" indent="-571500">
-              <a:buFont typeface="Arial" panose="020B0604020202020204" pitchFamily="34" charset="0"/>
-              <a:buChar char="•"/>
+            <a:pPr marL="742950" indent="-742950">
+              <a:buFont typeface="+mj-lt"/>
+              <a:buAutoNum type="arabicPeriod"/>
             </a:pPr>
             <a:r>
               <a:rPr lang="lt-LT" dirty="0"/>
-              <a:t>Ištestuoti sukurtą platformą</a:t>
-            </a:r>
+              <a:t>Realizuoti suprojektuotą sistemą</a:t>
+            </a:r>
+          </a:p>
+          <a:p>
+            <a:pPr marL="742950" indent="-742950">
+              <a:buFont typeface="+mj-lt"/>
+              <a:buAutoNum type="arabicPeriod"/>
+            </a:pPr>
+            <a:r>
+              <a:rPr lang="lt-LT" dirty="0"/>
+              <a:t>Sistemą patalpinti debesijos paslaugų platformoje</a:t>
+            </a:r>
+          </a:p>
+          <a:p>
+            <a:pPr marL="742950" indent="-742950">
+              <a:buFont typeface="+mj-lt"/>
+              <a:buAutoNum type="arabicPeriod"/>
+            </a:pPr>
+            <a:r>
+              <a:rPr lang="lt-LT" dirty="0"/>
+              <a:t>Ištestuoti sukurtą platformą ir parengti naudotojo vadovą</a:t>
+            </a:r>
+          </a:p>
+        </p:txBody>
+      </p:sp>
+      <p:sp>
+        <p:nvSpPr>
+          <p:cNvPr id="2" name="Slide Number Placeholder 1">
+            <a:extLst>
+              <a:ext uri="{FF2B5EF4-FFF2-40B4-BE49-F238E27FC236}">
+                <a16:creationId xmlns:a16="http://schemas.microsoft.com/office/drawing/2014/main" id="{7B09A046-03EB-E94A-434A-5C00D3E3B311}"/>
+              </a:ext>
+            </a:extLst>
+          </p:cNvPr>
+          <p:cNvSpPr>
+            <a:spLocks noGrp="1"/>
+          </p:cNvSpPr>
+          <p:nvPr>
+            <p:ph type="sldNum" sz="quarter" idx="12"/>
+          </p:nvPr>
+        </p:nvSpPr>
+        <p:spPr/>
+        <p:txBody>
+          <a:bodyPr/>
+          <a:lstStyle/>
+          <a:p>
+            <a:fld id="{29B01A02-16AD-7D4A-AF4C-AE522BCC74EA}" type="slidenum">
+              <a:rPr lang="en-US" sz="3600" smtClean="0"/>
+              <a:t>2</a:t>
+            </a:fld>
+            <a:endParaRPr lang="en-US" sz="3200" dirty="0"/>
           </a:p>
         </p:txBody>
       </p:sp>
@@ -4600,14 +5894,14 @@
           <p:nvPr>
             <p:extLst>
               <p:ext uri="{D42A27DB-BD31-4B8C-83A1-F6EECF244321}">
-                <p14:modId xmlns:p14="http://schemas.microsoft.com/office/powerpoint/2010/main" val="3971155854"/>
+                <p14:modId xmlns:p14="http://schemas.microsoft.com/office/powerpoint/2010/main" val="1744267582"/>
               </p:ext>
             </p:extLst>
           </p:nvPr>
         </p:nvGraphicFramePr>
         <p:xfrm>
-          <a:off x="680454" y="3657599"/>
-          <a:ext cx="23039084" cy="8650225"/>
+          <a:off x="671664" y="4773168"/>
+          <a:ext cx="23039084" cy="5952744"/>
         </p:xfrm>
         <a:graphic>
           <a:graphicData uri="http://schemas.openxmlformats.org/drawingml/2006/table">
@@ -4645,7 +5939,7 @@
                   </a:extLst>
                 </a:gridCol>
               </a:tblGrid>
-              <a:tr h="1730045">
+              <a:tr h="850392">
                 <a:tc>
                   <a:txBody>
                     <a:bodyPr/>
@@ -4665,9 +5959,18 @@
                     <a:lstStyle/>
                     <a:p>
                       <a:r>
-                        <a:rPr lang="lt-LT" dirty="0"/>
-                        <a:t>Konkurentas A</a:t>
+                        <a:rPr lang="lt-LT" sz="3600" b="1" kern="1200" dirty="0">
+                          <a:solidFill>
+                            <a:schemeClr val="lt1"/>
+                          </a:solidFill>
+                          <a:effectLst/>
+                          <a:latin typeface="+mn-lt"/>
+                          <a:ea typeface="+mn-ea"/>
+                          <a:cs typeface="+mn-cs"/>
+                        </a:rPr>
+                        <a:t>Peerby</a:t>
                       </a:r>
+                      <a:endParaRPr lang="lt-LT" dirty="0"/>
                     </a:p>
                   </a:txBody>
                   <a:tcPr/>
@@ -4678,9 +5981,18 @@
                     <a:lstStyle/>
                     <a:p>
                       <a:r>
-                        <a:rPr lang="lt-LT" dirty="0"/>
-                        <a:t>Konkurentas B</a:t>
+                        <a:rPr lang="lt-LT" sz="3600" b="1" kern="1200" dirty="0">
+                          <a:solidFill>
+                            <a:schemeClr val="lt1"/>
+                          </a:solidFill>
+                          <a:effectLst/>
+                          <a:latin typeface="+mn-lt"/>
+                          <a:ea typeface="+mn-ea"/>
+                          <a:cs typeface="+mn-cs"/>
+                        </a:rPr>
+                        <a:t>Olio</a:t>
                       </a:r>
+                      <a:endParaRPr lang="lt-LT" dirty="0"/>
                     </a:p>
                   </a:txBody>
                   <a:tcPr/>
@@ -4704,12 +6016,24 @@
                   </a:ext>
                 </a:extLst>
               </a:tr>
-              <a:tr h="1730045">
+              <a:tr h="850392">
                 <a:tc>
                   <a:txBody>
                     <a:bodyPr/>
                     <a:lstStyle/>
                     <a:p>
+                      <a:r>
+                        <a:rPr lang="lt-LT" sz="3600" kern="1200" dirty="0">
+                          <a:solidFill>
+                            <a:schemeClr val="dk1"/>
+                          </a:solidFill>
+                          <a:effectLst/>
+                          <a:latin typeface="+mn-lt"/>
+                          <a:ea typeface="+mn-ea"/>
+                          <a:cs typeface="+mn-cs"/>
+                        </a:rPr>
+                        <a:t>Prekių apmokestinimas</a:t>
+                      </a:r>
                       <a:endParaRPr lang="lt-LT" dirty="0"/>
                     </a:p>
                   </a:txBody>
@@ -4720,30 +6044,117 @@
                     <a:bodyPr/>
                     <a:lstStyle/>
                     <a:p>
-                      <a:endParaRPr lang="lt-LT"/>
+                      <a:pPr marL="0" algn="l" defTabSz="1828709" rtl="0" eaLnBrk="1" latinLnBrk="0" hangingPunct="1">
+                        <a:spcBef>
+                          <a:spcPts val="300"/>
+                        </a:spcBef>
+                        <a:spcAft>
+                          <a:spcPts val="300"/>
+                        </a:spcAft>
+                        <a:buNone/>
+                      </a:pPr>
+                      <a:r>
+                        <a:rPr lang="lt-LT" sz="3600" kern="1200" dirty="0">
+                          <a:solidFill>
+                            <a:schemeClr val="dk1"/>
+                          </a:solidFill>
+                          <a:effectLst/>
+                          <a:latin typeface="+mn-lt"/>
+                          <a:ea typeface="+mn-ea"/>
+                          <a:cs typeface="+mn-cs"/>
+                        </a:rPr>
+                        <a:t>Galimas</a:t>
+                      </a:r>
+                      <a:endParaRPr lang="en-GB" sz="3600" kern="1200" dirty="0">
+                        <a:solidFill>
+                          <a:schemeClr val="dk1"/>
+                        </a:solidFill>
+                        <a:effectLst/>
+                        <a:latin typeface="+mn-lt"/>
+                        <a:ea typeface="+mn-ea"/>
+                        <a:cs typeface="+mn-cs"/>
+                      </a:endParaRPr>
                     </a:p>
                   </a:txBody>
-                  <a:tcPr/>
+                  <a:tcPr marL="68580" marR="68580" marT="0" marB="0"/>
                 </a:tc>
                 <a:tc>
                   <a:txBody>
                     <a:bodyPr/>
                     <a:lstStyle/>
                     <a:p>
-                      <a:endParaRPr lang="lt-LT"/>
+                      <a:pPr marL="0" algn="l" defTabSz="1828709" rtl="0" eaLnBrk="1" latinLnBrk="0" hangingPunct="1">
+                        <a:spcBef>
+                          <a:spcPts val="300"/>
+                        </a:spcBef>
+                        <a:spcAft>
+                          <a:spcPts val="300"/>
+                        </a:spcAft>
+                        <a:buNone/>
+                      </a:pPr>
+                      <a:r>
+                        <a:rPr lang="lt-LT" sz="3600" kern="1200">
+                          <a:solidFill>
+                            <a:schemeClr val="dk1"/>
+                          </a:solidFill>
+                          <a:effectLst/>
+                          <a:latin typeface="+mn-lt"/>
+                          <a:ea typeface="+mn-ea"/>
+                          <a:cs typeface="+mn-cs"/>
+                        </a:rPr>
+                        <a:t>Galimas</a:t>
+                      </a:r>
+                      <a:endParaRPr lang="en-GB" sz="3600" kern="1200">
+                        <a:solidFill>
+                          <a:schemeClr val="dk1"/>
+                        </a:solidFill>
+                        <a:effectLst/>
+                        <a:latin typeface="+mn-lt"/>
+                        <a:ea typeface="+mn-ea"/>
+                        <a:cs typeface="+mn-cs"/>
+                      </a:endParaRPr>
                     </a:p>
                   </a:txBody>
-                  <a:tcPr/>
+                  <a:tcPr marL="68580" marR="68580" marT="0" marB="0"/>
                 </a:tc>
                 <a:tc>
                   <a:txBody>
                     <a:bodyPr/>
                     <a:lstStyle/>
                     <a:p>
-                      <a:endParaRPr lang="lt-LT"/>
+                      <a:pPr marL="0" algn="l" defTabSz="1828709" rtl="0" eaLnBrk="1" latinLnBrk="0" hangingPunct="1">
+                        <a:spcBef>
+                          <a:spcPts val="300"/>
+                        </a:spcBef>
+                        <a:spcAft>
+                          <a:spcPts val="300"/>
+                        </a:spcAft>
+                        <a:buNone/>
+                      </a:pPr>
+                      <a:r>
+                        <a:rPr lang="lt-LT" sz="3600" kern="1200">
+                          <a:solidFill>
+                            <a:schemeClr val="dk1"/>
+                          </a:solidFill>
+                          <a:effectLst/>
+                          <a:latin typeface="+mn-lt"/>
+                          <a:ea typeface="+mn-ea"/>
+                          <a:cs typeface="+mn-cs"/>
+                        </a:rPr>
+                        <a:t>Nėra</a:t>
+                      </a:r>
+                      <a:endParaRPr lang="en-GB" sz="3600" kern="1200">
+                        <a:solidFill>
+                          <a:schemeClr val="dk1"/>
+                        </a:solidFill>
+                        <a:effectLst/>
+                        <a:latin typeface="+mn-lt"/>
+                        <a:ea typeface="+mn-ea"/>
+                        <a:cs typeface="+mn-cs"/>
+                      </a:endParaRPr>
                     </a:p>
                   </a:txBody>
-                  <a:tcPr/>
+                  <a:tcPr marL="68580" marR="68580" marT="0" marB="0"/>
                 </a:tc>
                 <a:extLst>
                   <a:ext uri="{0D108BD9-81ED-4DB2-BD59-A6C34878D82A}">
@@ -4751,126 +6162,24 @@
                   </a:ext>
                 </a:extLst>
               </a:tr>
-              <a:tr h="1730045">
+              <a:tr h="850392">
                 <a:tc>
                   <a:txBody>
                     <a:bodyPr/>
                     <a:lstStyle/>
                     <a:p>
-                      <a:endParaRPr lang="lt-LT"/>
-                    </a:p>
-                  </a:txBody>
-                  <a:tcPr/>
-                </a:tc>
-                <a:tc>
-                  <a:txBody>
-                    <a:bodyPr/>
-                    <a:lstStyle/>
-                    <a:p>
-                      <a:endParaRPr lang="lt-LT"/>
-                    </a:p>
-                  </a:txBody>
-                  <a:tcPr/>
-                </a:tc>
-                <a:tc>
-                  <a:txBody>
-                    <a:bodyPr/>
-                    <a:lstStyle/>
-                    <a:p>
-                      <a:endParaRPr lang="lt-LT"/>
-                    </a:p>
-                  </a:txBody>
-                  <a:tcPr/>
-                </a:tc>
-                <a:tc>
-                  <a:txBody>
-                    <a:bodyPr/>
-                    <a:lstStyle/>
-                    <a:p>
-                      <a:endParaRPr lang="lt-LT"/>
-                    </a:p>
-                  </a:txBody>
-                  <a:tcPr/>
-                </a:tc>
-                <a:extLst>
-                  <a:ext uri="{0D108BD9-81ED-4DB2-BD59-A6C34878D82A}">
-                    <a16:rowId xmlns:a16="http://schemas.microsoft.com/office/drawing/2014/main" val="837129510"/>
-                  </a:ext>
-                </a:extLst>
-              </a:tr>
-              <a:tr h="1730045">
-                <a:tc>
-                  <a:txBody>
-                    <a:bodyPr/>
-                    <a:lstStyle/>
-                    <a:p>
-                      <a:endParaRPr lang="lt-LT"/>
-                    </a:p>
-                  </a:txBody>
-                  <a:tcPr/>
-                </a:tc>
-                <a:tc>
-                  <a:txBody>
-                    <a:bodyPr/>
-                    <a:lstStyle/>
-                    <a:p>
-                      <a:endParaRPr lang="lt-LT"/>
-                    </a:p>
-                  </a:txBody>
-                  <a:tcPr/>
-                </a:tc>
-                <a:tc>
-                  <a:txBody>
-                    <a:bodyPr/>
-                    <a:lstStyle/>
-                    <a:p>
-                      <a:endParaRPr lang="lt-LT"/>
-                    </a:p>
-                  </a:txBody>
-                  <a:tcPr/>
-                </a:tc>
-                <a:tc>
-                  <a:txBody>
-                    <a:bodyPr/>
-                    <a:lstStyle/>
-                    <a:p>
-                      <a:endParaRPr lang="lt-LT"/>
-                    </a:p>
-                  </a:txBody>
-                  <a:tcPr/>
-                </a:tc>
-                <a:extLst>
-                  <a:ext uri="{0D108BD9-81ED-4DB2-BD59-A6C34878D82A}">
-                    <a16:rowId xmlns:a16="http://schemas.microsoft.com/office/drawing/2014/main" val="142678561"/>
-                  </a:ext>
-                </a:extLst>
-              </a:tr>
-              <a:tr h="1730045">
-                <a:tc>
-                  <a:txBody>
-                    <a:bodyPr/>
-                    <a:lstStyle/>
-                    <a:p>
-                      <a:endParaRPr lang="lt-LT"/>
-                    </a:p>
-                  </a:txBody>
-                  <a:tcPr/>
-                </a:tc>
-                <a:tc>
-                  <a:txBody>
-                    <a:bodyPr/>
-                    <a:lstStyle/>
-                    <a:p>
-                      <a:endParaRPr lang="lt-LT"/>
-                    </a:p>
-                  </a:txBody>
-                  <a:tcPr/>
-                </a:tc>
-                <a:tc>
-                  <a:txBody>
-                    <a:bodyPr/>
-                    <a:lstStyle/>
-                    <a:p>
+                      <a:r>
+                        <a:rPr lang="lt-LT" sz="3600" kern="1200" dirty="0">
+                          <a:solidFill>
+                            <a:schemeClr val="dk1"/>
+                          </a:solidFill>
+                          <a:effectLst/>
+                          <a:latin typeface="+mn-lt"/>
+                          <a:ea typeface="+mn-ea"/>
+                          <a:cs typeface="+mn-cs"/>
+                        </a:rPr>
+                        <a:t>Platforma</a:t>
+                      </a:r>
                       <a:endParaRPr lang="lt-LT" dirty="0"/>
                     </a:p>
                   </a:txBody>
@@ -4881,14 +6190,705 @@
                     <a:bodyPr/>
                     <a:lstStyle/>
                     <a:p>
+                      <a:pPr marL="0" algn="l" defTabSz="1828709" rtl="0" eaLnBrk="1" latinLnBrk="0" hangingPunct="1">
+                        <a:spcBef>
+                          <a:spcPts val="300"/>
+                        </a:spcBef>
+                        <a:spcAft>
+                          <a:spcPts val="300"/>
+                        </a:spcAft>
+                        <a:buNone/>
+                      </a:pPr>
+                      <a:r>
+                        <a:rPr lang="lt-LT" sz="3600" kern="1200" dirty="0">
+                          <a:solidFill>
+                            <a:schemeClr val="dk1"/>
+                          </a:solidFill>
+                          <a:effectLst/>
+                          <a:latin typeface="+mn-lt"/>
+                          <a:ea typeface="+mn-ea"/>
+                          <a:cs typeface="+mn-cs"/>
+                        </a:rPr>
+                        <a:t>Tik Web</a:t>
+                      </a:r>
+                      <a:endParaRPr lang="en-GB" sz="3600" kern="1200" dirty="0">
+                        <a:solidFill>
+                          <a:schemeClr val="dk1"/>
+                        </a:solidFill>
+                        <a:effectLst/>
+                        <a:latin typeface="+mn-lt"/>
+                        <a:ea typeface="+mn-ea"/>
+                        <a:cs typeface="+mn-cs"/>
+                      </a:endParaRPr>
+                    </a:p>
+                  </a:txBody>
+                  <a:tcPr marL="68580" marR="68580" marT="0" marB="0"/>
+                </a:tc>
+                <a:tc>
+                  <a:txBody>
+                    <a:bodyPr/>
+                    <a:lstStyle/>
+                    <a:p>
+                      <a:pPr marL="0" algn="l" defTabSz="1828709" rtl="0" eaLnBrk="1" latinLnBrk="0" hangingPunct="1">
+                        <a:spcBef>
+                          <a:spcPts val="300"/>
+                        </a:spcBef>
+                        <a:spcAft>
+                          <a:spcPts val="300"/>
+                        </a:spcAft>
+                        <a:buNone/>
+                      </a:pPr>
+                      <a:r>
+                        <a:rPr lang="lt-LT" sz="3600" kern="1200">
+                          <a:solidFill>
+                            <a:schemeClr val="dk1"/>
+                          </a:solidFill>
+                          <a:effectLst/>
+                          <a:latin typeface="+mn-lt"/>
+                          <a:ea typeface="+mn-ea"/>
+                          <a:cs typeface="+mn-cs"/>
+                        </a:rPr>
+                        <a:t>Tik App</a:t>
+                      </a:r>
+                      <a:endParaRPr lang="en-GB" sz="3600" kern="1200">
+                        <a:solidFill>
+                          <a:schemeClr val="dk1"/>
+                        </a:solidFill>
+                        <a:effectLst/>
+                        <a:latin typeface="+mn-lt"/>
+                        <a:ea typeface="+mn-ea"/>
+                        <a:cs typeface="+mn-cs"/>
+                      </a:endParaRPr>
+                    </a:p>
+                  </a:txBody>
+                  <a:tcPr marL="68580" marR="68580" marT="0" marB="0"/>
+                </a:tc>
+                <a:tc>
+                  <a:txBody>
+                    <a:bodyPr/>
+                    <a:lstStyle/>
+                    <a:p>
+                      <a:pPr marL="0" algn="l" defTabSz="1828709" rtl="0" eaLnBrk="1" latinLnBrk="0" hangingPunct="1">
+                        <a:spcBef>
+                          <a:spcPts val="300"/>
+                        </a:spcBef>
+                        <a:spcAft>
+                          <a:spcPts val="300"/>
+                        </a:spcAft>
+                        <a:buNone/>
+                      </a:pPr>
+                      <a:r>
+                        <a:rPr lang="lt-LT" sz="3600" kern="1200">
+                          <a:solidFill>
+                            <a:schemeClr val="dk1"/>
+                          </a:solidFill>
+                          <a:effectLst/>
+                          <a:latin typeface="+mn-lt"/>
+                          <a:ea typeface="+mn-ea"/>
+                          <a:cs typeface="+mn-cs"/>
+                        </a:rPr>
+                        <a:t>Ir Web ir App</a:t>
+                      </a:r>
+                      <a:endParaRPr lang="en-GB" sz="3600" kern="1200">
+                        <a:solidFill>
+                          <a:schemeClr val="dk1"/>
+                        </a:solidFill>
+                        <a:effectLst/>
+                        <a:latin typeface="+mn-lt"/>
+                        <a:ea typeface="+mn-ea"/>
+                        <a:cs typeface="+mn-cs"/>
+                      </a:endParaRPr>
+                    </a:p>
+                  </a:txBody>
+                  <a:tcPr marL="68580" marR="68580" marT="0" marB="0"/>
+                </a:tc>
+                <a:extLst>
+                  <a:ext uri="{0D108BD9-81ED-4DB2-BD59-A6C34878D82A}">
+                    <a16:rowId xmlns:a16="http://schemas.microsoft.com/office/drawing/2014/main" val="837129510"/>
+                  </a:ext>
+                </a:extLst>
+              </a:tr>
+              <a:tr h="850392">
+                <a:tc>
+                  <a:txBody>
+                    <a:bodyPr/>
+                    <a:lstStyle/>
+                    <a:p>
+                      <a:r>
+                        <a:rPr lang="lt-LT" sz="3600" kern="1200" dirty="0">
+                          <a:solidFill>
+                            <a:schemeClr val="dk1"/>
+                          </a:solidFill>
+                          <a:effectLst/>
+                          <a:latin typeface="+mn-lt"/>
+                          <a:ea typeface="+mn-ea"/>
+                          <a:cs typeface="+mn-cs"/>
+                        </a:rPr>
+                        <a:t>Kalba</a:t>
+                      </a:r>
                       <a:endParaRPr lang="lt-LT" dirty="0"/>
                     </a:p>
                   </a:txBody>
                   <a:tcPr/>
                 </a:tc>
+                <a:tc>
+                  <a:txBody>
+                    <a:bodyPr/>
+                    <a:lstStyle/>
+                    <a:p>
+                      <a:pPr marL="0" algn="l" defTabSz="1828709" rtl="0" eaLnBrk="1" latinLnBrk="0" hangingPunct="1">
+                        <a:spcBef>
+                          <a:spcPts val="300"/>
+                        </a:spcBef>
+                        <a:spcAft>
+                          <a:spcPts val="300"/>
+                        </a:spcAft>
+                        <a:buNone/>
+                      </a:pPr>
+                      <a:r>
+                        <a:rPr lang="en-US" sz="3600" kern="1200">
+                          <a:solidFill>
+                            <a:schemeClr val="dk1"/>
+                          </a:solidFill>
+                          <a:effectLst/>
+                          <a:latin typeface="+mn-lt"/>
+                          <a:ea typeface="+mn-ea"/>
+                          <a:cs typeface="+mn-cs"/>
+                        </a:rPr>
+                        <a:t>Olandų, Anglų</a:t>
+                      </a:r>
+                      <a:endParaRPr lang="en-GB" sz="3600" kern="1200">
+                        <a:solidFill>
+                          <a:schemeClr val="dk1"/>
+                        </a:solidFill>
+                        <a:effectLst/>
+                        <a:latin typeface="+mn-lt"/>
+                        <a:ea typeface="+mn-ea"/>
+                        <a:cs typeface="+mn-cs"/>
+                      </a:endParaRPr>
+                    </a:p>
+                  </a:txBody>
+                  <a:tcPr marL="68580" marR="68580" marT="0" marB="0"/>
+                </a:tc>
+                <a:tc>
+                  <a:txBody>
+                    <a:bodyPr/>
+                    <a:lstStyle/>
+                    <a:p>
+                      <a:pPr marL="0" algn="l" defTabSz="1828709" rtl="0" eaLnBrk="1" latinLnBrk="0" hangingPunct="1">
+                        <a:spcBef>
+                          <a:spcPts val="300"/>
+                        </a:spcBef>
+                        <a:spcAft>
+                          <a:spcPts val="300"/>
+                        </a:spcAft>
+                        <a:buNone/>
+                      </a:pPr>
+                      <a:r>
+                        <a:rPr lang="en-US" sz="3600" kern="1200" dirty="0" err="1">
+                          <a:solidFill>
+                            <a:schemeClr val="dk1"/>
+                          </a:solidFill>
+                          <a:effectLst/>
+                          <a:latin typeface="+mn-lt"/>
+                          <a:ea typeface="+mn-ea"/>
+                          <a:cs typeface="+mn-cs"/>
+                        </a:rPr>
+                        <a:t>Anglų</a:t>
+                      </a:r>
+                      <a:endParaRPr lang="en-GB" sz="3600" kern="1200" dirty="0">
+                        <a:solidFill>
+                          <a:schemeClr val="dk1"/>
+                        </a:solidFill>
+                        <a:effectLst/>
+                        <a:latin typeface="+mn-lt"/>
+                        <a:ea typeface="+mn-ea"/>
+                        <a:cs typeface="+mn-cs"/>
+                      </a:endParaRPr>
+                    </a:p>
+                  </a:txBody>
+                  <a:tcPr marL="68580" marR="68580" marT="0" marB="0"/>
+                </a:tc>
+                <a:tc>
+                  <a:txBody>
+                    <a:bodyPr/>
+                    <a:lstStyle/>
+                    <a:p>
+                      <a:pPr marL="0" algn="l" defTabSz="1828709" rtl="0" eaLnBrk="1" latinLnBrk="0" hangingPunct="1">
+                        <a:spcBef>
+                          <a:spcPts val="300"/>
+                        </a:spcBef>
+                        <a:spcAft>
+                          <a:spcPts val="300"/>
+                        </a:spcAft>
+                        <a:buNone/>
+                      </a:pPr>
+                      <a:r>
+                        <a:rPr lang="en-US" sz="3600" kern="1200">
+                          <a:solidFill>
+                            <a:schemeClr val="dk1"/>
+                          </a:solidFill>
+                          <a:effectLst/>
+                          <a:latin typeface="+mn-lt"/>
+                          <a:ea typeface="+mn-ea"/>
+                          <a:cs typeface="+mn-cs"/>
+                        </a:rPr>
+                        <a:t>Anglų, Lietuvių</a:t>
+                      </a:r>
+                      <a:endParaRPr lang="en-GB" sz="3600" kern="1200">
+                        <a:solidFill>
+                          <a:schemeClr val="dk1"/>
+                        </a:solidFill>
+                        <a:effectLst/>
+                        <a:latin typeface="+mn-lt"/>
+                        <a:ea typeface="+mn-ea"/>
+                        <a:cs typeface="+mn-cs"/>
+                      </a:endParaRPr>
+                    </a:p>
+                  </a:txBody>
+                  <a:tcPr marL="68580" marR="68580" marT="0" marB="0"/>
+                </a:tc>
                 <a:extLst>
                   <a:ext uri="{0D108BD9-81ED-4DB2-BD59-A6C34878D82A}">
-                    <a16:rowId xmlns:a16="http://schemas.microsoft.com/office/drawing/2014/main" val="2926141353"/>
+                    <a16:rowId xmlns:a16="http://schemas.microsoft.com/office/drawing/2014/main" val="142678561"/>
+                  </a:ext>
+                </a:extLst>
+              </a:tr>
+              <a:tr h="850392">
+                <a:tc>
+                  <a:txBody>
+                    <a:bodyPr/>
+                    <a:lstStyle/>
+                    <a:p>
+                      <a:r>
+                        <a:rPr lang="lt-LT" sz="3600" kern="1200" dirty="0">
+                          <a:solidFill>
+                            <a:schemeClr val="dk1"/>
+                          </a:solidFill>
+                          <a:effectLst/>
+                          <a:latin typeface="+mn-lt"/>
+                          <a:ea typeface="+mn-ea"/>
+                          <a:cs typeface="+mn-cs"/>
+                        </a:rPr>
+                        <a:t>Rezervavimas</a:t>
+                      </a:r>
+                      <a:endParaRPr lang="lt-LT" dirty="0"/>
+                    </a:p>
+                  </a:txBody>
+                  <a:tcPr/>
+                </a:tc>
+                <a:tc>
+                  <a:txBody>
+                    <a:bodyPr/>
+                    <a:lstStyle/>
+                    <a:p>
+                      <a:pPr marL="0" algn="l" defTabSz="1828709" rtl="0" eaLnBrk="1" latinLnBrk="0" hangingPunct="1">
+                        <a:spcBef>
+                          <a:spcPts val="300"/>
+                        </a:spcBef>
+                        <a:spcAft>
+                          <a:spcPts val="300"/>
+                        </a:spcAft>
+                        <a:buNone/>
+                      </a:pPr>
+                      <a:r>
+                        <a:rPr lang="lt-LT" sz="3600" kern="1200" dirty="0">
+                          <a:solidFill>
+                            <a:schemeClr val="dk1"/>
+                          </a:solidFill>
+                          <a:effectLst/>
+                          <a:latin typeface="+mn-lt"/>
+                          <a:ea typeface="+mn-ea"/>
+                          <a:cs typeface="+mn-cs"/>
+                        </a:rPr>
+                        <a:t>Nėra</a:t>
+                      </a:r>
+                      <a:endParaRPr lang="en-GB" sz="3600" kern="1200" dirty="0">
+                        <a:solidFill>
+                          <a:schemeClr val="dk1"/>
+                        </a:solidFill>
+                        <a:effectLst/>
+                        <a:latin typeface="+mn-lt"/>
+                        <a:ea typeface="+mn-ea"/>
+                        <a:cs typeface="+mn-cs"/>
+                      </a:endParaRPr>
+                    </a:p>
+                  </a:txBody>
+                  <a:tcPr marL="68580" marR="68580" marT="0" marB="0"/>
+                </a:tc>
+                <a:tc>
+                  <a:txBody>
+                    <a:bodyPr/>
+                    <a:lstStyle/>
+                    <a:p>
+                      <a:pPr marL="0" algn="l" defTabSz="1828709" rtl="0" eaLnBrk="1" latinLnBrk="0" hangingPunct="1">
+                        <a:spcBef>
+                          <a:spcPts val="300"/>
+                        </a:spcBef>
+                        <a:spcAft>
+                          <a:spcPts val="300"/>
+                        </a:spcAft>
+                        <a:buNone/>
+                      </a:pPr>
+                      <a:r>
+                        <a:rPr lang="lt-LT" sz="3600" kern="1200" dirty="0">
+                          <a:solidFill>
+                            <a:schemeClr val="dk1"/>
+                          </a:solidFill>
+                          <a:effectLst/>
+                          <a:latin typeface="+mn-lt"/>
+                          <a:ea typeface="+mn-ea"/>
+                          <a:cs typeface="+mn-cs"/>
+                        </a:rPr>
+                        <a:t>Nėra</a:t>
+                      </a:r>
+                      <a:endParaRPr lang="en-GB" sz="3600" kern="1200" dirty="0">
+                        <a:solidFill>
+                          <a:schemeClr val="dk1"/>
+                        </a:solidFill>
+                        <a:effectLst/>
+                        <a:latin typeface="+mn-lt"/>
+                        <a:ea typeface="+mn-ea"/>
+                        <a:cs typeface="+mn-cs"/>
+                      </a:endParaRPr>
+                    </a:p>
+                  </a:txBody>
+                  <a:tcPr marL="68580" marR="68580" marT="0" marB="0"/>
+                </a:tc>
+                <a:tc>
+                  <a:txBody>
+                    <a:bodyPr/>
+                    <a:lstStyle/>
+                    <a:p>
+                      <a:pPr marL="0" algn="l" defTabSz="1828709" rtl="0" eaLnBrk="1" latinLnBrk="0" hangingPunct="1">
+                        <a:spcBef>
+                          <a:spcPts val="300"/>
+                        </a:spcBef>
+                        <a:spcAft>
+                          <a:spcPts val="300"/>
+                        </a:spcAft>
+                        <a:buNone/>
+                      </a:pPr>
+                      <a:r>
+                        <a:rPr lang="lt-LT" sz="3600" kern="1200" dirty="0">
+                          <a:solidFill>
+                            <a:schemeClr val="dk1"/>
+                          </a:solidFill>
+                          <a:effectLst/>
+                          <a:latin typeface="+mn-lt"/>
+                          <a:ea typeface="+mn-ea"/>
+                          <a:cs typeface="+mn-cs"/>
+                        </a:rPr>
+                        <a:t>Rezervavimas kalendoriuje</a:t>
+                      </a:r>
+                      <a:endParaRPr lang="en-GB" sz="3600" kern="1200" dirty="0">
+                        <a:solidFill>
+                          <a:schemeClr val="dk1"/>
+                        </a:solidFill>
+                        <a:effectLst/>
+                        <a:latin typeface="+mn-lt"/>
+                        <a:ea typeface="+mn-ea"/>
+                        <a:cs typeface="+mn-cs"/>
+                      </a:endParaRPr>
+                    </a:p>
+                  </a:txBody>
+                  <a:tcPr marL="68580" marR="68580" marT="0" marB="0"/>
+                </a:tc>
+                <a:extLst>
+                  <a:ext uri="{0D108BD9-81ED-4DB2-BD59-A6C34878D82A}">
+                    <a16:rowId xmlns:a16="http://schemas.microsoft.com/office/drawing/2014/main" val="3287227991"/>
+                  </a:ext>
+                </a:extLst>
+              </a:tr>
+              <a:tr h="850392">
+                <a:tc>
+                  <a:txBody>
+                    <a:bodyPr/>
+                    <a:lstStyle/>
+                    <a:p>
+                      <a:r>
+                        <a:rPr lang="lt-LT" sz="3600" kern="1200" dirty="0">
+                          <a:solidFill>
+                            <a:schemeClr val="dk1"/>
+                          </a:solidFill>
+                          <a:effectLst/>
+                          <a:latin typeface="+mn-lt"/>
+                          <a:ea typeface="+mn-ea"/>
+                          <a:cs typeface="+mn-cs"/>
+                        </a:rPr>
+                        <a:t>Kategorijos</a:t>
+                      </a:r>
+                      <a:endParaRPr lang="lt-LT" dirty="0"/>
+                    </a:p>
+                  </a:txBody>
+                  <a:tcPr/>
+                </a:tc>
+                <a:tc>
+                  <a:txBody>
+                    <a:bodyPr/>
+                    <a:lstStyle/>
+                    <a:p>
+                      <a:pPr marL="0" algn="l" defTabSz="1828709" rtl="0" eaLnBrk="1" latinLnBrk="0" hangingPunct="1">
+                        <a:spcBef>
+                          <a:spcPts val="300"/>
+                        </a:spcBef>
+                        <a:spcAft>
+                          <a:spcPts val="300"/>
+                        </a:spcAft>
+                        <a:buNone/>
+                      </a:pPr>
+                      <a:r>
+                        <a:rPr lang="lt-LT" sz="3600" kern="1200" dirty="0">
+                          <a:solidFill>
+                            <a:schemeClr val="dk1"/>
+                          </a:solidFill>
+                          <a:effectLst/>
+                          <a:latin typeface="+mn-lt"/>
+                          <a:ea typeface="+mn-ea"/>
+                          <a:cs typeface="+mn-cs"/>
+                        </a:rPr>
+                        <a:t>Platus pasirinkimas</a:t>
+                      </a:r>
+                      <a:endParaRPr lang="en-GB" sz="3600" kern="1200" dirty="0">
+                        <a:solidFill>
+                          <a:schemeClr val="dk1"/>
+                        </a:solidFill>
+                        <a:effectLst/>
+                        <a:latin typeface="+mn-lt"/>
+                        <a:ea typeface="+mn-ea"/>
+                        <a:cs typeface="+mn-cs"/>
+                      </a:endParaRPr>
+                    </a:p>
+                  </a:txBody>
+                  <a:tcPr marL="68580" marR="68580" marT="0" marB="0"/>
+                </a:tc>
+                <a:tc>
+                  <a:txBody>
+                    <a:bodyPr/>
+                    <a:lstStyle/>
+                    <a:p>
+                      <a:pPr marL="0" algn="l" defTabSz="1828709" rtl="0" eaLnBrk="1" latinLnBrk="0" hangingPunct="1">
+                        <a:spcBef>
+                          <a:spcPts val="300"/>
+                        </a:spcBef>
+                        <a:spcAft>
+                          <a:spcPts val="300"/>
+                        </a:spcAft>
+                        <a:buNone/>
+                      </a:pPr>
+                      <a:r>
+                        <a:rPr lang="lt-LT" sz="3600" kern="1200" dirty="0">
+                          <a:solidFill>
+                            <a:schemeClr val="dk1"/>
+                          </a:solidFill>
+                          <a:effectLst/>
+                          <a:latin typeface="+mn-lt"/>
+                          <a:ea typeface="+mn-ea"/>
+                          <a:cs typeface="+mn-cs"/>
+                        </a:rPr>
+                        <a:t>Maistas/ne maistas</a:t>
+                      </a:r>
+                      <a:endParaRPr lang="en-GB" sz="3600" kern="1200" dirty="0">
+                        <a:solidFill>
+                          <a:schemeClr val="dk1"/>
+                        </a:solidFill>
+                        <a:effectLst/>
+                        <a:latin typeface="+mn-lt"/>
+                        <a:ea typeface="+mn-ea"/>
+                        <a:cs typeface="+mn-cs"/>
+                      </a:endParaRPr>
+                    </a:p>
+                  </a:txBody>
+                  <a:tcPr marL="68580" marR="68580" marT="0" marB="0"/>
+                </a:tc>
+                <a:tc>
+                  <a:txBody>
+                    <a:bodyPr/>
+                    <a:lstStyle/>
+                    <a:p>
+                      <a:pPr marL="0" algn="l" defTabSz="1828709" rtl="0" eaLnBrk="1" latinLnBrk="0" hangingPunct="1">
+                        <a:spcBef>
+                          <a:spcPts val="300"/>
+                        </a:spcBef>
+                        <a:spcAft>
+                          <a:spcPts val="300"/>
+                        </a:spcAft>
+                        <a:buNone/>
+                      </a:pPr>
+                      <a:r>
+                        <a:rPr lang="lt-LT" sz="3600" kern="1200" dirty="0">
+                          <a:solidFill>
+                            <a:schemeClr val="dk1"/>
+                          </a:solidFill>
+                          <a:effectLst/>
+                          <a:latin typeface="+mn-lt"/>
+                          <a:ea typeface="+mn-ea"/>
+                          <a:cs typeface="+mn-cs"/>
+                        </a:rPr>
+                        <a:t>Fokusuota į laisvalaikio prekes</a:t>
+                      </a:r>
+                      <a:endParaRPr lang="en-GB" sz="3600" kern="1200" dirty="0">
+                        <a:solidFill>
+                          <a:schemeClr val="dk1"/>
+                        </a:solidFill>
+                        <a:effectLst/>
+                        <a:latin typeface="+mn-lt"/>
+                        <a:ea typeface="+mn-ea"/>
+                        <a:cs typeface="+mn-cs"/>
+                      </a:endParaRPr>
+                    </a:p>
+                  </a:txBody>
+                  <a:tcPr marL="68580" marR="68580" marT="0" marB="0"/>
+                </a:tc>
+                <a:extLst>
+                  <a:ext uri="{0D108BD9-81ED-4DB2-BD59-A6C34878D82A}">
+                    <a16:rowId xmlns:a16="http://schemas.microsoft.com/office/drawing/2014/main" val="3915500781"/>
+                  </a:ext>
+                </a:extLst>
+              </a:tr>
+              <a:tr h="850392">
+                <a:tc>
+                  <a:txBody>
+                    <a:bodyPr/>
+                    <a:lstStyle/>
+                    <a:p>
+                      <a:r>
+                        <a:rPr lang="lt-LT" sz="3600" kern="1200" dirty="0">
+                          <a:solidFill>
+                            <a:schemeClr val="dk1"/>
+                          </a:solidFill>
+                          <a:effectLst/>
+                          <a:latin typeface="+mn-lt"/>
+                          <a:ea typeface="+mn-ea"/>
+                          <a:cs typeface="+mn-cs"/>
+                        </a:rPr>
+                        <a:t>Nemokamas atidavimas</a:t>
+                      </a:r>
+                      <a:endParaRPr lang="lt-LT" dirty="0"/>
+                    </a:p>
+                  </a:txBody>
+                  <a:tcPr/>
+                </a:tc>
+                <a:tc>
+                  <a:txBody>
+                    <a:bodyPr/>
+                    <a:lstStyle/>
+                    <a:p>
+                      <a:pPr marL="0" algn="l" defTabSz="1828709" rtl="0" eaLnBrk="1" latinLnBrk="0" hangingPunct="1">
+                        <a:spcBef>
+                          <a:spcPts val="300"/>
+                        </a:spcBef>
+                        <a:spcAft>
+                          <a:spcPts val="300"/>
+                        </a:spcAft>
+                        <a:buNone/>
+                      </a:pPr>
+                      <a:r>
+                        <a:rPr lang="lt-LT" sz="3600" kern="1200" dirty="0">
+                          <a:solidFill>
+                            <a:schemeClr val="dk1"/>
+                          </a:solidFill>
+                          <a:effectLst/>
+                          <a:latin typeface="+mn-lt"/>
+                          <a:ea typeface="+mn-ea"/>
+                          <a:cs typeface="+mn-cs"/>
+                        </a:rPr>
+                        <a:t>Nėra</a:t>
+                      </a:r>
+                      <a:endParaRPr lang="en-GB" sz="3600" kern="1200" dirty="0">
+                        <a:solidFill>
+                          <a:schemeClr val="dk1"/>
+                        </a:solidFill>
+                        <a:effectLst/>
+                        <a:latin typeface="+mn-lt"/>
+                        <a:ea typeface="+mn-ea"/>
+                        <a:cs typeface="+mn-cs"/>
+                      </a:endParaRPr>
+                    </a:p>
+                  </a:txBody>
+                  <a:tcPr marL="68580" marR="68580" marT="0" marB="0"/>
+                </a:tc>
+                <a:tc>
+                  <a:txBody>
+                    <a:bodyPr/>
+                    <a:lstStyle/>
+                    <a:p>
+                      <a:pPr marL="0" algn="l" defTabSz="1828709" rtl="0" eaLnBrk="1" latinLnBrk="0" hangingPunct="1">
+                        <a:spcBef>
+                          <a:spcPts val="300"/>
+                        </a:spcBef>
+                        <a:spcAft>
+                          <a:spcPts val="300"/>
+                        </a:spcAft>
+                        <a:buNone/>
+                      </a:pPr>
+                      <a:r>
+                        <a:rPr lang="lt-LT" sz="3600" kern="1200" dirty="0">
+                          <a:solidFill>
+                            <a:schemeClr val="dk1"/>
+                          </a:solidFill>
+                          <a:effectLst/>
+                          <a:latin typeface="+mn-lt"/>
+                          <a:ea typeface="+mn-ea"/>
+                          <a:cs typeface="+mn-cs"/>
+                        </a:rPr>
+                        <a:t>Yra </a:t>
+                      </a:r>
+                      <a:endParaRPr lang="en-GB" sz="3600" kern="1200" dirty="0">
+                        <a:solidFill>
+                          <a:schemeClr val="dk1"/>
+                        </a:solidFill>
+                        <a:effectLst/>
+                        <a:latin typeface="+mn-lt"/>
+                        <a:ea typeface="+mn-ea"/>
+                        <a:cs typeface="+mn-cs"/>
+                      </a:endParaRPr>
+                    </a:p>
+                  </a:txBody>
+                  <a:tcPr marL="68580" marR="68580" marT="0" marB="0"/>
+                </a:tc>
+                <a:tc>
+                  <a:txBody>
+                    <a:bodyPr/>
+                    <a:lstStyle/>
+                    <a:p>
+                      <a:pPr marL="0" algn="l" defTabSz="1828709" rtl="0" eaLnBrk="1" latinLnBrk="0" hangingPunct="1">
+                        <a:spcBef>
+                          <a:spcPts val="300"/>
+                        </a:spcBef>
+                        <a:spcAft>
+                          <a:spcPts val="300"/>
+                        </a:spcAft>
+                        <a:buNone/>
+                      </a:pPr>
+                      <a:r>
+                        <a:rPr lang="lt-LT" sz="3600" kern="1200" dirty="0">
+                          <a:solidFill>
+                            <a:schemeClr val="dk1"/>
+                          </a:solidFill>
+                          <a:effectLst/>
+                          <a:latin typeface="+mn-lt"/>
+                          <a:ea typeface="+mn-ea"/>
+                          <a:cs typeface="+mn-cs"/>
+                        </a:rPr>
+                        <a:t>Nėra</a:t>
+                      </a:r>
+                      <a:endParaRPr lang="en-GB" sz="3600" kern="1200" dirty="0">
+                        <a:solidFill>
+                          <a:schemeClr val="dk1"/>
+                        </a:solidFill>
+                        <a:effectLst/>
+                        <a:latin typeface="+mn-lt"/>
+                        <a:ea typeface="+mn-ea"/>
+                        <a:cs typeface="+mn-cs"/>
+                      </a:endParaRPr>
+                    </a:p>
+                  </a:txBody>
+                  <a:tcPr marL="68580" marR="68580" marT="0" marB="0"/>
+                </a:tc>
+                <a:extLst>
+                  <a:ext uri="{0D108BD9-81ED-4DB2-BD59-A6C34878D82A}">
+                    <a16:rowId xmlns:a16="http://schemas.microsoft.com/office/drawing/2014/main" val="184427955"/>
                   </a:ext>
                 </a:extLst>
               </a:tr>
@@ -4896,6 +6896,35 @@
           </a:graphicData>
         </a:graphic>
       </p:graphicFrame>
+      <p:sp>
+        <p:nvSpPr>
+          <p:cNvPr id="3" name="Slide Number Placeholder 2">
+            <a:extLst>
+              <a:ext uri="{FF2B5EF4-FFF2-40B4-BE49-F238E27FC236}">
+                <a16:creationId xmlns:a16="http://schemas.microsoft.com/office/drawing/2014/main" id="{802432D5-0E35-3E09-D9C9-F4C247B03EF7}"/>
+              </a:ext>
+            </a:extLst>
+          </p:cNvPr>
+          <p:cNvSpPr>
+            <a:spLocks noGrp="1"/>
+          </p:cNvSpPr>
+          <p:nvPr>
+            <p:ph type="sldNum" sz="quarter" idx="12"/>
+          </p:nvPr>
+        </p:nvSpPr>
+        <p:spPr/>
+        <p:txBody>
+          <a:bodyPr/>
+          <a:lstStyle/>
+          <a:p>
+            <a:fld id="{29B01A02-16AD-7D4A-AF4C-AE522BCC74EA}" type="slidenum">
+              <a:rPr lang="en-US" sz="3600" smtClean="0"/>
+              <a:t>3</a:t>
+            </a:fld>
+            <a:endParaRPr lang="en-US" sz="3600" dirty="0"/>
+          </a:p>
+        </p:txBody>
+      </p:sp>
     </p:spTree>
     <p:extLst>
       <p:ext uri="{BB962C8B-B14F-4D97-AF65-F5344CB8AC3E}">
@@ -4969,22 +6998,162 @@
           <a:lstStyle/>
           <a:p>
             <a:r>
-              <a:rPr lang="en-US" sz="5900" b="1" dirty="0">
+              <a:rPr lang="lt-LT" sz="5900" b="1" dirty="0">
                 <a:latin typeface="Arial" panose="020B0604020202020204" pitchFamily="34" charset="0"/>
                 <a:ea typeface="Inter" panose="020B0502030000000004" pitchFamily="34" charset="0"/>
                 <a:cs typeface="Arial" panose="020B0604020202020204" pitchFamily="34" charset="0"/>
               </a:rPr>
-              <a:t>INFRASTRUKTŪRA</a:t>
-            </a:r>
-          </a:p>
-        </p:txBody>
-      </p:sp>
-      <p:sp>
-        <p:nvSpPr>
-          <p:cNvPr id="6" name="TextBox 5">
+              <a:t>Projekto apimtis</a:t>
+            </a:r>
+            <a:endParaRPr lang="en-US" sz="5900" b="1" dirty="0">
+              <a:latin typeface="Arial" panose="020B0604020202020204" pitchFamily="34" charset="0"/>
+              <a:ea typeface="Inter" panose="020B0502030000000004" pitchFamily="34" charset="0"/>
+              <a:cs typeface="Arial" panose="020B0604020202020204" pitchFamily="34" charset="0"/>
+            </a:endParaRPr>
+          </a:p>
+        </p:txBody>
+      </p:sp>
+      <p:sp>
+        <p:nvSpPr>
+          <p:cNvPr id="2" name="Text Placeholder 4">
             <a:extLst>
               <a:ext uri="{FF2B5EF4-FFF2-40B4-BE49-F238E27FC236}">
-                <a16:creationId xmlns:a16="http://schemas.microsoft.com/office/drawing/2014/main" id="{CDF34D58-EBEA-C04D-9892-F4152A2E7502}"/>
+                <a16:creationId xmlns:a16="http://schemas.microsoft.com/office/drawing/2014/main" id="{C90B7584-36E7-99E2-2C26-537D5A610889}"/>
+              </a:ext>
+            </a:extLst>
+          </p:cNvPr>
+          <p:cNvSpPr txBox="1">
+            <a:spLocks/>
+          </p:cNvSpPr>
+          <p:nvPr/>
+        </p:nvSpPr>
+        <p:spPr>
+          <a:xfrm>
+            <a:off x="1393530" y="3979557"/>
+            <a:ext cx="10530245" cy="1019347"/>
+          </a:xfrm>
+          <a:prstGeom prst="rect">
+            <a:avLst/>
+          </a:prstGeom>
+        </p:spPr>
+        <p:txBody>
+          <a:bodyPr vert="horz" lIns="91440" tIns="45720" rIns="91440" bIns="45720" rtlCol="0" anchor="ctr"/>
+          <a:lstStyle>
+            <a:defPPr>
+              <a:defRPr lang="en-US"/>
+            </a:defPPr>
+            <a:lvl1pPr marL="0" algn="r" defTabSz="1828709" rtl="0" eaLnBrk="1" latinLnBrk="0" hangingPunct="1">
+              <a:defRPr sz="2400" kern="1200">
+                <a:solidFill>
+                  <a:schemeClr val="tx1">
+                    <a:tint val="75000"/>
+                  </a:schemeClr>
+                </a:solidFill>
+                <a:latin typeface="+mn-lt"/>
+                <a:ea typeface="+mn-ea"/>
+                <a:cs typeface="+mn-cs"/>
+              </a:defRPr>
+            </a:lvl1pPr>
+            <a:lvl2pPr marL="914354" algn="l" defTabSz="1828709" rtl="0" eaLnBrk="1" latinLnBrk="0" hangingPunct="1">
+              <a:defRPr sz="3600" kern="1200">
+                <a:solidFill>
+                  <a:schemeClr val="tx1"/>
+                </a:solidFill>
+                <a:latin typeface="+mn-lt"/>
+                <a:ea typeface="+mn-ea"/>
+                <a:cs typeface="+mn-cs"/>
+              </a:defRPr>
+            </a:lvl2pPr>
+            <a:lvl3pPr marL="1828709" algn="l" defTabSz="1828709" rtl="0" eaLnBrk="1" latinLnBrk="0" hangingPunct="1">
+              <a:defRPr sz="3600" kern="1200">
+                <a:solidFill>
+                  <a:schemeClr val="tx1"/>
+                </a:solidFill>
+                <a:latin typeface="+mn-lt"/>
+                <a:ea typeface="+mn-ea"/>
+                <a:cs typeface="+mn-cs"/>
+              </a:defRPr>
+            </a:lvl3pPr>
+            <a:lvl4pPr marL="2743063" algn="l" defTabSz="1828709" rtl="0" eaLnBrk="1" latinLnBrk="0" hangingPunct="1">
+              <a:defRPr sz="3600" kern="1200">
+                <a:solidFill>
+                  <a:schemeClr val="tx1"/>
+                </a:solidFill>
+                <a:latin typeface="+mn-lt"/>
+                <a:ea typeface="+mn-ea"/>
+                <a:cs typeface="+mn-cs"/>
+              </a:defRPr>
+            </a:lvl4pPr>
+            <a:lvl5pPr marL="3657417" algn="l" defTabSz="1828709" rtl="0" eaLnBrk="1" latinLnBrk="0" hangingPunct="1">
+              <a:defRPr sz="3600" kern="1200">
+                <a:solidFill>
+                  <a:schemeClr val="tx1"/>
+                </a:solidFill>
+                <a:latin typeface="+mn-lt"/>
+                <a:ea typeface="+mn-ea"/>
+                <a:cs typeface="+mn-cs"/>
+              </a:defRPr>
+            </a:lvl5pPr>
+            <a:lvl6pPr marL="4571771" algn="l" defTabSz="1828709" rtl="0" eaLnBrk="1" latinLnBrk="0" hangingPunct="1">
+              <a:defRPr sz="3600" kern="1200">
+                <a:solidFill>
+                  <a:schemeClr val="tx1"/>
+                </a:solidFill>
+                <a:latin typeface="+mn-lt"/>
+                <a:ea typeface="+mn-ea"/>
+                <a:cs typeface="+mn-cs"/>
+              </a:defRPr>
+            </a:lvl6pPr>
+            <a:lvl7pPr marL="5486126" algn="l" defTabSz="1828709" rtl="0" eaLnBrk="1" latinLnBrk="0" hangingPunct="1">
+              <a:defRPr sz="3600" kern="1200">
+                <a:solidFill>
+                  <a:schemeClr val="tx1"/>
+                </a:solidFill>
+                <a:latin typeface="+mn-lt"/>
+                <a:ea typeface="+mn-ea"/>
+                <a:cs typeface="+mn-cs"/>
+              </a:defRPr>
+            </a:lvl7pPr>
+            <a:lvl8pPr marL="6400480" algn="l" defTabSz="1828709" rtl="0" eaLnBrk="1" latinLnBrk="0" hangingPunct="1">
+              <a:defRPr sz="3600" kern="1200">
+                <a:solidFill>
+                  <a:schemeClr val="tx1"/>
+                </a:solidFill>
+                <a:latin typeface="+mn-lt"/>
+                <a:ea typeface="+mn-ea"/>
+                <a:cs typeface="+mn-cs"/>
+              </a:defRPr>
+            </a:lvl8pPr>
+            <a:lvl9pPr marL="7314834" algn="l" defTabSz="1828709" rtl="0" eaLnBrk="1" latinLnBrk="0" hangingPunct="1">
+              <a:defRPr sz="3600" kern="1200">
+                <a:solidFill>
+                  <a:schemeClr val="tx1"/>
+                </a:solidFill>
+                <a:latin typeface="+mn-lt"/>
+                <a:ea typeface="+mn-ea"/>
+                <a:cs typeface="+mn-cs"/>
+              </a:defRPr>
+            </a:lvl9pPr>
+          </a:lstStyle>
+          <a:p>
+            <a:pPr algn="l"/>
+            <a:r>
+              <a:rPr lang="lt-LT" sz="4000" b="1" dirty="0">
+                <a:solidFill>
+                  <a:schemeClr val="tx1"/>
+                </a:solidFill>
+              </a:rPr>
+              <a:t>Bendras projekto kodo eilučių skaičius – 12651</a:t>
+            </a:r>
+          </a:p>
+        </p:txBody>
+      </p:sp>
+      <p:sp>
+        <p:nvSpPr>
+          <p:cNvPr id="12" name="TextBox 11">
+            <a:extLst>
+              <a:ext uri="{FF2B5EF4-FFF2-40B4-BE49-F238E27FC236}">
+                <a16:creationId xmlns:a16="http://schemas.microsoft.com/office/drawing/2014/main" id="{5C53D677-D83B-05DD-460F-89BA2D7CE288}"/>
               </a:ext>
             </a:extLst>
           </p:cNvPr>
@@ -4993,8 +7162,8 @@
         </p:nvSpPr>
         <p:spPr>
           <a:xfrm>
-            <a:off x="804597" y="6802375"/>
-            <a:ext cx="6642817" cy="607667"/>
+            <a:off x="2231136" y="6058038"/>
+            <a:ext cx="12728448" cy="3226717"/>
           </a:xfrm>
           <a:prstGeom prst="rect">
             <a:avLst/>
@@ -5002,387 +7171,141 @@
           <a:noFill/>
         </p:spPr>
         <p:txBody>
-          <a:bodyPr wrap="square" rtlCol="0">
+          <a:bodyPr wrap="square">
             <a:spAutoFit/>
           </a:bodyPr>
           <a:lstStyle/>
           <a:p>
-            <a:pPr>
+            <a:pPr marL="342900" lvl="0" indent="-342900" algn="just">
               <a:lnSpc>
-                <a:spcPct val="110000"/>
+                <a:spcPct val="115000"/>
               </a:lnSpc>
+              <a:buFont typeface="Symbol" panose="05050102010706020507" pitchFamily="18" charset="2"/>
+              <a:buChar char=""/>
             </a:pPr>
             <a:r>
-              <a:rPr lang="lt-LT" sz="3300" dirty="0">
-                <a:latin typeface="Arial" panose="020B0604020202020204" pitchFamily="34" charset="0"/>
-                <a:ea typeface="Inter" panose="020B0502030000000004" pitchFamily="34" charset="0"/>
-                <a:cs typeface="Arial" panose="020B0604020202020204" pitchFamily="34" charset="0"/>
+              <a:rPr lang="lt-LT" sz="3600" noProof="0" dirty="0">
+                <a:effectLst/>
+                <a:latin typeface="Times New Roman" panose="02020603050405020304" pitchFamily="18" charset="0"/>
+                <a:ea typeface="Calibri" panose="020F0502020204030204" pitchFamily="34" charset="0"/>
               </a:rPr>
-              <a:t>Skaičiavimų dar nėra.</a:t>
-            </a:r>
-            <a:endParaRPr lang="en-US" sz="3300" dirty="0">
-              <a:latin typeface="Arial" panose="020B0604020202020204" pitchFamily="34" charset="0"/>
-              <a:ea typeface="Inter" panose="020B0502030000000004" pitchFamily="34" charset="0"/>
-              <a:cs typeface="Arial" panose="020B0604020202020204" pitchFamily="34" charset="0"/>
-            </a:endParaRPr>
-          </a:p>
-        </p:txBody>
-      </p:sp>
-      <p:sp>
-        <p:nvSpPr>
-          <p:cNvPr id="7" name="TextBox 6">
+              <a:t>Naudotojo sąsajos programinio kodo eilučių kiekis: </a:t>
+            </a:r>
+            <a:r>
+              <a:rPr lang="lt-LT" dirty="0">
+                <a:latin typeface="Times New Roman" panose="02020603050405020304" pitchFamily="18" charset="0"/>
+                <a:ea typeface="Calibri" panose="020F0502020204030204" pitchFamily="34" charset="0"/>
+              </a:rPr>
+              <a:t>7</a:t>
+            </a:r>
+            <a:r>
+              <a:rPr lang="lt-LT" sz="3600" noProof="0" dirty="0">
+                <a:effectLst/>
+                <a:latin typeface="Times New Roman" panose="02020603050405020304" pitchFamily="18" charset="0"/>
+                <a:ea typeface="Calibri" panose="020F0502020204030204" pitchFamily="34" charset="0"/>
+              </a:rPr>
+              <a:t>733</a:t>
+            </a:r>
+          </a:p>
+          <a:p>
+            <a:pPr marL="342900" lvl="0" indent="-342900" algn="just">
+              <a:lnSpc>
+                <a:spcPct val="115000"/>
+              </a:lnSpc>
+              <a:buFont typeface="Symbol" panose="05050102010706020507" pitchFamily="18" charset="2"/>
+              <a:buChar char=""/>
+            </a:pPr>
+            <a:r>
+              <a:rPr lang="lt-LT" sz="3600" noProof="0" dirty="0">
+                <a:effectLst/>
+                <a:latin typeface="Times New Roman" panose="02020603050405020304" pitchFamily="18" charset="0"/>
+                <a:ea typeface="Calibri" panose="020F0502020204030204" pitchFamily="34" charset="0"/>
+              </a:rPr>
+              <a:t>Serverinės dalies programinio kodo eilučių kiekis: 4918</a:t>
+            </a:r>
+          </a:p>
+          <a:p>
+            <a:pPr marL="342900" lvl="0" indent="-342900" algn="just">
+              <a:lnSpc>
+                <a:spcPct val="115000"/>
+              </a:lnSpc>
+              <a:buFont typeface="Symbol" panose="05050102010706020507" pitchFamily="18" charset="2"/>
+              <a:buChar char=""/>
+            </a:pPr>
+            <a:r>
+              <a:rPr lang="lt-LT" sz="3600" noProof="0" dirty="0">
+                <a:effectLst/>
+                <a:latin typeface="Times New Roman" panose="02020603050405020304" pitchFamily="18" charset="0"/>
+                <a:ea typeface="Calibri" panose="020F0502020204030204" pitchFamily="34" charset="0"/>
+              </a:rPr>
+              <a:t>Kodo padengimas vienetų testais serverio dalyje procentais: 76%</a:t>
+            </a:r>
+          </a:p>
+          <a:p>
+            <a:pPr marL="342900" lvl="0" indent="-342900" algn="just">
+              <a:lnSpc>
+                <a:spcPct val="115000"/>
+              </a:lnSpc>
+              <a:buFont typeface="Symbol" panose="05050102010706020507" pitchFamily="18" charset="2"/>
+              <a:buChar char=""/>
+            </a:pPr>
+            <a:r>
+              <a:rPr lang="lt-LT" sz="3600" noProof="0" dirty="0">
+                <a:effectLst/>
+                <a:latin typeface="Times New Roman" panose="02020603050405020304" pitchFamily="18" charset="0"/>
+                <a:ea typeface="Calibri" panose="020F0502020204030204" pitchFamily="34" charset="0"/>
+              </a:rPr>
+              <a:t>Projekto metu parašytas bendras testų kiekis: 268 </a:t>
+            </a:r>
+          </a:p>
+          <a:p>
+            <a:pPr marL="342900" lvl="0" indent="-342900" algn="just">
+              <a:lnSpc>
+                <a:spcPct val="115000"/>
+              </a:lnSpc>
+              <a:buFont typeface="Symbol" panose="05050102010706020507" pitchFamily="18" charset="2"/>
+              <a:buChar char=""/>
+            </a:pPr>
+            <a:r>
+              <a:rPr lang="lt-LT" sz="3600" noProof="0" dirty="0">
+                <a:effectLst/>
+                <a:latin typeface="Times New Roman" panose="02020603050405020304" pitchFamily="18" charset="0"/>
+                <a:ea typeface="Calibri" panose="020F0502020204030204" pitchFamily="34" charset="0"/>
+              </a:rPr>
+              <a:t>Darbo valandos skirtos projektui: apie 300 valandų</a:t>
+            </a:r>
+          </a:p>
+        </p:txBody>
+      </p:sp>
+      <p:sp>
+        <p:nvSpPr>
+          <p:cNvPr id="3" name="Slide Number Placeholder 2">
             <a:extLst>
               <a:ext uri="{FF2B5EF4-FFF2-40B4-BE49-F238E27FC236}">
-                <a16:creationId xmlns:a16="http://schemas.microsoft.com/office/drawing/2014/main" id="{A972BFDA-87A9-5D44-BF7C-D8F78C975A0A}"/>
+                <a16:creationId xmlns:a16="http://schemas.microsoft.com/office/drawing/2014/main" id="{28A7095F-D191-7F72-0562-D4CDCB9A3BA2}"/>
               </a:ext>
             </a:extLst>
           </p:cNvPr>
-          <p:cNvSpPr txBox="1"/>
-          <p:nvPr/>
-        </p:nvSpPr>
-        <p:spPr>
-          <a:xfrm>
-            <a:off x="780534" y="4492487"/>
-            <a:ext cx="4492487" cy="677108"/>
-          </a:xfrm>
-          <a:prstGeom prst="rect">
-            <a:avLst/>
-          </a:prstGeom>
-          <a:noFill/>
-        </p:spPr>
-        <p:txBody>
-          <a:bodyPr wrap="square" rtlCol="0">
-            <a:spAutoFit/>
-          </a:bodyPr>
-          <a:lstStyle/>
-          <a:p>
-            <a:r>
-              <a:rPr lang="lt-LT" sz="3800" b="1" dirty="0">
-                <a:latin typeface="Arial" panose="020B0604020202020204" pitchFamily="34" charset="0"/>
-                <a:ea typeface="Inter" panose="020B0502030000000004" pitchFamily="34" charset="0"/>
-                <a:cs typeface="Arial" panose="020B0604020202020204" pitchFamily="34" charset="0"/>
-              </a:rPr>
-              <a:t>Projekto apimtis</a:t>
-            </a:r>
-            <a:endParaRPr lang="en-US" sz="3800" b="1" dirty="0">
-              <a:latin typeface="Arial" panose="020B0604020202020204" pitchFamily="34" charset="0"/>
-              <a:ea typeface="Inter" panose="020B0502030000000004" pitchFamily="34" charset="0"/>
-              <a:cs typeface="Arial" panose="020B0604020202020204" pitchFamily="34" charset="0"/>
-            </a:endParaRPr>
-          </a:p>
-        </p:txBody>
-      </p:sp>
-      <p:sp>
-        <p:nvSpPr>
-          <p:cNvPr id="8" name="TextBox 7">
-            <a:extLst>
-              <a:ext uri="{FF2B5EF4-FFF2-40B4-BE49-F238E27FC236}">
-                <a16:creationId xmlns:a16="http://schemas.microsoft.com/office/drawing/2014/main" id="{B8539AE1-21A9-5F4C-8538-0F80DFD90C5F}"/>
-              </a:ext>
-            </a:extLst>
-          </p:cNvPr>
-          <p:cNvSpPr txBox="1"/>
-          <p:nvPr/>
-        </p:nvSpPr>
-        <p:spPr>
-          <a:xfrm>
-            <a:off x="8783165" y="6802375"/>
-            <a:ext cx="7194775" cy="2862322"/>
-          </a:xfrm>
-          <a:prstGeom prst="rect">
-            <a:avLst/>
-          </a:prstGeom>
-          <a:noFill/>
-        </p:spPr>
-        <p:txBody>
-          <a:bodyPr wrap="square" rtlCol="0">
-            <a:spAutoFit/>
-          </a:bodyPr>
-          <a:lstStyle/>
-          <a:p>
-            <a:r>
-              <a:rPr lang="lt-LT" dirty="0"/>
-              <a:t>Projektas susideda iš 2 dalių: Serverio ir </a:t>
-            </a:r>
-            <a:r>
-              <a:rPr lang="lt-LT" dirty="0" err="1"/>
-              <a:t>klientinės</a:t>
-            </a:r>
-            <a:r>
-              <a:rPr lang="lt-LT" dirty="0"/>
-              <a:t> dalies.</a:t>
-            </a:r>
-          </a:p>
-          <a:p>
-            <a:r>
-              <a:rPr lang="lt-LT" dirty="0" err="1"/>
-              <a:t>Klientinė</a:t>
-            </a:r>
-            <a:r>
-              <a:rPr lang="lt-LT" dirty="0"/>
-              <a:t> dalis veikia ir „</a:t>
-            </a:r>
-            <a:r>
-              <a:rPr lang="lt-LT" dirty="0" err="1"/>
-              <a:t>Web</a:t>
-            </a:r>
-            <a:r>
-              <a:rPr lang="lt-LT" dirty="0"/>
-              <a:t>“ naršyklėje, ir mobiliojoje aplikacijoje.</a:t>
-            </a:r>
-          </a:p>
-          <a:p>
-            <a:endParaRPr lang="en-US" dirty="0"/>
-          </a:p>
-        </p:txBody>
-      </p:sp>
-      <p:sp>
-        <p:nvSpPr>
-          <p:cNvPr id="9" name="TextBox 8">
-            <a:extLst>
-              <a:ext uri="{FF2B5EF4-FFF2-40B4-BE49-F238E27FC236}">
-                <a16:creationId xmlns:a16="http://schemas.microsoft.com/office/drawing/2014/main" id="{6008A3F6-09EA-F740-846B-20B0E94CE063}"/>
-              </a:ext>
-            </a:extLst>
-          </p:cNvPr>
-          <p:cNvSpPr txBox="1"/>
-          <p:nvPr/>
-        </p:nvSpPr>
-        <p:spPr>
-          <a:xfrm>
-            <a:off x="8735039" y="4492487"/>
-            <a:ext cx="4492487" cy="677108"/>
-          </a:xfrm>
-          <a:prstGeom prst="rect">
-            <a:avLst/>
-          </a:prstGeom>
-          <a:noFill/>
-        </p:spPr>
-        <p:txBody>
-          <a:bodyPr wrap="square" rtlCol="0">
-            <a:spAutoFit/>
-          </a:bodyPr>
-          <a:lstStyle/>
-          <a:p>
-            <a:r>
-              <a:rPr lang="lt-LT" sz="3800" b="1" dirty="0">
-                <a:latin typeface="Arial" panose="020B0604020202020204" pitchFamily="34" charset="0"/>
-                <a:ea typeface="Inter" panose="020B0502030000000004" pitchFamily="34" charset="0"/>
-                <a:cs typeface="Arial" panose="020B0604020202020204" pitchFamily="34" charset="0"/>
-              </a:rPr>
-              <a:t>Modelis</a:t>
-            </a:r>
-            <a:endParaRPr lang="en-US" sz="3800" b="1" dirty="0">
-              <a:latin typeface="Arial" panose="020B0604020202020204" pitchFamily="34" charset="0"/>
-              <a:ea typeface="Inter" panose="020B0502030000000004" pitchFamily="34" charset="0"/>
-              <a:cs typeface="Arial" panose="020B0604020202020204" pitchFamily="34" charset="0"/>
-            </a:endParaRPr>
-          </a:p>
-        </p:txBody>
-      </p:sp>
-      <p:sp>
-        <p:nvSpPr>
-          <p:cNvPr id="10" name="TextBox 9">
-            <a:extLst>
-              <a:ext uri="{FF2B5EF4-FFF2-40B4-BE49-F238E27FC236}">
-                <a16:creationId xmlns:a16="http://schemas.microsoft.com/office/drawing/2014/main" id="{C2DD84F0-EB98-9846-B405-EBBF3F67D051}"/>
-              </a:ext>
-            </a:extLst>
-          </p:cNvPr>
-          <p:cNvSpPr txBox="1"/>
-          <p:nvPr/>
-        </p:nvSpPr>
-        <p:spPr>
-          <a:xfrm>
-            <a:off x="16866674" y="6802375"/>
-            <a:ext cx="6351577" cy="5078313"/>
-          </a:xfrm>
-          <a:prstGeom prst="rect">
-            <a:avLst/>
-          </a:prstGeom>
-          <a:noFill/>
-        </p:spPr>
-        <p:txBody>
-          <a:bodyPr wrap="square" rtlCol="0">
-            <a:spAutoFit/>
-          </a:bodyPr>
-          <a:lstStyle/>
-          <a:p>
-            <a:r>
-              <a:rPr lang="lt-LT" dirty="0"/>
-              <a:t>Naudotojas gali prisiregistruoti, bendrauti su kitais registruotais vartotojais tekstinių pokalbių pagalba.</a:t>
-            </a:r>
-          </a:p>
-          <a:p>
-            <a:r>
-              <a:rPr lang="lt-LT" dirty="0"/>
-              <a:t>Fokusas skiriamas į galimybę pridėti savo įrangą bei užsirezervuoti kitų naudotojų įrangą suteikiant dalinimosi paslaugą.</a:t>
-            </a:r>
-            <a:endParaRPr lang="en-US" dirty="0"/>
-          </a:p>
-        </p:txBody>
-      </p:sp>
-      <p:sp>
-        <p:nvSpPr>
-          <p:cNvPr id="11" name="TextBox 10">
-            <a:extLst>
-              <a:ext uri="{FF2B5EF4-FFF2-40B4-BE49-F238E27FC236}">
-                <a16:creationId xmlns:a16="http://schemas.microsoft.com/office/drawing/2014/main" id="{88BF63F4-C6A9-834D-B871-D03035C4B1C5}"/>
-              </a:ext>
-            </a:extLst>
-          </p:cNvPr>
-          <p:cNvSpPr txBox="1"/>
-          <p:nvPr/>
-        </p:nvSpPr>
-        <p:spPr>
-          <a:xfrm>
-            <a:off x="16962925" y="4492487"/>
-            <a:ext cx="6530255" cy="1261884"/>
-          </a:xfrm>
-          <a:prstGeom prst="rect">
-            <a:avLst/>
-          </a:prstGeom>
-          <a:noFill/>
-        </p:spPr>
-        <p:txBody>
-          <a:bodyPr wrap="square" rtlCol="0">
-            <a:spAutoFit/>
-          </a:bodyPr>
-          <a:lstStyle/>
-          <a:p>
-            <a:r>
-              <a:rPr lang="lt-LT" sz="3800" b="1" dirty="0">
-                <a:latin typeface="Arial" panose="020B0604020202020204" pitchFamily="34" charset="0"/>
-                <a:ea typeface="Inter" panose="020B0502030000000004" pitchFamily="34" charset="0"/>
-                <a:cs typeface="Arial" panose="020B0604020202020204" pitchFamily="34" charset="0"/>
-              </a:rPr>
-              <a:t>Suteikiamos paslaugos (pakeičiamas į UML)</a:t>
-            </a:r>
-            <a:endParaRPr lang="en-US" sz="3800" b="1" dirty="0">
-              <a:latin typeface="Arial" panose="020B0604020202020204" pitchFamily="34" charset="0"/>
-              <a:ea typeface="Inter" panose="020B0502030000000004" pitchFamily="34" charset="0"/>
-              <a:cs typeface="Arial" panose="020B0604020202020204" pitchFamily="34" charset="0"/>
-            </a:endParaRPr>
-          </a:p>
-        </p:txBody>
-      </p:sp>
-      <p:cxnSp>
-        <p:nvCxnSpPr>
-          <p:cNvPr id="19" name="Straight Connector 18">
-            <a:extLst>
-              <a:ext uri="{FF2B5EF4-FFF2-40B4-BE49-F238E27FC236}">
-                <a16:creationId xmlns:a16="http://schemas.microsoft.com/office/drawing/2014/main" id="{89046CEF-DC6F-E14F-A4B4-2AB7C14338AD}"/>
-              </a:ext>
-            </a:extLst>
-          </p:cNvPr>
-          <p:cNvCxnSpPr>
-            <a:cxnSpLocks/>
-          </p:cNvCxnSpPr>
-          <p:nvPr/>
-        </p:nvCxnSpPr>
-        <p:spPr>
-          <a:xfrm>
-            <a:off x="889232" y="6065031"/>
-            <a:ext cx="6474590" cy="0"/>
-          </a:xfrm>
-          <a:prstGeom prst="line">
-            <a:avLst/>
-          </a:prstGeom>
-          <a:ln w="38100"/>
-        </p:spPr>
-        <p:style>
-          <a:lnRef idx="1">
-            <a:schemeClr val="dk1"/>
-          </a:lnRef>
-          <a:fillRef idx="0">
-            <a:schemeClr val="dk1"/>
-          </a:fillRef>
-          <a:effectRef idx="0">
-            <a:schemeClr val="dk1"/>
-          </a:effectRef>
-          <a:fontRef idx="minor">
-            <a:schemeClr val="tx1"/>
-          </a:fontRef>
-        </p:style>
-      </p:cxnSp>
-      <p:cxnSp>
-        <p:nvCxnSpPr>
-          <p:cNvPr id="20" name="Straight Connector 19">
-            <a:extLst>
-              <a:ext uri="{FF2B5EF4-FFF2-40B4-BE49-F238E27FC236}">
-                <a16:creationId xmlns:a16="http://schemas.microsoft.com/office/drawing/2014/main" id="{7D364020-BE50-C244-AD58-3EB9710DBD5A}"/>
-              </a:ext>
-            </a:extLst>
-          </p:cNvPr>
-          <p:cNvCxnSpPr>
-            <a:cxnSpLocks/>
-          </p:cNvCxnSpPr>
-          <p:nvPr/>
-        </p:nvCxnSpPr>
-        <p:spPr>
-          <a:xfrm>
-            <a:off x="8854141" y="6065031"/>
-            <a:ext cx="6474590" cy="0"/>
-          </a:xfrm>
-          <a:prstGeom prst="line">
-            <a:avLst/>
-          </a:prstGeom>
-          <a:ln w="38100"/>
-        </p:spPr>
-        <p:style>
-          <a:lnRef idx="1">
-            <a:schemeClr val="dk1"/>
-          </a:lnRef>
-          <a:fillRef idx="0">
-            <a:schemeClr val="dk1"/>
-          </a:fillRef>
-          <a:effectRef idx="0">
-            <a:schemeClr val="dk1"/>
-          </a:effectRef>
-          <a:fontRef idx="minor">
-            <a:schemeClr val="tx1"/>
-          </a:fontRef>
-        </p:style>
-      </p:cxnSp>
-      <p:cxnSp>
-        <p:nvCxnSpPr>
-          <p:cNvPr id="22" name="Straight Connector 21">
-            <a:extLst>
-              <a:ext uri="{FF2B5EF4-FFF2-40B4-BE49-F238E27FC236}">
-                <a16:creationId xmlns:a16="http://schemas.microsoft.com/office/drawing/2014/main" id="{FCAB7E2C-E75F-9943-AA54-D891E832005B}"/>
-              </a:ext>
-            </a:extLst>
-          </p:cNvPr>
-          <p:cNvCxnSpPr>
-            <a:cxnSpLocks/>
-          </p:cNvCxnSpPr>
-          <p:nvPr/>
-        </p:nvCxnSpPr>
-        <p:spPr>
-          <a:xfrm>
-            <a:off x="16962926" y="6065031"/>
-            <a:ext cx="6474590" cy="0"/>
-          </a:xfrm>
-          <a:prstGeom prst="line">
-            <a:avLst/>
-          </a:prstGeom>
-          <a:ln w="38100"/>
-        </p:spPr>
-        <p:style>
-          <a:lnRef idx="1">
-            <a:schemeClr val="dk1"/>
-          </a:lnRef>
-          <a:fillRef idx="0">
-            <a:schemeClr val="dk1"/>
-          </a:fillRef>
-          <a:effectRef idx="0">
-            <a:schemeClr val="dk1"/>
-          </a:effectRef>
-          <a:fontRef idx="minor">
-            <a:schemeClr val="tx1"/>
-          </a:fontRef>
-        </p:style>
-      </p:cxnSp>
+          <p:cNvSpPr>
+            <a:spLocks noGrp="1"/>
+          </p:cNvSpPr>
+          <p:nvPr>
+            <p:ph type="sldNum" sz="quarter" idx="12"/>
+          </p:nvPr>
+        </p:nvSpPr>
+        <p:spPr/>
+        <p:txBody>
+          <a:bodyPr/>
+          <a:lstStyle/>
+          <a:p>
+            <a:fld id="{29B01A02-16AD-7D4A-AF4C-AE522BCC74EA}" type="slidenum">
+              <a:rPr lang="en-US" sz="3600" smtClean="0"/>
+              <a:t>4</a:t>
+            </a:fld>
+            <a:endParaRPr lang="en-US" sz="3600" dirty="0"/>
+          </a:p>
+        </p:txBody>
+      </p:sp>
     </p:spTree>
     <p:extLst>
       <p:ext uri="{BB962C8B-B14F-4D97-AF65-F5344CB8AC3E}">
@@ -5418,7 +7341,7 @@
         <p:cNvPr id="1" name="">
           <a:extLst>
             <a:ext uri="{FF2B5EF4-FFF2-40B4-BE49-F238E27FC236}">
-              <a16:creationId xmlns:a16="http://schemas.microsoft.com/office/drawing/2014/main" id="{90451EBE-F63F-FD2B-5DEA-DD5EB2B46D76}"/>
+              <a16:creationId xmlns:a16="http://schemas.microsoft.com/office/drawing/2014/main" id="{EFFD0719-B4A7-7847-8037-45C1B25AE8E3}"/>
             </a:ext>
           </a:extLst>
         </p:cNvPr>
@@ -5435,256 +7358,10 @@
       </p:grpSpPr>
       <p:sp>
         <p:nvSpPr>
-          <p:cNvPr id="4" name="TextBox 3">
-            <a:extLst>
-              <a:ext uri="{FF2B5EF4-FFF2-40B4-BE49-F238E27FC236}">
-                <a16:creationId xmlns:a16="http://schemas.microsoft.com/office/drawing/2014/main" id="{2F902ABB-C52F-B998-77EA-F50692358E9D}"/>
-              </a:ext>
-            </a:extLst>
-          </p:cNvPr>
-          <p:cNvSpPr txBox="1"/>
-          <p:nvPr/>
-        </p:nvSpPr>
-        <p:spPr>
-          <a:xfrm>
-            <a:off x="4128061" y="7539719"/>
-            <a:ext cx="6864564" cy="4524315"/>
-          </a:xfrm>
-          <a:prstGeom prst="rect">
-            <a:avLst/>
-          </a:prstGeom>
-          <a:noFill/>
-        </p:spPr>
-        <p:txBody>
-          <a:bodyPr wrap="square" rtlCol="0">
-            <a:spAutoFit/>
-          </a:bodyPr>
-          <a:lstStyle/>
-          <a:p>
-            <a:pPr marL="571500" indent="-571500">
-              <a:buFont typeface="Arial" panose="020B0604020202020204" pitchFamily="34" charset="0"/>
-              <a:buChar char="•"/>
-            </a:pPr>
-            <a:r>
-              <a:rPr lang="lt-LT" dirty="0"/>
-              <a:t>ASP.NET </a:t>
-            </a:r>
-            <a:r>
-              <a:rPr lang="lt-LT" dirty="0" err="1"/>
-              <a:t>Core</a:t>
-            </a:r>
-            <a:r>
-              <a:rPr lang="lt-LT" dirty="0"/>
-              <a:t> 9.0 – serverinė dalis. </a:t>
-            </a:r>
-          </a:p>
-          <a:p>
-            <a:pPr marL="571500" indent="-571500">
-              <a:buFont typeface="Arial" panose="020B0604020202020204" pitchFamily="34" charset="0"/>
-              <a:buChar char="•"/>
-            </a:pPr>
-            <a:r>
-              <a:rPr lang="lt-LT" dirty="0" err="1"/>
-              <a:t>React</a:t>
-            </a:r>
-            <a:r>
-              <a:rPr lang="lt-LT" dirty="0"/>
-              <a:t> </a:t>
-            </a:r>
-            <a:r>
-              <a:rPr lang="lt-LT" dirty="0" err="1"/>
-              <a:t>native</a:t>
-            </a:r>
-            <a:r>
-              <a:rPr lang="lt-LT" dirty="0"/>
-              <a:t> 0.79 karkasas – optimaliai </a:t>
-            </a:r>
-            <a:r>
-              <a:rPr lang="lt-LT" dirty="0" err="1"/>
-              <a:t>Web</a:t>
-            </a:r>
-            <a:r>
-              <a:rPr lang="lt-LT" dirty="0"/>
-              <a:t> ir mobilios aplikacijos </a:t>
-            </a:r>
-            <a:r>
-              <a:rPr lang="lt-LT" dirty="0" err="1"/>
-              <a:t>klientinei</a:t>
-            </a:r>
-            <a:r>
-              <a:rPr lang="lt-LT" dirty="0"/>
-              <a:t> daliai</a:t>
-            </a:r>
-            <a:br>
-              <a:rPr lang="lt-LT" dirty="0"/>
-            </a:br>
-            <a:endParaRPr lang="lt-LT" dirty="0"/>
-          </a:p>
-          <a:p>
-            <a:pPr marL="571500" indent="-571500">
-              <a:buFont typeface="Arial" panose="020B0604020202020204" pitchFamily="34" charset="0"/>
-              <a:buChar char="•"/>
-            </a:pPr>
-            <a:r>
-              <a:rPr lang="lt-LT" dirty="0"/>
-              <a:t>Expo 53.0 – supaprastinimas skirtingų platformų valdymui</a:t>
-            </a:r>
-            <a:endParaRPr lang="en-US" dirty="0"/>
-          </a:p>
-        </p:txBody>
-      </p:sp>
-      <p:sp>
-        <p:nvSpPr>
-          <p:cNvPr id="5" name="TextBox 4">
-            <a:extLst>
-              <a:ext uri="{FF2B5EF4-FFF2-40B4-BE49-F238E27FC236}">
-                <a16:creationId xmlns:a16="http://schemas.microsoft.com/office/drawing/2014/main" id="{F02BCC96-24DD-78AA-9D8F-C2B15C8C8E3F}"/>
-              </a:ext>
-            </a:extLst>
-          </p:cNvPr>
-          <p:cNvSpPr txBox="1"/>
-          <p:nvPr/>
-        </p:nvSpPr>
-        <p:spPr>
-          <a:xfrm>
-            <a:off x="4103998" y="5229831"/>
-            <a:ext cx="4492487" cy="1261884"/>
-          </a:xfrm>
-          <a:prstGeom prst="rect">
-            <a:avLst/>
-          </a:prstGeom>
-          <a:noFill/>
-        </p:spPr>
-        <p:txBody>
-          <a:bodyPr wrap="square" rtlCol="0">
-            <a:spAutoFit/>
-          </a:bodyPr>
-          <a:lstStyle/>
-          <a:p>
-            <a:r>
-              <a:rPr lang="lt-LT" sz="3800" b="1" dirty="0">
-                <a:latin typeface="Arial" panose="020B0604020202020204" pitchFamily="34" charset="0"/>
-                <a:ea typeface="Inter" panose="020B0502030000000004" pitchFamily="34" charset="0"/>
-                <a:cs typeface="Arial" panose="020B0604020202020204" pitchFamily="34" charset="0"/>
-              </a:rPr>
-              <a:t>Naudotos technologijos</a:t>
-            </a:r>
-            <a:endParaRPr lang="en-US" sz="3800" b="1" dirty="0">
-              <a:latin typeface="Arial" panose="020B0604020202020204" pitchFamily="34" charset="0"/>
-              <a:ea typeface="Inter" panose="020B0502030000000004" pitchFamily="34" charset="0"/>
-              <a:cs typeface="Arial" panose="020B0604020202020204" pitchFamily="34" charset="0"/>
-            </a:endParaRPr>
-          </a:p>
-        </p:txBody>
-      </p:sp>
-      <p:sp>
-        <p:nvSpPr>
-          <p:cNvPr id="6" name="TextBox 5">
-            <a:extLst>
-              <a:ext uri="{FF2B5EF4-FFF2-40B4-BE49-F238E27FC236}">
-                <a16:creationId xmlns:a16="http://schemas.microsoft.com/office/drawing/2014/main" id="{FBAED7C6-A0DF-9E1D-02A6-5105FB879C7E}"/>
-              </a:ext>
-            </a:extLst>
-          </p:cNvPr>
-          <p:cNvSpPr txBox="1"/>
-          <p:nvPr/>
-        </p:nvSpPr>
-        <p:spPr>
-          <a:xfrm>
-            <a:off x="13462940" y="7539719"/>
-            <a:ext cx="7029007" cy="1754326"/>
-          </a:xfrm>
-          <a:prstGeom prst="rect">
-            <a:avLst/>
-          </a:prstGeom>
-          <a:noFill/>
-        </p:spPr>
-        <p:txBody>
-          <a:bodyPr wrap="square" rtlCol="0">
-            <a:spAutoFit/>
-          </a:bodyPr>
-          <a:lstStyle/>
-          <a:p>
-            <a:pPr marL="571500" indent="-571500">
-              <a:buFont typeface="Arial" panose="020B0604020202020204" pitchFamily="34" charset="0"/>
-              <a:buChar char="•"/>
-            </a:pPr>
-            <a:r>
-              <a:rPr lang="lt-LT" dirty="0"/>
-              <a:t>Internetinė svetainė (</a:t>
-            </a:r>
-            <a:r>
-              <a:rPr lang="lt-LT" dirty="0" err="1"/>
-              <a:t>Web</a:t>
-            </a:r>
-            <a:r>
-              <a:rPr lang="lt-LT" dirty="0"/>
-              <a:t>)</a:t>
-            </a:r>
-          </a:p>
-          <a:p>
-            <a:pPr marL="571500" indent="-571500">
-              <a:buFont typeface="Arial" panose="020B0604020202020204" pitchFamily="34" charset="0"/>
-              <a:buChar char="•"/>
-            </a:pPr>
-            <a:r>
-              <a:rPr lang="lt-LT" dirty="0"/>
-              <a:t>Mobili aplikacija iOS ir Android sistemoms.</a:t>
-            </a:r>
-            <a:endParaRPr lang="en-US" dirty="0"/>
-          </a:p>
-        </p:txBody>
-      </p:sp>
-      <p:sp>
-        <p:nvSpPr>
-          <p:cNvPr id="7" name="TextBox 6">
-            <a:extLst>
-              <a:ext uri="{FF2B5EF4-FFF2-40B4-BE49-F238E27FC236}">
-                <a16:creationId xmlns:a16="http://schemas.microsoft.com/office/drawing/2014/main" id="{720CDF6F-6BF1-CC8D-C082-72348A56D013}"/>
-              </a:ext>
-            </a:extLst>
-          </p:cNvPr>
-          <p:cNvSpPr txBox="1"/>
-          <p:nvPr/>
-        </p:nvSpPr>
-        <p:spPr>
-          <a:xfrm>
-            <a:off x="13389789" y="5229831"/>
-            <a:ext cx="4492487" cy="1261884"/>
-          </a:xfrm>
-          <a:prstGeom prst="rect">
-            <a:avLst/>
-          </a:prstGeom>
-          <a:noFill/>
-        </p:spPr>
-        <p:txBody>
-          <a:bodyPr wrap="square" rtlCol="0">
-            <a:spAutoFit/>
-          </a:bodyPr>
-          <a:lstStyle/>
-          <a:p>
-            <a:r>
-              <a:rPr lang="lt-LT" sz="3800" b="1" dirty="0">
-                <a:latin typeface="Arial" panose="020B0604020202020204" pitchFamily="34" charset="0"/>
-                <a:ea typeface="Inter" panose="020B0502030000000004" pitchFamily="34" charset="0"/>
-                <a:cs typeface="Arial" panose="020B0604020202020204" pitchFamily="34" charset="0"/>
-              </a:rPr>
-              <a:t>Teikiamos platformos</a:t>
-            </a:r>
-            <a:endParaRPr lang="en-US" sz="3800" b="1" dirty="0">
-              <a:latin typeface="Arial" panose="020B0604020202020204" pitchFamily="34" charset="0"/>
-              <a:ea typeface="Inter" panose="020B0502030000000004" pitchFamily="34" charset="0"/>
-              <a:cs typeface="Arial" panose="020B0604020202020204" pitchFamily="34" charset="0"/>
-            </a:endParaRPr>
-          </a:p>
-        </p:txBody>
-      </p:sp>
-      <p:sp>
-        <p:nvSpPr>
           <p:cNvPr id="10" name="Title 1">
             <a:extLst>
               <a:ext uri="{FF2B5EF4-FFF2-40B4-BE49-F238E27FC236}">
-                <a16:creationId xmlns:a16="http://schemas.microsoft.com/office/drawing/2014/main" id="{5A1D3CB8-547C-C422-086B-CCF7446ABD5D}"/>
+                <a16:creationId xmlns:a16="http://schemas.microsoft.com/office/drawing/2014/main" id="{93A6A130-0DF1-402A-E4C0-1DDCFF5BE78C}"/>
               </a:ext>
             </a:extLst>
           </p:cNvPr>
@@ -5718,88 +7395,911 @@
           </a:p>
         </p:txBody>
       </p:sp>
-      <p:cxnSp>
-        <p:nvCxnSpPr>
-          <p:cNvPr id="16" name="Straight Connector 15">
+      <p:sp>
+        <p:nvSpPr>
+          <p:cNvPr id="2" name="Text Placeholder 3">
             <a:extLst>
               <a:ext uri="{FF2B5EF4-FFF2-40B4-BE49-F238E27FC236}">
-                <a16:creationId xmlns:a16="http://schemas.microsoft.com/office/drawing/2014/main" id="{E5EBE094-E624-5FE4-9F68-347A8F8470BA}"/>
+                <a16:creationId xmlns:a16="http://schemas.microsoft.com/office/drawing/2014/main" id="{CBD56253-B276-F673-6535-147EFD44F310}"/>
               </a:ext>
             </a:extLst>
           </p:cNvPr>
-          <p:cNvCxnSpPr>
-            <a:cxnSpLocks/>
-          </p:cNvCxnSpPr>
+          <p:cNvSpPr txBox="1">
+            <a:spLocks/>
+          </p:cNvSpPr>
           <p:nvPr/>
-        </p:nvCxnSpPr>
+        </p:nvSpPr>
         <p:spPr>
           <a:xfrm>
-            <a:off x="13512030" y="6802375"/>
-            <a:ext cx="6474590" cy="0"/>
+            <a:off x="14847660" y="7149084"/>
+            <a:ext cx="7024026" cy="5431535"/>
           </a:xfrm>
-          <a:prstGeom prst="line">
+          <a:prstGeom prst="rect">
             <a:avLst/>
           </a:prstGeom>
-          <a:ln w="38100"/>
         </p:spPr>
-        <p:style>
-          <a:lnRef idx="1">
-            <a:schemeClr val="dk1"/>
-          </a:lnRef>
-          <a:fillRef idx="0">
-            <a:schemeClr val="dk1"/>
-          </a:fillRef>
-          <a:effectRef idx="0">
-            <a:schemeClr val="dk1"/>
-          </a:effectRef>
-          <a:fontRef idx="minor">
-            <a:schemeClr val="tx1"/>
-          </a:fontRef>
-        </p:style>
-      </p:cxnSp>
-      <p:cxnSp>
-        <p:nvCxnSpPr>
-          <p:cNvPr id="18" name="Straight Connector 17">
+        <p:txBody>
+          <a:bodyPr anchor="t"/>
+          <a:lstStyle>
+            <a:lvl1pPr marL="0" indent="0" algn="l" defTabSz="914400" rtl="0" eaLnBrk="1" latinLnBrk="0" hangingPunct="1">
+              <a:lnSpc>
+                <a:spcPct val="110000"/>
+              </a:lnSpc>
+              <a:spcBef>
+                <a:spcPts val="0"/>
+              </a:spcBef>
+              <a:spcAft>
+                <a:spcPts val="0"/>
+              </a:spcAft>
+              <a:buFont typeface="+mj-lt"/>
+              <a:buNone/>
+              <a:defRPr sz="1600" b="0" i="0" kern="1200">
+                <a:solidFill>
+                  <a:schemeClr val="tx1"/>
+                </a:solidFill>
+                <a:latin typeface="Arial" panose="020B0604020202020204" pitchFamily="34" charset="0"/>
+                <a:ea typeface="Inter" panose="020B0502030000000004" pitchFamily="34" charset="0"/>
+                <a:cs typeface="Arial" panose="020B0604020202020204" pitchFamily="34" charset="0"/>
+              </a:defRPr>
+            </a:lvl1pPr>
+            <a:lvl2pPr marL="685800" indent="-228600" algn="l" defTabSz="914400" rtl="0" eaLnBrk="1" latinLnBrk="0" hangingPunct="1">
+              <a:lnSpc>
+                <a:spcPct val="90000"/>
+              </a:lnSpc>
+              <a:spcBef>
+                <a:spcPts val="500"/>
+              </a:spcBef>
+              <a:buFont typeface="Arial" panose="020B0604020202020204" pitchFamily="34" charset="0"/>
+              <a:buChar char="•"/>
+              <a:defRPr sz="2400" kern="1200">
+                <a:solidFill>
+                  <a:schemeClr val="tx1"/>
+                </a:solidFill>
+                <a:latin typeface="+mn-lt"/>
+                <a:ea typeface="+mn-ea"/>
+                <a:cs typeface="+mn-cs"/>
+              </a:defRPr>
+            </a:lvl2pPr>
+            <a:lvl3pPr marL="1143000" indent="-228600" algn="l" defTabSz="914400" rtl="0" eaLnBrk="1" latinLnBrk="0" hangingPunct="1">
+              <a:lnSpc>
+                <a:spcPct val="90000"/>
+              </a:lnSpc>
+              <a:spcBef>
+                <a:spcPts val="500"/>
+              </a:spcBef>
+              <a:buFont typeface="Arial" panose="020B0604020202020204" pitchFamily="34" charset="0"/>
+              <a:buChar char="•"/>
+              <a:defRPr sz="2000" kern="1200">
+                <a:solidFill>
+                  <a:schemeClr val="tx1"/>
+                </a:solidFill>
+                <a:latin typeface="+mn-lt"/>
+                <a:ea typeface="+mn-ea"/>
+                <a:cs typeface="+mn-cs"/>
+              </a:defRPr>
+            </a:lvl3pPr>
+            <a:lvl4pPr marL="1600200" indent="-228600" algn="l" defTabSz="914400" rtl="0" eaLnBrk="1" latinLnBrk="0" hangingPunct="1">
+              <a:lnSpc>
+                <a:spcPct val="90000"/>
+              </a:lnSpc>
+              <a:spcBef>
+                <a:spcPts val="500"/>
+              </a:spcBef>
+              <a:buFont typeface="Arial" panose="020B0604020202020204" pitchFamily="34" charset="0"/>
+              <a:buChar char="•"/>
+              <a:defRPr sz="1800" kern="1200">
+                <a:solidFill>
+                  <a:schemeClr val="tx1"/>
+                </a:solidFill>
+                <a:latin typeface="+mn-lt"/>
+                <a:ea typeface="+mn-ea"/>
+                <a:cs typeface="+mn-cs"/>
+              </a:defRPr>
+            </a:lvl4pPr>
+            <a:lvl5pPr marL="2057400" indent="-228600" algn="l" defTabSz="914400" rtl="0" eaLnBrk="1" latinLnBrk="0" hangingPunct="1">
+              <a:lnSpc>
+                <a:spcPct val="90000"/>
+              </a:lnSpc>
+              <a:spcBef>
+                <a:spcPts val="500"/>
+              </a:spcBef>
+              <a:buFont typeface="Arial" panose="020B0604020202020204" pitchFamily="34" charset="0"/>
+              <a:buChar char="•"/>
+              <a:defRPr sz="1800" kern="1200">
+                <a:solidFill>
+                  <a:schemeClr val="tx1"/>
+                </a:solidFill>
+                <a:latin typeface="+mn-lt"/>
+                <a:ea typeface="+mn-ea"/>
+                <a:cs typeface="+mn-cs"/>
+              </a:defRPr>
+            </a:lvl5pPr>
+            <a:lvl6pPr marL="2514600" indent="-228600" algn="l" defTabSz="914400" rtl="0" eaLnBrk="1" latinLnBrk="0" hangingPunct="1">
+              <a:lnSpc>
+                <a:spcPct val="90000"/>
+              </a:lnSpc>
+              <a:spcBef>
+                <a:spcPts val="500"/>
+              </a:spcBef>
+              <a:buFont typeface="Arial" panose="020B0604020202020204" pitchFamily="34" charset="0"/>
+              <a:buChar char="•"/>
+              <a:defRPr sz="1800" kern="1200">
+                <a:solidFill>
+                  <a:schemeClr val="tx1"/>
+                </a:solidFill>
+                <a:latin typeface="+mn-lt"/>
+                <a:ea typeface="+mn-ea"/>
+                <a:cs typeface="+mn-cs"/>
+              </a:defRPr>
+            </a:lvl6pPr>
+            <a:lvl7pPr marL="2971800" indent="-228600" algn="l" defTabSz="914400" rtl="0" eaLnBrk="1" latinLnBrk="0" hangingPunct="1">
+              <a:lnSpc>
+                <a:spcPct val="90000"/>
+              </a:lnSpc>
+              <a:spcBef>
+                <a:spcPts val="500"/>
+              </a:spcBef>
+              <a:buFont typeface="Arial" panose="020B0604020202020204" pitchFamily="34" charset="0"/>
+              <a:buChar char="•"/>
+              <a:defRPr sz="1800" kern="1200">
+                <a:solidFill>
+                  <a:schemeClr val="tx1"/>
+                </a:solidFill>
+                <a:latin typeface="+mn-lt"/>
+                <a:ea typeface="+mn-ea"/>
+                <a:cs typeface="+mn-cs"/>
+              </a:defRPr>
+            </a:lvl7pPr>
+            <a:lvl8pPr marL="3429000" indent="-228600" algn="l" defTabSz="914400" rtl="0" eaLnBrk="1" latinLnBrk="0" hangingPunct="1">
+              <a:lnSpc>
+                <a:spcPct val="90000"/>
+              </a:lnSpc>
+              <a:spcBef>
+                <a:spcPts val="500"/>
+              </a:spcBef>
+              <a:buFont typeface="Arial" panose="020B0604020202020204" pitchFamily="34" charset="0"/>
+              <a:buChar char="•"/>
+              <a:defRPr sz="1800" kern="1200">
+                <a:solidFill>
+                  <a:schemeClr val="tx1"/>
+                </a:solidFill>
+                <a:latin typeface="+mn-lt"/>
+                <a:ea typeface="+mn-ea"/>
+                <a:cs typeface="+mn-cs"/>
+              </a:defRPr>
+            </a:lvl8pPr>
+            <a:lvl9pPr marL="3886200" indent="-228600" algn="l" defTabSz="914400" rtl="0" eaLnBrk="1" latinLnBrk="0" hangingPunct="1">
+              <a:lnSpc>
+                <a:spcPct val="90000"/>
+              </a:lnSpc>
+              <a:spcBef>
+                <a:spcPts val="500"/>
+              </a:spcBef>
+              <a:buFont typeface="Arial" panose="020B0604020202020204" pitchFamily="34" charset="0"/>
+              <a:buChar char="•"/>
+              <a:defRPr sz="1800" kern="1200">
+                <a:solidFill>
+                  <a:schemeClr val="tx1"/>
+                </a:solidFill>
+                <a:latin typeface="+mn-lt"/>
+                <a:ea typeface="+mn-ea"/>
+                <a:cs typeface="+mn-cs"/>
+              </a:defRPr>
+            </a:lvl9pPr>
+          </a:lstStyle>
+          <a:p>
+            <a:pPr algn="l" rtl="0" eaLnBrk="1" latinLnBrk="0" hangingPunct="1">
+              <a:lnSpc>
+                <a:spcPct val="110000"/>
+              </a:lnSpc>
+              <a:buClrTx/>
+              <a:buSzPts val="1600"/>
+            </a:pPr>
+            <a:r>
+              <a:rPr lang="lt-LT" sz="3600" b="1" i="0" kern="1200" noProof="0" dirty="0">
+                <a:solidFill>
+                  <a:srgbClr val="000000"/>
+                </a:solidFill>
+                <a:effectLst/>
+                <a:latin typeface="Arial" panose="020B0604020202020204" pitchFamily="34" charset="0"/>
+                <a:ea typeface="Inter" panose="020B0502030000000004"/>
+                <a:cs typeface="Arial" panose="020B0604020202020204" pitchFamily="34" charset="0"/>
+              </a:rPr>
+              <a:t>Naudojamos sisteminės technologijos</a:t>
+            </a:r>
+            <a:endParaRPr lang="lt-LT" sz="4400" dirty="0">
+              <a:solidFill>
+                <a:srgbClr val="000000"/>
+              </a:solidFill>
+            </a:endParaRPr>
+          </a:p>
+          <a:p>
+            <a:pPr marL="571500" indent="-571500">
+              <a:buFont typeface="Arial" panose="020B0604020202020204" pitchFamily="34" charset="0"/>
+              <a:buChar char="•"/>
+            </a:pPr>
+            <a:r>
+              <a:rPr lang="lt-LT" sz="3600" dirty="0">
+                <a:solidFill>
+                  <a:srgbClr val="000000"/>
+                </a:solidFill>
+              </a:rPr>
+              <a:t>C# 13</a:t>
+            </a:r>
+          </a:p>
+          <a:p>
+            <a:pPr marL="571500" indent="-571500">
+              <a:buFont typeface="Arial" panose="020B0604020202020204" pitchFamily="34" charset="0"/>
+              <a:buChar char="•"/>
+            </a:pPr>
+            <a:r>
+              <a:rPr lang="lt-LT" sz="3600" dirty="0">
+                <a:solidFill>
+                  <a:srgbClr val="000000"/>
+                </a:solidFill>
+              </a:rPr>
+              <a:t>ASP.NET Core 9.0</a:t>
+            </a:r>
+            <a:endParaRPr lang="lt-LT" sz="3200" dirty="0"/>
+          </a:p>
+          <a:p>
+            <a:pPr marL="571500" indent="-571500" algn="l" rtl="0" eaLnBrk="1" latinLnBrk="0" hangingPunct="1">
+              <a:lnSpc>
+                <a:spcPct val="110000"/>
+              </a:lnSpc>
+              <a:buFont typeface="Arial" panose="020B0604020202020204" pitchFamily="34" charset="0"/>
+              <a:buChar char="•"/>
+            </a:pPr>
+            <a:r>
+              <a:rPr lang="lt-LT" sz="3600" b="0" i="0" kern="1200" noProof="0" dirty="0">
+                <a:solidFill>
+                  <a:srgbClr val="000000"/>
+                </a:solidFill>
+                <a:effectLst/>
+                <a:latin typeface="Arial" panose="020B0604020202020204" pitchFamily="34" charset="0"/>
+                <a:ea typeface="Inter" panose="020B0502030000000004"/>
+                <a:cs typeface="Arial" panose="020B0604020202020204" pitchFamily="34" charset="0"/>
+              </a:rPr>
+              <a:t>xUnit 2.9.3</a:t>
+            </a:r>
+          </a:p>
+          <a:p>
+            <a:pPr marL="571500" indent="-571500">
+              <a:buFont typeface="Arial" panose="020B0604020202020204" pitchFamily="34" charset="0"/>
+              <a:buChar char="•"/>
+            </a:pPr>
+            <a:r>
+              <a:rPr lang="lt-LT" sz="3600" b="0" i="0" kern="1200" noProof="0" dirty="0">
+                <a:solidFill>
+                  <a:srgbClr val="000000"/>
+                </a:solidFill>
+                <a:effectLst/>
+                <a:latin typeface="Arial" panose="020B0604020202020204" pitchFamily="34" charset="0"/>
+                <a:ea typeface="Inter" panose="020B0502030000000004"/>
+                <a:cs typeface="Arial" panose="020B0604020202020204" pitchFamily="34" charset="0"/>
+              </a:rPr>
+              <a:t>React Native </a:t>
+            </a:r>
+            <a:r>
+              <a:rPr lang="en-GB" sz="3600" dirty="0">
+                <a:solidFill>
+                  <a:srgbClr val="000000"/>
+                </a:solidFill>
+              </a:rPr>
+              <a:t>0.83.2</a:t>
+            </a:r>
+            <a:endParaRPr lang="lt-LT" sz="3600" dirty="0">
+              <a:solidFill>
+                <a:srgbClr val="000000"/>
+              </a:solidFill>
+            </a:endParaRPr>
+          </a:p>
+          <a:p>
+            <a:pPr marL="571500" indent="-571500">
+              <a:buFont typeface="Arial" panose="020B0604020202020204" pitchFamily="34" charset="0"/>
+              <a:buChar char="•"/>
+            </a:pPr>
+            <a:r>
+              <a:rPr lang="lt-LT" sz="3600" dirty="0">
+                <a:solidFill>
+                  <a:srgbClr val="000000"/>
+                </a:solidFill>
+              </a:rPr>
+              <a:t>React 19.2</a:t>
+            </a:r>
+          </a:p>
+          <a:p>
+            <a:pPr marL="571500" indent="-571500" algn="l" rtl="0" eaLnBrk="1" latinLnBrk="0" hangingPunct="1">
+              <a:lnSpc>
+                <a:spcPct val="110000"/>
+              </a:lnSpc>
+              <a:buFont typeface="Arial" panose="020B0604020202020204" pitchFamily="34" charset="0"/>
+              <a:buChar char="•"/>
+            </a:pPr>
+            <a:r>
+              <a:rPr lang="lt-LT" sz="3600" b="0" i="0" kern="1200" noProof="0" dirty="0">
+                <a:solidFill>
+                  <a:srgbClr val="000000"/>
+                </a:solidFill>
+                <a:effectLst/>
+                <a:latin typeface="Arial" panose="020B0604020202020204" pitchFamily="34" charset="0"/>
+                <a:ea typeface="Inter" panose="020B0502030000000004"/>
+                <a:cs typeface="Arial" panose="020B0604020202020204" pitchFamily="34" charset="0"/>
+              </a:rPr>
+              <a:t>Expo 55.0</a:t>
+            </a:r>
+            <a:endParaRPr lang="lt-LT" sz="3200" noProof="0" dirty="0">
+              <a:effectLst/>
+            </a:endParaRPr>
+          </a:p>
+        </p:txBody>
+      </p:sp>
+      <p:sp>
+        <p:nvSpPr>
+          <p:cNvPr id="3" name="Text Placeholder 3">
             <a:extLst>
               <a:ext uri="{FF2B5EF4-FFF2-40B4-BE49-F238E27FC236}">
-                <a16:creationId xmlns:a16="http://schemas.microsoft.com/office/drawing/2014/main" id="{BC2AA812-79E7-3E75-4D8C-F143D1F378C7}"/>
+                <a16:creationId xmlns:a16="http://schemas.microsoft.com/office/drawing/2014/main" id="{75D59994-1568-46CD-8204-ADC1982E0883}"/>
               </a:ext>
             </a:extLst>
           </p:cNvPr>
-          <p:cNvCxnSpPr>
-            <a:cxnSpLocks/>
-          </p:cNvCxnSpPr>
+          <p:cNvSpPr txBox="1">
+            <a:spLocks/>
+          </p:cNvSpPr>
           <p:nvPr/>
-        </p:nvCxnSpPr>
+        </p:nvSpPr>
         <p:spPr>
           <a:xfrm>
-            <a:off x="4212696" y="6802375"/>
-            <a:ext cx="6474590" cy="0"/>
+            <a:off x="14847660" y="3712922"/>
+            <a:ext cx="8406947" cy="2802178"/>
           </a:xfrm>
-          <a:prstGeom prst="line">
+          <a:prstGeom prst="rect">
             <a:avLst/>
           </a:prstGeom>
-          <a:ln w="38100"/>
         </p:spPr>
-        <p:style>
-          <a:lnRef idx="1">
-            <a:schemeClr val="dk1"/>
-          </a:lnRef>
-          <a:fillRef idx="0">
-            <a:schemeClr val="dk1"/>
-          </a:fillRef>
-          <a:effectRef idx="0">
-            <a:schemeClr val="dk1"/>
-          </a:effectRef>
-          <a:fontRef idx="minor">
-            <a:schemeClr val="tx1"/>
-          </a:fontRef>
-        </p:style>
-      </p:cxnSp>
+        <p:txBody>
+          <a:bodyPr anchor="t"/>
+          <a:lstStyle>
+            <a:lvl1pPr marL="0" indent="0" algn="l" defTabSz="914400" rtl="0" eaLnBrk="1" latinLnBrk="0" hangingPunct="1">
+              <a:lnSpc>
+                <a:spcPct val="110000"/>
+              </a:lnSpc>
+              <a:spcBef>
+                <a:spcPts val="0"/>
+              </a:spcBef>
+              <a:spcAft>
+                <a:spcPts val="0"/>
+              </a:spcAft>
+              <a:buFont typeface="+mj-lt"/>
+              <a:buNone/>
+              <a:defRPr sz="1600" b="0" i="0" kern="1200">
+                <a:solidFill>
+                  <a:schemeClr val="tx1"/>
+                </a:solidFill>
+                <a:latin typeface="Arial" panose="020B0604020202020204" pitchFamily="34" charset="0"/>
+                <a:ea typeface="Inter" panose="020B0502030000000004" pitchFamily="34" charset="0"/>
+                <a:cs typeface="Arial" panose="020B0604020202020204" pitchFamily="34" charset="0"/>
+              </a:defRPr>
+            </a:lvl1pPr>
+            <a:lvl2pPr marL="685800" indent="-228600" algn="l" defTabSz="914400" rtl="0" eaLnBrk="1" latinLnBrk="0" hangingPunct="1">
+              <a:lnSpc>
+                <a:spcPct val="90000"/>
+              </a:lnSpc>
+              <a:spcBef>
+                <a:spcPts val="500"/>
+              </a:spcBef>
+              <a:buFont typeface="Arial" panose="020B0604020202020204" pitchFamily="34" charset="0"/>
+              <a:buChar char="•"/>
+              <a:defRPr sz="2400" kern="1200">
+                <a:solidFill>
+                  <a:schemeClr val="tx1"/>
+                </a:solidFill>
+                <a:latin typeface="+mn-lt"/>
+                <a:ea typeface="+mn-ea"/>
+                <a:cs typeface="+mn-cs"/>
+              </a:defRPr>
+            </a:lvl2pPr>
+            <a:lvl3pPr marL="1143000" indent="-228600" algn="l" defTabSz="914400" rtl="0" eaLnBrk="1" latinLnBrk="0" hangingPunct="1">
+              <a:lnSpc>
+                <a:spcPct val="90000"/>
+              </a:lnSpc>
+              <a:spcBef>
+                <a:spcPts val="500"/>
+              </a:spcBef>
+              <a:buFont typeface="Arial" panose="020B0604020202020204" pitchFamily="34" charset="0"/>
+              <a:buChar char="•"/>
+              <a:defRPr sz="2000" kern="1200">
+                <a:solidFill>
+                  <a:schemeClr val="tx1"/>
+                </a:solidFill>
+                <a:latin typeface="+mn-lt"/>
+                <a:ea typeface="+mn-ea"/>
+                <a:cs typeface="+mn-cs"/>
+              </a:defRPr>
+            </a:lvl3pPr>
+            <a:lvl4pPr marL="1600200" indent="-228600" algn="l" defTabSz="914400" rtl="0" eaLnBrk="1" latinLnBrk="0" hangingPunct="1">
+              <a:lnSpc>
+                <a:spcPct val="90000"/>
+              </a:lnSpc>
+              <a:spcBef>
+                <a:spcPts val="500"/>
+              </a:spcBef>
+              <a:buFont typeface="Arial" panose="020B0604020202020204" pitchFamily="34" charset="0"/>
+              <a:buChar char="•"/>
+              <a:defRPr sz="1800" kern="1200">
+                <a:solidFill>
+                  <a:schemeClr val="tx1"/>
+                </a:solidFill>
+                <a:latin typeface="+mn-lt"/>
+                <a:ea typeface="+mn-ea"/>
+                <a:cs typeface="+mn-cs"/>
+              </a:defRPr>
+            </a:lvl4pPr>
+            <a:lvl5pPr marL="2057400" indent="-228600" algn="l" defTabSz="914400" rtl="0" eaLnBrk="1" latinLnBrk="0" hangingPunct="1">
+              <a:lnSpc>
+                <a:spcPct val="90000"/>
+              </a:lnSpc>
+              <a:spcBef>
+                <a:spcPts val="500"/>
+              </a:spcBef>
+              <a:buFont typeface="Arial" panose="020B0604020202020204" pitchFamily="34" charset="0"/>
+              <a:buChar char="•"/>
+              <a:defRPr sz="1800" kern="1200">
+                <a:solidFill>
+                  <a:schemeClr val="tx1"/>
+                </a:solidFill>
+                <a:latin typeface="+mn-lt"/>
+                <a:ea typeface="+mn-ea"/>
+                <a:cs typeface="+mn-cs"/>
+              </a:defRPr>
+            </a:lvl5pPr>
+            <a:lvl6pPr marL="2514600" indent="-228600" algn="l" defTabSz="914400" rtl="0" eaLnBrk="1" latinLnBrk="0" hangingPunct="1">
+              <a:lnSpc>
+                <a:spcPct val="90000"/>
+              </a:lnSpc>
+              <a:spcBef>
+                <a:spcPts val="500"/>
+              </a:spcBef>
+              <a:buFont typeface="Arial" panose="020B0604020202020204" pitchFamily="34" charset="0"/>
+              <a:buChar char="•"/>
+              <a:defRPr sz="1800" kern="1200">
+                <a:solidFill>
+                  <a:schemeClr val="tx1"/>
+                </a:solidFill>
+                <a:latin typeface="+mn-lt"/>
+                <a:ea typeface="+mn-ea"/>
+                <a:cs typeface="+mn-cs"/>
+              </a:defRPr>
+            </a:lvl6pPr>
+            <a:lvl7pPr marL="2971800" indent="-228600" algn="l" defTabSz="914400" rtl="0" eaLnBrk="1" latinLnBrk="0" hangingPunct="1">
+              <a:lnSpc>
+                <a:spcPct val="90000"/>
+              </a:lnSpc>
+              <a:spcBef>
+                <a:spcPts val="500"/>
+              </a:spcBef>
+              <a:buFont typeface="Arial" panose="020B0604020202020204" pitchFamily="34" charset="0"/>
+              <a:buChar char="•"/>
+              <a:defRPr sz="1800" kern="1200">
+                <a:solidFill>
+                  <a:schemeClr val="tx1"/>
+                </a:solidFill>
+                <a:latin typeface="+mn-lt"/>
+                <a:ea typeface="+mn-ea"/>
+                <a:cs typeface="+mn-cs"/>
+              </a:defRPr>
+            </a:lvl7pPr>
+            <a:lvl8pPr marL="3429000" indent="-228600" algn="l" defTabSz="914400" rtl="0" eaLnBrk="1" latinLnBrk="0" hangingPunct="1">
+              <a:lnSpc>
+                <a:spcPct val="90000"/>
+              </a:lnSpc>
+              <a:spcBef>
+                <a:spcPts val="500"/>
+              </a:spcBef>
+              <a:buFont typeface="Arial" panose="020B0604020202020204" pitchFamily="34" charset="0"/>
+              <a:buChar char="•"/>
+              <a:defRPr sz="1800" kern="1200">
+                <a:solidFill>
+                  <a:schemeClr val="tx1"/>
+                </a:solidFill>
+                <a:latin typeface="+mn-lt"/>
+                <a:ea typeface="+mn-ea"/>
+                <a:cs typeface="+mn-cs"/>
+              </a:defRPr>
+            </a:lvl8pPr>
+            <a:lvl9pPr marL="3886200" indent="-228600" algn="l" defTabSz="914400" rtl="0" eaLnBrk="1" latinLnBrk="0" hangingPunct="1">
+              <a:lnSpc>
+                <a:spcPct val="90000"/>
+              </a:lnSpc>
+              <a:spcBef>
+                <a:spcPts val="500"/>
+              </a:spcBef>
+              <a:buFont typeface="Arial" panose="020B0604020202020204" pitchFamily="34" charset="0"/>
+              <a:buChar char="•"/>
+              <a:defRPr sz="1800" kern="1200">
+                <a:solidFill>
+                  <a:schemeClr val="tx1"/>
+                </a:solidFill>
+                <a:latin typeface="+mn-lt"/>
+                <a:ea typeface="+mn-ea"/>
+                <a:cs typeface="+mn-cs"/>
+              </a:defRPr>
+            </a:lvl9pPr>
+          </a:lstStyle>
+          <a:p>
+            <a:pPr>
+              <a:buSzPts val="1600"/>
+            </a:pPr>
+            <a:r>
+              <a:rPr lang="lt-LT" sz="3600" b="1" dirty="0">
+                <a:solidFill>
+                  <a:srgbClr val="000000"/>
+                </a:solidFill>
+              </a:rPr>
+              <a:t>Naudojami įrankiai:</a:t>
+            </a:r>
+          </a:p>
+          <a:p>
+            <a:pPr marL="285750" indent="-285750">
+              <a:buFont typeface="Arial" panose="020B0604020202020204" pitchFamily="34" charset="0"/>
+              <a:buChar char="•"/>
+            </a:pPr>
+            <a:r>
+              <a:rPr lang="lt-LT" sz="3600" dirty="0">
+                <a:solidFill>
+                  <a:srgbClr val="000000"/>
+                </a:solidFill>
+              </a:rPr>
+              <a:t>Visual Studio Code</a:t>
+            </a:r>
+          </a:p>
+          <a:p>
+            <a:pPr marL="285750" indent="-285750">
+              <a:buFont typeface="Arial" panose="020B0604020202020204" pitchFamily="34" charset="0"/>
+              <a:buChar char="•"/>
+            </a:pPr>
+            <a:r>
+              <a:rPr lang="lt-LT" sz="3600" dirty="0">
+                <a:solidFill>
+                  <a:srgbClr val="000000"/>
+                </a:solidFill>
+              </a:rPr>
+              <a:t>Visual Studio</a:t>
+            </a:r>
+          </a:p>
+          <a:p>
+            <a:pPr marL="285750" indent="-285750">
+              <a:buFont typeface="Arial" panose="020B0604020202020204" pitchFamily="34" charset="0"/>
+              <a:buChar char="•"/>
+            </a:pPr>
+            <a:r>
+              <a:rPr lang="lt-LT" sz="3600" dirty="0">
+                <a:solidFill>
+                  <a:srgbClr val="000000"/>
+                </a:solidFill>
+              </a:rPr>
+              <a:t>SQL Server Managment Studio 22</a:t>
+            </a:r>
+          </a:p>
+        </p:txBody>
+      </p:sp>
+      <p:sp>
+        <p:nvSpPr>
+          <p:cNvPr id="8" name="Text Placeholder 3">
+            <a:extLst>
+              <a:ext uri="{FF2B5EF4-FFF2-40B4-BE49-F238E27FC236}">
+                <a16:creationId xmlns:a16="http://schemas.microsoft.com/office/drawing/2014/main" id="{6A1B617A-3CA0-25A0-A430-37116CC33011}"/>
+              </a:ext>
+            </a:extLst>
+          </p:cNvPr>
+          <p:cNvSpPr txBox="1">
+            <a:spLocks/>
+          </p:cNvSpPr>
+          <p:nvPr/>
+        </p:nvSpPr>
+        <p:spPr>
+          <a:xfrm>
+            <a:off x="3631216" y="5609311"/>
+            <a:ext cx="8406947" cy="5192039"/>
+          </a:xfrm>
+          <a:prstGeom prst="rect">
+            <a:avLst/>
+          </a:prstGeom>
+        </p:spPr>
+        <p:txBody>
+          <a:bodyPr/>
+          <a:lstStyle>
+            <a:lvl1pPr marL="457177" indent="-457177" algn="l" defTabSz="1828709" rtl="0" eaLnBrk="1" latinLnBrk="0" hangingPunct="1">
+              <a:lnSpc>
+                <a:spcPct val="90000"/>
+              </a:lnSpc>
+              <a:spcBef>
+                <a:spcPts val="2000"/>
+              </a:spcBef>
+              <a:buFont typeface="Arial" panose="020B0604020202020204" pitchFamily="34" charset="0"/>
+              <a:buChar char="•"/>
+              <a:defRPr sz="5600" kern="1200">
+                <a:solidFill>
+                  <a:schemeClr val="tx1"/>
+                </a:solidFill>
+                <a:latin typeface="+mn-lt"/>
+                <a:ea typeface="+mn-ea"/>
+                <a:cs typeface="+mn-cs"/>
+              </a:defRPr>
+            </a:lvl1pPr>
+            <a:lvl2pPr marL="1371531" indent="-457177" algn="l" defTabSz="1828709" rtl="0" eaLnBrk="1" latinLnBrk="0" hangingPunct="1">
+              <a:lnSpc>
+                <a:spcPct val="90000"/>
+              </a:lnSpc>
+              <a:spcBef>
+                <a:spcPts val="1000"/>
+              </a:spcBef>
+              <a:buFont typeface="Arial" panose="020B0604020202020204" pitchFamily="34" charset="0"/>
+              <a:buChar char="•"/>
+              <a:defRPr sz="4800" kern="1200">
+                <a:solidFill>
+                  <a:schemeClr val="tx1"/>
+                </a:solidFill>
+                <a:latin typeface="+mn-lt"/>
+                <a:ea typeface="+mn-ea"/>
+                <a:cs typeface="+mn-cs"/>
+              </a:defRPr>
+            </a:lvl2pPr>
+            <a:lvl3pPr marL="2285886" indent="-457177" algn="l" defTabSz="1828709" rtl="0" eaLnBrk="1" latinLnBrk="0" hangingPunct="1">
+              <a:lnSpc>
+                <a:spcPct val="90000"/>
+              </a:lnSpc>
+              <a:spcBef>
+                <a:spcPts val="1000"/>
+              </a:spcBef>
+              <a:buFont typeface="Arial" panose="020B0604020202020204" pitchFamily="34" charset="0"/>
+              <a:buChar char="•"/>
+              <a:defRPr sz="4000" kern="1200">
+                <a:solidFill>
+                  <a:schemeClr val="tx1"/>
+                </a:solidFill>
+                <a:latin typeface="+mn-lt"/>
+                <a:ea typeface="+mn-ea"/>
+                <a:cs typeface="+mn-cs"/>
+              </a:defRPr>
+            </a:lvl3pPr>
+            <a:lvl4pPr marL="3200240" indent="-457177" algn="l" defTabSz="1828709" rtl="0" eaLnBrk="1" latinLnBrk="0" hangingPunct="1">
+              <a:lnSpc>
+                <a:spcPct val="90000"/>
+              </a:lnSpc>
+              <a:spcBef>
+                <a:spcPts val="1000"/>
+              </a:spcBef>
+              <a:buFont typeface="Arial" panose="020B0604020202020204" pitchFamily="34" charset="0"/>
+              <a:buChar char="•"/>
+              <a:defRPr sz="3600" kern="1200">
+                <a:solidFill>
+                  <a:schemeClr val="tx1"/>
+                </a:solidFill>
+                <a:latin typeface="+mn-lt"/>
+                <a:ea typeface="+mn-ea"/>
+                <a:cs typeface="+mn-cs"/>
+              </a:defRPr>
+            </a:lvl4pPr>
+            <a:lvl5pPr marL="4114594" indent="-457177" algn="l" defTabSz="1828709" rtl="0" eaLnBrk="1" latinLnBrk="0" hangingPunct="1">
+              <a:lnSpc>
+                <a:spcPct val="90000"/>
+              </a:lnSpc>
+              <a:spcBef>
+                <a:spcPts val="1000"/>
+              </a:spcBef>
+              <a:buFont typeface="Arial" panose="020B0604020202020204" pitchFamily="34" charset="0"/>
+              <a:buChar char="•"/>
+              <a:defRPr sz="3600" kern="1200">
+                <a:solidFill>
+                  <a:schemeClr val="tx1"/>
+                </a:solidFill>
+                <a:latin typeface="+mn-lt"/>
+                <a:ea typeface="+mn-ea"/>
+                <a:cs typeface="+mn-cs"/>
+              </a:defRPr>
+            </a:lvl5pPr>
+            <a:lvl6pPr marL="5028949" indent="-457177" algn="l" defTabSz="1828709" rtl="0" eaLnBrk="1" latinLnBrk="0" hangingPunct="1">
+              <a:lnSpc>
+                <a:spcPct val="90000"/>
+              </a:lnSpc>
+              <a:spcBef>
+                <a:spcPts val="1000"/>
+              </a:spcBef>
+              <a:buFont typeface="Arial" panose="020B0604020202020204" pitchFamily="34" charset="0"/>
+              <a:buChar char="•"/>
+              <a:defRPr sz="3600" kern="1200">
+                <a:solidFill>
+                  <a:schemeClr val="tx1"/>
+                </a:solidFill>
+                <a:latin typeface="+mn-lt"/>
+                <a:ea typeface="+mn-ea"/>
+                <a:cs typeface="+mn-cs"/>
+              </a:defRPr>
+            </a:lvl6pPr>
+            <a:lvl7pPr marL="5943303" indent="-457177" algn="l" defTabSz="1828709" rtl="0" eaLnBrk="1" latinLnBrk="0" hangingPunct="1">
+              <a:lnSpc>
+                <a:spcPct val="90000"/>
+              </a:lnSpc>
+              <a:spcBef>
+                <a:spcPts val="1000"/>
+              </a:spcBef>
+              <a:buFont typeface="Arial" panose="020B0604020202020204" pitchFamily="34" charset="0"/>
+              <a:buChar char="•"/>
+              <a:defRPr sz="3600" kern="1200">
+                <a:solidFill>
+                  <a:schemeClr val="tx1"/>
+                </a:solidFill>
+                <a:latin typeface="+mn-lt"/>
+                <a:ea typeface="+mn-ea"/>
+                <a:cs typeface="+mn-cs"/>
+              </a:defRPr>
+            </a:lvl7pPr>
+            <a:lvl8pPr marL="6857657" indent="-457177" algn="l" defTabSz="1828709" rtl="0" eaLnBrk="1" latinLnBrk="0" hangingPunct="1">
+              <a:lnSpc>
+                <a:spcPct val="90000"/>
+              </a:lnSpc>
+              <a:spcBef>
+                <a:spcPts val="1000"/>
+              </a:spcBef>
+              <a:buFont typeface="Arial" panose="020B0604020202020204" pitchFamily="34" charset="0"/>
+              <a:buChar char="•"/>
+              <a:defRPr sz="3600" kern="1200">
+                <a:solidFill>
+                  <a:schemeClr val="tx1"/>
+                </a:solidFill>
+                <a:latin typeface="+mn-lt"/>
+                <a:ea typeface="+mn-ea"/>
+                <a:cs typeface="+mn-cs"/>
+              </a:defRPr>
+            </a:lvl8pPr>
+            <a:lvl9pPr marL="7772011" indent="-457177" algn="l" defTabSz="1828709" rtl="0" eaLnBrk="1" latinLnBrk="0" hangingPunct="1">
+              <a:lnSpc>
+                <a:spcPct val="90000"/>
+              </a:lnSpc>
+              <a:spcBef>
+                <a:spcPts val="1000"/>
+              </a:spcBef>
+              <a:buFont typeface="Arial" panose="020B0604020202020204" pitchFamily="34" charset="0"/>
+              <a:buChar char="•"/>
+              <a:defRPr sz="3600" kern="1200">
+                <a:solidFill>
+                  <a:schemeClr val="tx1"/>
+                </a:solidFill>
+                <a:latin typeface="+mn-lt"/>
+                <a:ea typeface="+mn-ea"/>
+                <a:cs typeface="+mn-cs"/>
+              </a:defRPr>
+            </a:lvl9pPr>
+          </a:lstStyle>
+          <a:p>
+            <a:pPr marL="0" indent="0">
+              <a:buNone/>
+            </a:pPr>
+            <a:r>
+              <a:rPr lang="lt-LT" sz="3600" b="1" dirty="0">
+                <a:latin typeface="Arial" panose="020B0604020202020204" pitchFamily="34" charset="0"/>
+                <a:cs typeface="Arial" panose="020B0604020202020204" pitchFamily="34" charset="0"/>
+              </a:rPr>
+              <a:t>Debesijos paslaugų technologijos:</a:t>
+            </a:r>
+          </a:p>
+          <a:p>
+            <a:pPr marL="0" indent="0">
+              <a:buNone/>
+            </a:pPr>
+            <a:r>
+              <a:rPr lang="lt-LT" sz="3600" dirty="0">
+                <a:latin typeface="Arial" panose="020B0604020202020204" pitchFamily="34" charset="0"/>
+                <a:cs typeface="Arial" panose="020B0604020202020204" pitchFamily="34" charset="0"/>
+              </a:rPr>
+              <a:t>AWS:</a:t>
+            </a:r>
+          </a:p>
+          <a:p>
+            <a:pPr marL="971550" lvl="1" indent="-285750"/>
+            <a:r>
+              <a:rPr lang="lt-LT" sz="3600" dirty="0">
+                <a:latin typeface="Arial" panose="020B0604020202020204" pitchFamily="34" charset="0"/>
+                <a:cs typeface="Arial" panose="020B0604020202020204" pitchFamily="34" charset="0"/>
+              </a:rPr>
+              <a:t>AWS RDS</a:t>
+            </a:r>
+          </a:p>
+          <a:p>
+            <a:pPr marL="971550" lvl="1" indent="-285750"/>
+            <a:r>
+              <a:rPr lang="lt-LT" sz="3600" dirty="0">
+                <a:latin typeface="Arial" panose="020B0604020202020204" pitchFamily="34" charset="0"/>
+                <a:cs typeface="Arial" panose="020B0604020202020204" pitchFamily="34" charset="0"/>
+              </a:rPr>
+              <a:t>AWS S3</a:t>
+            </a:r>
+          </a:p>
+          <a:p>
+            <a:pPr marL="971550" lvl="1" indent="-285750"/>
+            <a:r>
+              <a:rPr lang="lt-LT" sz="3600" dirty="0">
+                <a:latin typeface="Arial" panose="020B0604020202020204" pitchFamily="34" charset="0"/>
+                <a:cs typeface="Arial" panose="020B0604020202020204" pitchFamily="34" charset="0"/>
+              </a:rPr>
+              <a:t>AWS Cloudfront</a:t>
+            </a:r>
+          </a:p>
+          <a:p>
+            <a:pPr marL="971550" lvl="1" indent="-285750"/>
+            <a:r>
+              <a:rPr lang="lt-LT" sz="3600" dirty="0">
+                <a:latin typeface="Arial" panose="020B0604020202020204" pitchFamily="34" charset="0"/>
+                <a:cs typeface="Arial" panose="020B0604020202020204" pitchFamily="34" charset="0"/>
+              </a:rPr>
+              <a:t>AWS Elastic Beanstalk</a:t>
+            </a:r>
+          </a:p>
+          <a:p>
+            <a:pPr marL="0" lvl="1" indent="0">
+              <a:spcBef>
+                <a:spcPts val="2000"/>
+              </a:spcBef>
+              <a:buNone/>
+            </a:pPr>
+            <a:r>
+              <a:rPr lang="lt-LT" sz="3600" dirty="0">
+                <a:latin typeface="Arial" panose="020B0604020202020204" pitchFamily="34" charset="0"/>
+                <a:cs typeface="Arial" panose="020B0604020202020204" pitchFamily="34" charset="0"/>
+              </a:rPr>
+              <a:t>Expo:</a:t>
+            </a:r>
+          </a:p>
+          <a:p>
+            <a:pPr marL="971550" lvl="1" indent="-285750"/>
+            <a:r>
+              <a:rPr lang="lt-LT" sz="3600" dirty="0">
+                <a:latin typeface="Arial" panose="020B0604020202020204" pitchFamily="34" charset="0"/>
+                <a:cs typeface="Arial" panose="020B0604020202020204" pitchFamily="34" charset="0"/>
+              </a:rPr>
+              <a:t>EAS Builds</a:t>
+            </a:r>
+          </a:p>
+          <a:p>
+            <a:pPr marL="285750" indent="-285750"/>
+            <a:endParaRPr lang="lt-LT" dirty="0"/>
+          </a:p>
+        </p:txBody>
+      </p:sp>
+      <p:sp>
+        <p:nvSpPr>
+          <p:cNvPr id="4" name="Slide Number Placeholder 3">
+            <a:extLst>
+              <a:ext uri="{FF2B5EF4-FFF2-40B4-BE49-F238E27FC236}">
+                <a16:creationId xmlns:a16="http://schemas.microsoft.com/office/drawing/2014/main" id="{31F41849-7BDC-235A-265E-F7E9D7F4BD30}"/>
+              </a:ext>
+            </a:extLst>
+          </p:cNvPr>
+          <p:cNvSpPr>
+            <a:spLocks noGrp="1"/>
+          </p:cNvSpPr>
+          <p:nvPr>
+            <p:ph type="sldNum" sz="quarter" idx="12"/>
+          </p:nvPr>
+        </p:nvSpPr>
+        <p:spPr/>
+        <p:txBody>
+          <a:bodyPr/>
+          <a:lstStyle/>
+          <a:p>
+            <a:fld id="{29B01A02-16AD-7D4A-AF4C-AE522BCC74EA}" type="slidenum">
+              <a:rPr lang="en-US" sz="3600" smtClean="0"/>
+              <a:t>5</a:t>
+            </a:fld>
+            <a:endParaRPr lang="en-US" sz="3600" dirty="0"/>
+          </a:p>
+        </p:txBody>
+      </p:sp>
     </p:spTree>
     <p:extLst>
       <p:ext uri="{BB962C8B-B14F-4D97-AF65-F5344CB8AC3E}">
-        <p14:creationId xmlns:p14="http://schemas.microsoft.com/office/powerpoint/2010/main" val="3406013602"/>
+        <p14:creationId xmlns:p14="http://schemas.microsoft.com/office/powerpoint/2010/main" val="4206833380"/>
       </p:ext>
     </p:extLst>
   </p:cSld>
@@ -5904,8 +8404,8 @@
         </p:nvSpPr>
         <p:spPr>
           <a:xfrm>
-            <a:off x="3631216" y="4169664"/>
-            <a:ext cx="17710880" cy="1754326"/>
+            <a:off x="3783616" y="4243346"/>
+            <a:ext cx="17710880" cy="3416320"/>
           </a:xfrm>
           <a:prstGeom prst="rect">
             <a:avLst/>
@@ -5919,8 +8419,48 @@
           <a:lstStyle/>
           <a:p>
             <a:r>
+              <a:rPr lang="lt-LT" b="1" dirty="0"/>
+              <a:t>Nefunkciniai reikalavimai-</a:t>
+            </a:r>
+          </a:p>
+          <a:p>
+            <a:pPr marL="742950" indent="-742950">
+              <a:buFont typeface="+mj-lt"/>
+              <a:buAutoNum type="arabicPeriod"/>
+            </a:pPr>
+            <a:r>
               <a:rPr lang="lt-LT" dirty="0"/>
-              <a:t>Nefunkciniai reikalavimai-</a:t>
+              <a:t>Sistema veikia Anglų ir Lietuvių kalba</a:t>
+            </a:r>
+          </a:p>
+          <a:p>
+            <a:pPr marL="742950" indent="-742950">
+              <a:buFont typeface="+mj-lt"/>
+              <a:buAutoNum type="arabicPeriod"/>
+            </a:pPr>
+            <a:r>
+              <a:rPr lang="lt-LT" dirty="0"/>
+              <a:t>Sistema prieinama 2 temomis – šviesia ir tamsia</a:t>
+            </a:r>
+          </a:p>
+          <a:p>
+            <a:pPr marL="742950" indent="-742950">
+              <a:buFont typeface="+mj-lt"/>
+              <a:buAutoNum type="arabicPeriod"/>
+            </a:pPr>
+            <a:r>
+              <a:rPr lang="lt-LT" dirty="0"/>
+              <a:t>Serverinės dalies metodai pasiekiami tik iš autentifikuotų vartotojų</a:t>
+            </a:r>
+          </a:p>
+          <a:p>
+            <a:pPr marL="742950" indent="-742950">
+              <a:buFont typeface="+mj-lt"/>
+              <a:buAutoNum type="arabicPeriod"/>
+            </a:pPr>
+            <a:r>
+              <a:rPr lang="lt-LT" dirty="0"/>
+              <a:t>Sistema gali būti diegiama arba debesijoje, arba nuosavame serveryje</a:t>
             </a:r>
           </a:p>
           <a:p>
@@ -5928,25 +8468,101 @@
               <a:buFont typeface="Arial" panose="020B0604020202020204" pitchFamily="34" charset="0"/>
               <a:buChar char="•"/>
             </a:pPr>
+            <a:endParaRPr lang="lt-LT" dirty="0"/>
+          </a:p>
+        </p:txBody>
+      </p:sp>
+      <p:sp>
+        <p:nvSpPr>
+          <p:cNvPr id="3" name="TextBox 2">
+            <a:extLst>
+              <a:ext uri="{FF2B5EF4-FFF2-40B4-BE49-F238E27FC236}">
+                <a16:creationId xmlns:a16="http://schemas.microsoft.com/office/drawing/2014/main" id="{ED17524D-8C86-E421-1115-5142FD58BFCE}"/>
+              </a:ext>
+            </a:extLst>
+          </p:cNvPr>
+          <p:cNvSpPr txBox="1"/>
+          <p:nvPr/>
+        </p:nvSpPr>
+        <p:spPr>
+          <a:xfrm>
+            <a:off x="3631216" y="8982589"/>
+            <a:ext cx="17710880" cy="2308324"/>
+          </a:xfrm>
+          <a:prstGeom prst="rect">
+            <a:avLst/>
+          </a:prstGeom>
+          <a:noFill/>
+        </p:spPr>
+        <p:txBody>
+          <a:bodyPr wrap="square" rtlCol="0">
+            <a:spAutoFit/>
+          </a:bodyPr>
+          <a:lstStyle/>
+          <a:p>
+            <a:r>
+              <a:rPr lang="lt-LT" b="1" dirty="0"/>
+              <a:t>Funkciniai reikalavimai -</a:t>
+            </a:r>
+          </a:p>
+          <a:p>
+            <a:pPr marL="742950" indent="-742950">
+              <a:buFont typeface="+mj-lt"/>
+              <a:buAutoNum type="arabicPeriod"/>
+            </a:pPr>
             <a:r>
               <a:rPr lang="lt-LT" dirty="0"/>
-              <a:t>Sistema veikia Anglų ir Lietuvių kalba</a:t>
-            </a:r>
-          </a:p>
-          <a:p>
-            <a:pPr marL="571500" indent="-571500">
-              <a:buFont typeface="Arial" panose="020B0604020202020204" pitchFamily="34" charset="0"/>
-              <a:buChar char="•"/>
+              <a:t>Rezervuoti įrangą</a:t>
+            </a:r>
+          </a:p>
+          <a:p>
+            <a:pPr marL="742950" indent="-742950">
+              <a:buFont typeface="+mj-lt"/>
+              <a:buAutoNum type="arabicPeriod"/>
             </a:pPr>
             <a:r>
               <a:rPr lang="lt-LT" dirty="0"/>
-              <a:t>Sistema prieinama 2 temomis – šviesia </a:t>
-            </a:r>
-            <a:r>
-              <a:rPr lang="lt-LT"/>
-              <a:t>ir tamsia</a:t>
-            </a:r>
-            <a:endParaRPr lang="lt-LT" dirty="0"/>
+              <a:t>Pokalbių galimybė tarp vartotojų</a:t>
+            </a:r>
+          </a:p>
+          <a:p>
+            <a:pPr marL="742950" indent="-742950">
+              <a:buFont typeface="+mj-lt"/>
+              <a:buAutoNum type="arabicPeriod"/>
+            </a:pPr>
+            <a:r>
+              <a:rPr lang="lt-LT" dirty="0"/>
+              <a:t>Galimybė užsiregistruoti išoriniais tapatybės tiekėjais (Google,Facebook,Microsoft)</a:t>
+            </a:r>
+          </a:p>
+        </p:txBody>
+      </p:sp>
+      <p:sp>
+        <p:nvSpPr>
+          <p:cNvPr id="4" name="Slide Number Placeholder 3">
+            <a:extLst>
+              <a:ext uri="{FF2B5EF4-FFF2-40B4-BE49-F238E27FC236}">
+                <a16:creationId xmlns:a16="http://schemas.microsoft.com/office/drawing/2014/main" id="{EE773F55-17BD-2FC3-E80F-74E8ACCD9FBB}"/>
+              </a:ext>
+            </a:extLst>
+          </p:cNvPr>
+          <p:cNvSpPr>
+            <a:spLocks noGrp="1"/>
+          </p:cNvSpPr>
+          <p:nvPr>
+            <p:ph type="sldNum" sz="quarter" idx="12"/>
+          </p:nvPr>
+        </p:nvSpPr>
+        <p:spPr/>
+        <p:txBody>
+          <a:bodyPr/>
+          <a:lstStyle/>
+          <a:p>
+            <a:fld id="{29B01A02-16AD-7D4A-AF4C-AE522BCC74EA}" type="slidenum">
+              <a:rPr lang="en-US" sz="3600" smtClean="0"/>
+              <a:t>6</a:t>
+            </a:fld>
+            <a:endParaRPr lang="en-US" sz="3600" dirty="0"/>
           </a:p>
         </p:txBody>
       </p:sp>
@@ -5985,7 +8601,7 @@
         <p:cNvPr id="1" name="">
           <a:extLst>
             <a:ext uri="{FF2B5EF4-FFF2-40B4-BE49-F238E27FC236}">
-              <a16:creationId xmlns:a16="http://schemas.microsoft.com/office/drawing/2014/main" id="{8A60C16B-AD92-220B-5D09-19E3E17CF4BB}"/>
+              <a16:creationId xmlns:a16="http://schemas.microsoft.com/office/drawing/2014/main" id="{4F190D83-2719-BF50-5DAA-F20527D91EA5}"/>
             </a:ext>
           </a:extLst>
         </p:cNvPr>
@@ -6005,7 +8621,7 @@
           <p:cNvPr id="10" name="Title 1">
             <a:extLst>
               <a:ext uri="{FF2B5EF4-FFF2-40B4-BE49-F238E27FC236}">
-                <a16:creationId xmlns:a16="http://schemas.microsoft.com/office/drawing/2014/main" id="{F1C36419-2B6F-07E6-B0FD-E32326889BC8}"/>
+                <a16:creationId xmlns:a16="http://schemas.microsoft.com/office/drawing/2014/main" id="{155E75A6-8062-F5D0-1DE7-E1DE423E064C}"/>
               </a:ext>
             </a:extLst>
           </p:cNvPr>
@@ -6029,55 +8645,84 @@
           <a:lstStyle/>
           <a:p>
             <a:r>
-              <a:rPr lang="en-US" sz="5900" b="1" dirty="0">
+              <a:rPr lang="lt-LT" sz="5900" b="1" dirty="0">
                 <a:latin typeface="Arial" panose="020B0604020202020204" pitchFamily="34" charset="0"/>
                 <a:ea typeface="Inter" panose="020B0502030000000004" pitchFamily="34" charset="0"/>
                 <a:cs typeface="Arial" panose="020B0604020202020204" pitchFamily="34" charset="0"/>
               </a:rPr>
-              <a:t>INFRASTRUKTŪRA</a:t>
-            </a:r>
-          </a:p>
-        </p:txBody>
-      </p:sp>
-      <p:sp>
-        <p:nvSpPr>
-          <p:cNvPr id="2" name="TextBox 1">
+              <a:t>Paketų diagrama</a:t>
+            </a:r>
+            <a:endParaRPr lang="en-US" sz="5900" b="1" dirty="0">
+              <a:latin typeface="Arial" panose="020B0604020202020204" pitchFamily="34" charset="0"/>
+              <a:ea typeface="Inter" panose="020B0502030000000004" pitchFamily="34" charset="0"/>
+              <a:cs typeface="Arial" panose="020B0604020202020204" pitchFamily="34" charset="0"/>
+            </a:endParaRPr>
+          </a:p>
+        </p:txBody>
+      </p:sp>
+      <p:pic>
+        <p:nvPicPr>
+          <p:cNvPr id="11" name="Picture 10">
             <a:extLst>
               <a:ext uri="{FF2B5EF4-FFF2-40B4-BE49-F238E27FC236}">
-                <a16:creationId xmlns:a16="http://schemas.microsoft.com/office/drawing/2014/main" id="{68279D44-082D-7453-5F84-2B966320F833}"/>
+                <a16:creationId xmlns:a16="http://schemas.microsoft.com/office/drawing/2014/main" id="{D7FADA9B-E107-336F-75D1-DC4B8B0F1D6D}"/>
               </a:ext>
             </a:extLst>
           </p:cNvPr>
-          <p:cNvSpPr txBox="1"/>
+          <p:cNvPicPr>
+            <a:picLocks noChangeAspect="1"/>
+          </p:cNvPicPr>
           <p:nvPr/>
-        </p:nvSpPr>
+        </p:nvPicPr>
+        <p:blipFill>
+          <a:blip r:embed="rId3"/>
+          <a:stretch>
+            <a:fillRect/>
+          </a:stretch>
+        </p:blipFill>
         <p:spPr>
           <a:xfrm>
-            <a:off x="3631216" y="4169664"/>
-            <a:ext cx="17710880" cy="646331"/>
+            <a:off x="170129" y="3826960"/>
+            <a:ext cx="24042153" cy="8710480"/>
           </a:xfrm>
           <a:prstGeom prst="rect">
             <a:avLst/>
           </a:prstGeom>
-          <a:noFill/>
         </p:spPr>
-        <p:txBody>
-          <a:bodyPr wrap="square" rtlCol="0">
-            <a:spAutoFit/>
-          </a:bodyPr>
-          <a:lstStyle/>
-          <a:p>
-            <a:r>
-              <a:rPr lang="lt-LT" dirty="0"/>
-              <a:t>Čia bus pateikta UML diagramos. WIP</a:t>
-            </a:r>
+      </p:pic>
+      <p:sp>
+        <p:nvSpPr>
+          <p:cNvPr id="2" name="Slide Number Placeholder 1">
+            <a:extLst>
+              <a:ext uri="{FF2B5EF4-FFF2-40B4-BE49-F238E27FC236}">
+                <a16:creationId xmlns:a16="http://schemas.microsoft.com/office/drawing/2014/main" id="{BD24136D-1829-F662-B6D3-CA56F759F7F1}"/>
+              </a:ext>
+            </a:extLst>
+          </p:cNvPr>
+          <p:cNvSpPr>
+            <a:spLocks noGrp="1"/>
+          </p:cNvSpPr>
+          <p:nvPr>
+            <p:ph type="sldNum" sz="quarter" idx="12"/>
+          </p:nvPr>
+        </p:nvSpPr>
+        <p:spPr/>
+        <p:txBody>
+          <a:bodyPr/>
+          <a:lstStyle/>
+          <a:p>
+            <a:fld id="{29B01A02-16AD-7D4A-AF4C-AE522BCC74EA}" type="slidenum">
+              <a:rPr lang="en-US" sz="3600" smtClean="0"/>
+              <a:t>7</a:t>
+            </a:fld>
+            <a:endParaRPr lang="en-US" sz="3600" dirty="0"/>
           </a:p>
         </p:txBody>
       </p:sp>
     </p:spTree>
     <p:extLst>
       <p:ext uri="{BB962C8B-B14F-4D97-AF65-F5344CB8AC3E}">
-        <p14:creationId xmlns:p14="http://schemas.microsoft.com/office/powerpoint/2010/main" val="4011079394"/>
+        <p14:creationId xmlns:p14="http://schemas.microsoft.com/office/powerpoint/2010/main" val="647713850"/>
       </p:ext>
     </p:extLst>
   </p:cSld>
@@ -6088,12 +8733,12 @@
 </file>
 
 <file path=ppt/slides/slide8.xml><?xml version="1.0" encoding="utf-8"?>
-<p:sld xmlns:a="http://schemas.openxmlformats.org/drawingml/2006/main" xmlns:r="http://schemas.openxmlformats.org/officeDocument/2006/relationships" xmlns:p="http://schemas.openxmlformats.org/presentationml/2006/main">
+<p:sld xmlns:a="http://schemas.openxmlformats.org/drawingml/2006/main" xmlns:r="http://schemas.openxmlformats.org/officeDocument/2006/relationships" xmlns:p="http://schemas.openxmlformats.org/presentationml/2006/main" show="0">
   <p:cSld>
     <p:bg>
       <p:bgPr>
         <a:blipFill dpi="0" rotWithShape="1">
-          <a:blip r:embed="rId3">
+          <a:blip r:embed="rId2">
             <a:lum/>
           </a:blip>
           <a:srcRect/>
@@ -6106,7 +8751,13 @@
     </p:bg>
     <p:spTree>
       <p:nvGrpSpPr>
-        <p:cNvPr id="1" name=""/>
+        <p:cNvPr id="1" name="">
+          <a:extLst>
+            <a:ext uri="{FF2B5EF4-FFF2-40B4-BE49-F238E27FC236}">
+              <a16:creationId xmlns:a16="http://schemas.microsoft.com/office/drawing/2014/main" id="{61F95C6F-0FA4-E0AB-1B57-0D3D7AEF99E0}"/>
+            </a:ext>
+          </a:extLst>
+        </p:cNvPr>
         <p:cNvGrpSpPr/>
         <p:nvPr/>
       </p:nvGrpSpPr>
@@ -6120,10 +8771,10 @@
       </p:grpSpPr>
       <p:sp>
         <p:nvSpPr>
-          <p:cNvPr id="5" name="Title 1">
+          <p:cNvPr id="10" name="Title 1">
             <a:extLst>
               <a:ext uri="{FF2B5EF4-FFF2-40B4-BE49-F238E27FC236}">
-                <a16:creationId xmlns:a16="http://schemas.microsoft.com/office/drawing/2014/main" id="{50F2B085-A039-BC41-8AB9-1DFB69B06CAD}"/>
+                <a16:creationId xmlns:a16="http://schemas.microsoft.com/office/drawing/2014/main" id="{151B0F37-53EA-F16E-EE64-D4068131A6BB}"/>
               </a:ext>
             </a:extLst>
           </p:cNvPr>
@@ -6137,7 +8788,7 @@
         <p:spPr>
           <a:xfrm>
             <a:off x="3631216" y="269297"/>
-            <a:ext cx="12470175" cy="2651126"/>
+            <a:ext cx="21029831" cy="2651126"/>
           </a:xfrm>
         </p:spPr>
         <p:txBody>
@@ -6152,7 +8803,7 @@
                 <a:ea typeface="Inter" panose="020B0502030000000004" pitchFamily="34" charset="0"/>
                 <a:cs typeface="Arial" panose="020B0604020202020204" pitchFamily="34" charset="0"/>
               </a:rPr>
-              <a:t>Duomenų bazės diagrama (keičiama į UML)</a:t>
+              <a:t>Serverinės dalies klasių diagrama</a:t>
             </a:r>
             <a:endParaRPr lang="en-US" sz="5900" b="1" dirty="0">
               <a:latin typeface="Arial" panose="020B0604020202020204" pitchFamily="34" charset="0"/>
@@ -6164,10 +8815,10 @@
       </p:sp>
       <p:pic>
         <p:nvPicPr>
-          <p:cNvPr id="3" name="Paveikslėlis 2">
+          <p:cNvPr id="7" name="Picture 6">
             <a:extLst>
               <a:ext uri="{FF2B5EF4-FFF2-40B4-BE49-F238E27FC236}">
-                <a16:creationId xmlns:a16="http://schemas.microsoft.com/office/drawing/2014/main" id="{4599C157-34FD-8FE3-CFB1-71433F779366}"/>
+                <a16:creationId xmlns:a16="http://schemas.microsoft.com/office/drawing/2014/main" id="{A29A9DA9-9F9B-CD27-E0DC-E4E6C3CBCCEC}"/>
               </a:ext>
             </a:extLst>
           </p:cNvPr>
@@ -6177,25 +8828,54 @@
           <p:nvPr/>
         </p:nvPicPr>
         <p:blipFill>
-          <a:blip r:embed="rId4"/>
+          <a:blip r:embed="rId3"/>
           <a:stretch>
             <a:fillRect/>
           </a:stretch>
         </p:blipFill>
         <p:spPr>
           <a:xfrm>
-            <a:off x="3775064" y="3095656"/>
-            <a:ext cx="15701656" cy="10351047"/>
+            <a:off x="5211257" y="2872662"/>
+            <a:ext cx="13959897" cy="10665481"/>
           </a:xfrm>
           <a:prstGeom prst="rect">
             <a:avLst/>
           </a:prstGeom>
         </p:spPr>
       </p:pic>
+      <p:sp>
+        <p:nvSpPr>
+          <p:cNvPr id="2" name="Slide Number Placeholder 1">
+            <a:extLst>
+              <a:ext uri="{FF2B5EF4-FFF2-40B4-BE49-F238E27FC236}">
+                <a16:creationId xmlns:a16="http://schemas.microsoft.com/office/drawing/2014/main" id="{305DD476-000E-C2FB-F5AC-72C719944CA9}"/>
+              </a:ext>
+            </a:extLst>
+          </p:cNvPr>
+          <p:cNvSpPr>
+            <a:spLocks noGrp="1"/>
+          </p:cNvSpPr>
+          <p:nvPr>
+            <p:ph type="sldNum" sz="quarter" idx="12"/>
+          </p:nvPr>
+        </p:nvSpPr>
+        <p:spPr/>
+        <p:txBody>
+          <a:bodyPr/>
+          <a:lstStyle/>
+          <a:p>
+            <a:fld id="{29B01A02-16AD-7D4A-AF4C-AE522BCC74EA}" type="slidenum">
+              <a:rPr lang="en-US" smtClean="0"/>
+              <a:t>8</a:t>
+            </a:fld>
+            <a:endParaRPr lang="en-US"/>
+          </a:p>
+        </p:txBody>
+      </p:sp>
     </p:spTree>
     <p:extLst>
       <p:ext uri="{BB962C8B-B14F-4D97-AF65-F5344CB8AC3E}">
-        <p14:creationId xmlns:p14="http://schemas.microsoft.com/office/powerpoint/2010/main" val="1504982506"/>
+        <p14:creationId xmlns:p14="http://schemas.microsoft.com/office/powerpoint/2010/main" val="843184907"/>
       </p:ext>
     </p:extLst>
   </p:cSld>
@@ -6211,7 +8891,7 @@
     <p:bg>
       <p:bgPr>
         <a:blipFill dpi="0" rotWithShape="1">
-          <a:blip r:embed="rId3">
+          <a:blip r:embed="rId2">
             <a:lum/>
           </a:blip>
           <a:srcRect/>
@@ -6227,7 +8907,7 @@
         <p:cNvPr id="1" name="">
           <a:extLst>
             <a:ext uri="{FF2B5EF4-FFF2-40B4-BE49-F238E27FC236}">
-              <a16:creationId xmlns:a16="http://schemas.microsoft.com/office/drawing/2014/main" id="{F4622C24-B3D5-4DDF-CB55-14435A8876D9}"/>
+              <a16:creationId xmlns:a16="http://schemas.microsoft.com/office/drawing/2014/main" id="{35364D35-428B-824B-DE71-AD81FC3BCBEF}"/>
             </a:ext>
           </a:extLst>
         </p:cNvPr>
@@ -6244,10 +8924,10 @@
       </p:grpSpPr>
       <p:sp>
         <p:nvSpPr>
-          <p:cNvPr id="5" name="Title 1">
+          <p:cNvPr id="10" name="Title 1">
             <a:extLst>
               <a:ext uri="{FF2B5EF4-FFF2-40B4-BE49-F238E27FC236}">
-                <a16:creationId xmlns:a16="http://schemas.microsoft.com/office/drawing/2014/main" id="{06EFC3D0-032B-B51F-E9B1-13EC501D495C}"/>
+                <a16:creationId xmlns:a16="http://schemas.microsoft.com/office/drawing/2014/main" id="{69446104-0119-10AC-3128-E1995830C28B}"/>
               </a:ext>
             </a:extLst>
           </p:cNvPr>
@@ -6261,7 +8941,7 @@
         <p:spPr>
           <a:xfrm>
             <a:off x="3631216" y="269297"/>
-            <a:ext cx="12470175" cy="2651126"/>
+            <a:ext cx="21029831" cy="2651126"/>
           </a:xfrm>
         </p:spPr>
         <p:txBody>
@@ -6276,7 +8956,7 @@
                 <a:ea typeface="Inter" panose="020B0502030000000004" pitchFamily="34" charset="0"/>
                 <a:cs typeface="Arial" panose="020B0604020202020204" pitchFamily="34" charset="0"/>
               </a:rPr>
-              <a:t>Diegimo diagrama</a:t>
+              <a:t>Sekų diagrama – Book equipment</a:t>
             </a:r>
             <a:endParaRPr lang="en-US" sz="5900" b="1" dirty="0">
               <a:latin typeface="Arial" panose="020B0604020202020204" pitchFamily="34" charset="0"/>
@@ -6288,44 +8968,67 @@
       </p:sp>
       <p:sp>
         <p:nvSpPr>
-          <p:cNvPr id="2" name="TextBox 1">
+          <p:cNvPr id="2" name="Slide Number Placeholder 1">
             <a:extLst>
               <a:ext uri="{FF2B5EF4-FFF2-40B4-BE49-F238E27FC236}">
-                <a16:creationId xmlns:a16="http://schemas.microsoft.com/office/drawing/2014/main" id="{738043A3-7974-8B00-8D07-668F128DEAAB}"/>
+                <a16:creationId xmlns:a16="http://schemas.microsoft.com/office/drawing/2014/main" id="{EC364E03-B956-9112-E63A-641B8B88795C}"/>
               </a:ext>
             </a:extLst>
           </p:cNvPr>
-          <p:cNvSpPr txBox="1"/>
+          <p:cNvSpPr>
+            <a:spLocks noGrp="1"/>
+          </p:cNvSpPr>
+          <p:nvPr>
+            <p:ph type="sldNum" sz="quarter" idx="12"/>
+          </p:nvPr>
+        </p:nvSpPr>
+        <p:spPr/>
+        <p:txBody>
+          <a:bodyPr/>
+          <a:lstStyle/>
+          <a:p>
+            <a:r>
+              <a:rPr lang="lt-LT" sz="3600" dirty="0"/>
+              <a:t>8</a:t>
+            </a:r>
+            <a:endParaRPr lang="en-US" dirty="0"/>
+          </a:p>
+        </p:txBody>
+      </p:sp>
+      <p:pic>
+        <p:nvPicPr>
+          <p:cNvPr id="4" name="Picture 3">
+            <a:extLst>
+              <a:ext uri="{FF2B5EF4-FFF2-40B4-BE49-F238E27FC236}">
+                <a16:creationId xmlns:a16="http://schemas.microsoft.com/office/drawing/2014/main" id="{CB02CAB4-40F6-E2DD-2087-6E669069047E}"/>
+              </a:ext>
+            </a:extLst>
+          </p:cNvPr>
+          <p:cNvPicPr>
+            <a:picLocks noChangeAspect="1"/>
+          </p:cNvPicPr>
           <p:nvPr/>
-        </p:nvSpPr>
+        </p:nvPicPr>
+        <p:blipFill>
+          <a:blip r:embed="rId3"/>
+          <a:stretch>
+            <a:fillRect/>
+          </a:stretch>
+        </p:blipFill>
         <p:spPr>
           <a:xfrm>
-            <a:off x="3238500" y="4343400"/>
-            <a:ext cx="18402300" cy="646331"/>
+            <a:off x="3631216" y="1990221"/>
+            <a:ext cx="16156969" cy="11725779"/>
           </a:xfrm>
           <a:prstGeom prst="rect">
             <a:avLst/>
           </a:prstGeom>
-          <a:noFill/>
         </p:spPr>
-        <p:txBody>
-          <a:bodyPr wrap="square" rtlCol="0">
-            <a:spAutoFit/>
-          </a:bodyPr>
-          <a:lstStyle/>
-          <a:p>
-            <a:pPr algn="ctr"/>
-            <a:r>
-              <a:rPr lang="lt-LT" dirty="0"/>
-              <a:t>WIP</a:t>
-            </a:r>
-          </a:p>
-        </p:txBody>
-      </p:sp>
+      </p:pic>
     </p:spTree>
     <p:extLst>
       <p:ext uri="{BB962C8B-B14F-4D97-AF65-F5344CB8AC3E}">
-        <p14:creationId xmlns:p14="http://schemas.microsoft.com/office/powerpoint/2010/main" val="2146565914"/>
+        <p14:creationId xmlns:p14="http://schemas.microsoft.com/office/powerpoint/2010/main" val="933262306"/>
       </p:ext>
     </p:extLst>
   </p:cSld>

--- a/Office_stuff/Tarpinio Gynimo skaidrės.pptx
+++ b/Office_stuff/Tarpinio Gynimo skaidrės.pptx
@@ -212,7 +212,7 @@
           <a:p>
             <a:fld id="{94D01F65-ADE3-4424-A0F2-5E1F648B8E51}" type="datetimeFigureOut">
               <a:rPr lang="en-US" smtClean="0"/>
-              <a:t>5/10/2026</a:t>
+              <a:t>5/11/2026</a:t>
             </a:fld>
             <a:endParaRPr lang="en-US"/>
           </a:p>
@@ -1126,7 +1126,7 @@
           <a:p>
             <a:fld id="{74F880E5-5F82-415C-9525-1F3631A7AE8F}" type="datetime1">
               <a:rPr lang="en-US" smtClean="0"/>
-              <a:t>5/10/2026</a:t>
+              <a:t>5/11/2026</a:t>
             </a:fld>
             <a:endParaRPr lang="en-US"/>
           </a:p>
@@ -1296,7 +1296,7 @@
           <a:p>
             <a:fld id="{63287B1D-AF4C-43BA-A2CC-3D3995A8E269}" type="datetime1">
               <a:rPr lang="en-US" smtClean="0"/>
-              <a:t>5/10/2026</a:t>
+              <a:t>5/11/2026</a:t>
             </a:fld>
             <a:endParaRPr lang="en-US"/>
           </a:p>
@@ -1476,7 +1476,7 @@
           <a:p>
             <a:fld id="{1EA15F11-500F-40CB-A231-56DAC8067F9F}" type="datetime1">
               <a:rPr lang="en-US" smtClean="0"/>
-              <a:t>5/10/2026</a:t>
+              <a:t>5/11/2026</a:t>
             </a:fld>
             <a:endParaRPr lang="en-US"/>
           </a:p>
@@ -1646,7 +1646,7 @@
           <a:p>
             <a:fld id="{7ED0485C-C0C8-49F5-A85A-1480642569F2}" type="datetime1">
               <a:rPr lang="en-US" smtClean="0"/>
-              <a:t>5/10/2026</a:t>
+              <a:t>5/11/2026</a:t>
             </a:fld>
             <a:endParaRPr lang="en-US"/>
           </a:p>
@@ -1892,7 +1892,7 @@
           <a:p>
             <a:fld id="{AFCA74A8-EEE6-4E2C-969F-BCCD7B351E6C}" type="datetime1">
               <a:rPr lang="en-US" smtClean="0"/>
-              <a:t>5/10/2026</a:t>
+              <a:t>5/11/2026</a:t>
             </a:fld>
             <a:endParaRPr lang="en-US"/>
           </a:p>
@@ -2124,7 +2124,7 @@
           <a:p>
             <a:fld id="{9E6162BC-34BB-45B1-BF1A-3FB9ED2801EB}" type="datetime1">
               <a:rPr lang="en-US" smtClean="0"/>
-              <a:t>5/10/2026</a:t>
+              <a:t>5/11/2026</a:t>
             </a:fld>
             <a:endParaRPr lang="en-US"/>
           </a:p>
@@ -2491,7 +2491,7 @@
           <a:p>
             <a:fld id="{60B5E9F1-B21A-41A2-B2F0-56E2FDED885B}" type="datetime1">
               <a:rPr lang="en-US" smtClean="0"/>
-              <a:t>5/10/2026</a:t>
+              <a:t>5/11/2026</a:t>
             </a:fld>
             <a:endParaRPr lang="en-US"/>
           </a:p>
@@ -2609,7 +2609,7 @@
           <a:p>
             <a:fld id="{F1579879-1CA8-4A23-B24B-EC9F3C303221}" type="datetime1">
               <a:rPr lang="en-US" smtClean="0"/>
-              <a:t>5/10/2026</a:t>
+              <a:t>5/11/2026</a:t>
             </a:fld>
             <a:endParaRPr lang="en-US"/>
           </a:p>
@@ -2704,7 +2704,7 @@
           <a:p>
             <a:fld id="{16B6C98E-CCA0-4AF2-8099-7186DF10A5E7}" type="datetime1">
               <a:rPr lang="en-US" smtClean="0"/>
-              <a:t>5/10/2026</a:t>
+              <a:t>5/11/2026</a:t>
             </a:fld>
             <a:endParaRPr lang="en-US"/>
           </a:p>
@@ -2981,7 +2981,7 @@
           <a:p>
             <a:fld id="{BED2C339-A0F1-478A-AFF9-60088043FEBD}" type="datetime1">
               <a:rPr lang="en-US" smtClean="0"/>
-              <a:t>5/10/2026</a:t>
+              <a:t>5/11/2026</a:t>
             </a:fld>
             <a:endParaRPr lang="en-US"/>
           </a:p>
@@ -3238,7 +3238,7 @@
           <a:p>
             <a:fld id="{8DB4C5FF-1ED0-424D-BFE3-4CED3A90D626}" type="datetime1">
               <a:rPr lang="en-US" smtClean="0"/>
-              <a:t>5/10/2026</a:t>
+              <a:t>5/11/2026</a:t>
             </a:fld>
             <a:endParaRPr lang="en-US"/>
           </a:p>
@@ -3451,7 +3451,7 @@
           <a:p>
             <a:fld id="{9190BF23-92F6-4A4D-B279-6F5D5BFDB7CE}" type="datetime1">
               <a:rPr lang="en-US" smtClean="0"/>
-              <a:t>5/10/2026</a:t>
+              <a:t>5/11/2026</a:t>
             </a:fld>
             <a:endParaRPr lang="en-US"/>
           </a:p>
@@ -4000,8 +4000,8 @@
         </p:nvSpPr>
         <p:spPr>
           <a:xfrm>
-            <a:off x="17533716" y="7854896"/>
-            <a:ext cx="5172406" cy="4857805"/>
+            <a:off x="17533715" y="7854896"/>
+            <a:ext cx="6070563" cy="4303807"/>
           </a:xfrm>
           <a:prstGeom prst="rect">
             <a:avLst/>
@@ -4481,7 +4481,7 @@
 </file>
 
 <file path=ppt/slides/slide12.xml><?xml version="1.0" encoding="utf-8"?>
-<p:sld xmlns:a="http://schemas.openxmlformats.org/drawingml/2006/main" xmlns:r="http://schemas.openxmlformats.org/officeDocument/2006/relationships" xmlns:p="http://schemas.openxmlformats.org/presentationml/2006/main">
+<p:sld xmlns:a="http://schemas.openxmlformats.org/drawingml/2006/main" xmlns:r="http://schemas.openxmlformats.org/officeDocument/2006/relationships" xmlns:p="http://schemas.openxmlformats.org/presentationml/2006/main" show="0">
   <p:cSld>
     <p:bg>
       <p:bgPr>
@@ -4622,7 +4622,7 @@
 </file>
 
 <file path=ppt/slides/slide13.xml><?xml version="1.0" encoding="utf-8"?>
-<p:sld xmlns:a="http://schemas.openxmlformats.org/drawingml/2006/main" xmlns:r="http://schemas.openxmlformats.org/officeDocument/2006/relationships" xmlns:p="http://schemas.openxmlformats.org/presentationml/2006/main" show="0">
+<p:sld xmlns:a="http://schemas.openxmlformats.org/drawingml/2006/main" xmlns:r="http://schemas.openxmlformats.org/officeDocument/2006/relationships" xmlns:p="http://schemas.openxmlformats.org/presentationml/2006/main">
   <p:cSld>
     <p:bg>
       <p:bgPr>
@@ -5894,7 +5894,7 @@
           <p:nvPr>
             <p:extLst>
               <p:ext uri="{D42A27DB-BD31-4B8C-83A1-F6EECF244321}">
-                <p14:modId xmlns:p14="http://schemas.microsoft.com/office/powerpoint/2010/main" val="1744267582"/>
+                <p14:modId xmlns:p14="http://schemas.microsoft.com/office/powerpoint/2010/main" val="1834960494"/>
               </p:ext>
             </p:extLst>
           </p:nvPr>
@@ -6209,7 +6209,7 @@
                           <a:ea typeface="+mn-ea"/>
                           <a:cs typeface="+mn-cs"/>
                         </a:rPr>
-                        <a:t>Tik Web</a:t>
+                        <a:t>Tik Naršyklėje</a:t>
                       </a:r>
                       <a:endParaRPr lang="en-GB" sz="3600" kern="1200" dirty="0">
                         <a:solidFill>
@@ -6239,7 +6239,7 @@
                         <a:buNone/>
                       </a:pPr>
                       <a:r>
-                        <a:rPr lang="lt-LT" sz="3600" kern="1200">
+                        <a:rPr lang="lt-LT" sz="3600" kern="1200" dirty="0">
                           <a:solidFill>
                             <a:schemeClr val="dk1"/>
                           </a:solidFill>
@@ -6248,9 +6248,9 @@
                           <a:ea typeface="+mn-ea"/>
                           <a:cs typeface="+mn-cs"/>
                         </a:rPr>
-                        <a:t>Tik App</a:t>
+                        <a:t>iOS/Android</a:t>
                       </a:r>
-                      <a:endParaRPr lang="en-GB" sz="3600" kern="1200">
+                      <a:endParaRPr lang="en-GB" sz="3600" kern="1200" dirty="0">
                         <a:solidFill>
                           <a:schemeClr val="dk1"/>
                         </a:solidFill>
@@ -6278,7 +6278,7 @@
                         <a:buNone/>
                       </a:pPr>
                       <a:r>
-                        <a:rPr lang="lt-LT" sz="3600" kern="1200">
+                        <a:rPr lang="lt-LT" sz="3600" kern="1200" dirty="0">
                           <a:solidFill>
                             <a:schemeClr val="dk1"/>
                           </a:solidFill>
@@ -6287,9 +6287,9 @@
                           <a:ea typeface="+mn-ea"/>
                           <a:cs typeface="+mn-cs"/>
                         </a:rPr>
-                        <a:t>Ir Web ir App</a:t>
+                        <a:t>Ir Naršyklėje ir Android</a:t>
                       </a:r>
-                      <a:endParaRPr lang="en-GB" sz="3600" kern="1200">
+                      <a:endParaRPr lang="en-GB" sz="3600" kern="1200" dirty="0">
                         <a:solidFill>
                           <a:schemeClr val="dk1"/>
                         </a:solidFill>
@@ -7163,7 +7163,7 @@
         <p:spPr>
           <a:xfrm>
             <a:off x="2231136" y="6058038"/>
-            <a:ext cx="12728448" cy="3226717"/>
+            <a:ext cx="16779878" cy="3575018"/>
           </a:xfrm>
           <a:prstGeom prst="rect">
             <a:avLst/>
@@ -7184,7 +7184,7 @@
               <a:buChar char=""/>
             </a:pPr>
             <a:r>
-              <a:rPr lang="lt-LT" sz="3600" noProof="0" dirty="0">
+              <a:rPr lang="lt-LT" sz="4000" noProof="0" dirty="0">
                 <a:effectLst/>
                 <a:latin typeface="Times New Roman" panose="02020603050405020304" pitchFamily="18" charset="0"/>
                 <a:ea typeface="Calibri" panose="020F0502020204030204" pitchFamily="34" charset="0"/>
@@ -7192,14 +7192,14 @@
               <a:t>Naudotojo sąsajos programinio kodo eilučių kiekis: </a:t>
             </a:r>
             <a:r>
-              <a:rPr lang="lt-LT" dirty="0">
+              <a:rPr lang="lt-LT" sz="4000" dirty="0">
                 <a:latin typeface="Times New Roman" panose="02020603050405020304" pitchFamily="18" charset="0"/>
                 <a:ea typeface="Calibri" panose="020F0502020204030204" pitchFamily="34" charset="0"/>
               </a:rPr>
               <a:t>7</a:t>
             </a:r>
             <a:r>
-              <a:rPr lang="lt-LT" sz="3600" noProof="0" dirty="0">
+              <a:rPr lang="lt-LT" sz="4000" noProof="0" dirty="0">
                 <a:effectLst/>
                 <a:latin typeface="Times New Roman" panose="02020603050405020304" pitchFamily="18" charset="0"/>
                 <a:ea typeface="Calibri" panose="020F0502020204030204" pitchFamily="34" charset="0"/>
@@ -7216,7 +7216,7 @@
               <a:buChar char=""/>
             </a:pPr>
             <a:r>
-              <a:rPr lang="lt-LT" sz="3600" noProof="0" dirty="0">
+              <a:rPr lang="lt-LT" sz="4000" noProof="0" dirty="0">
                 <a:effectLst/>
                 <a:latin typeface="Times New Roman" panose="02020603050405020304" pitchFamily="18" charset="0"/>
                 <a:ea typeface="Calibri" panose="020F0502020204030204" pitchFamily="34" charset="0"/>
@@ -7233,12 +7233,36 @@
               <a:buChar char=""/>
             </a:pPr>
             <a:r>
-              <a:rPr lang="lt-LT" sz="3600" noProof="0" dirty="0">
+              <a:rPr lang="lt-LT" sz="4000" noProof="0" dirty="0">
                 <a:effectLst/>
                 <a:latin typeface="Times New Roman" panose="02020603050405020304" pitchFamily="18" charset="0"/>
                 <a:ea typeface="Calibri" panose="020F0502020204030204" pitchFamily="34" charset="0"/>
               </a:rPr>
-              <a:t>Kodo padengimas vienetų testais serverio dalyje procentais: 76%</a:t>
+              <a:t>Kodo</a:t>
+            </a:r>
+            <a:r>
+              <a:rPr lang="en-GB" sz="4000" noProof="0" dirty="0">
+                <a:effectLst/>
+                <a:latin typeface="Times New Roman" panose="02020603050405020304" pitchFamily="18" charset="0"/>
+                <a:ea typeface="Calibri" panose="020F0502020204030204" pitchFamily="34" charset="0"/>
+              </a:rPr>
+              <a:t> </a:t>
+            </a:r>
+            <a:r>
+              <a:rPr lang="en-GB" sz="4000" noProof="0" dirty="0" err="1">
+                <a:effectLst/>
+                <a:latin typeface="Times New Roman" panose="02020603050405020304" pitchFamily="18" charset="0"/>
+                <a:ea typeface="Calibri" panose="020F0502020204030204" pitchFamily="34" charset="0"/>
+              </a:rPr>
+              <a:t>eilu</a:t>
+            </a:r>
+            <a:r>
+              <a:rPr lang="lt-LT" sz="4000" noProof="0" dirty="0">
+                <a:effectLst/>
+                <a:latin typeface="Times New Roman" panose="02020603050405020304" pitchFamily="18" charset="0"/>
+                <a:ea typeface="Calibri" panose="020F0502020204030204" pitchFamily="34" charset="0"/>
+              </a:rPr>
+              <a:t>čių padengimas vienetų testais serverio dalyje procentais: 76%</a:t>
             </a:r>
           </a:p>
           <a:p>
@@ -7250,7 +7274,7 @@
               <a:buChar char=""/>
             </a:pPr>
             <a:r>
-              <a:rPr lang="lt-LT" sz="3600" noProof="0" dirty="0">
+              <a:rPr lang="lt-LT" sz="4000" noProof="0" dirty="0">
                 <a:effectLst/>
                 <a:latin typeface="Times New Roman" panose="02020603050405020304" pitchFamily="18" charset="0"/>
                 <a:ea typeface="Calibri" panose="020F0502020204030204" pitchFamily="34" charset="0"/>
@@ -7267,7 +7291,7 @@
               <a:buChar char=""/>
             </a:pPr>
             <a:r>
-              <a:rPr lang="lt-LT" sz="3600" noProof="0" dirty="0">
+              <a:rPr lang="lt-LT" sz="4000" noProof="0" dirty="0">
                 <a:effectLst/>
                 <a:latin typeface="Times New Roman" panose="02020603050405020304" pitchFamily="18" charset="0"/>
                 <a:ea typeface="Calibri" panose="020F0502020204030204" pitchFamily="34" charset="0"/>
@@ -7669,6 +7693,24 @@
               <a:buChar char="•"/>
             </a:pPr>
             <a:r>
+              <a:rPr lang="en-GB" sz="3600" b="0" i="0" kern="1200" noProof="0" dirty="0">
+                <a:solidFill>
+                  <a:srgbClr val="000000"/>
+                </a:solidFill>
+                <a:effectLst/>
+                <a:latin typeface="Arial" panose="020B0604020202020204" pitchFamily="34" charset="0"/>
+                <a:ea typeface="Inter" panose="020B0502030000000004"/>
+                <a:cs typeface="Arial" panose="020B0604020202020204" pitchFamily="34" charset="0"/>
+              </a:rPr>
+              <a:t>Typescript 5.9.2</a:t>
+            </a:r>
+          </a:p>
+          <a:p>
+            <a:pPr marL="571500" indent="-571500">
+              <a:buFont typeface="Arial" panose="020B0604020202020204" pitchFamily="34" charset="0"/>
+              <a:buChar char="•"/>
+            </a:pPr>
+            <a:r>
               <a:rPr lang="lt-LT" sz="3600" b="0" i="0" kern="1200" noProof="0" dirty="0">
                 <a:solidFill>
                   <a:srgbClr val="000000"/>
@@ -7695,20 +7737,6 @@
             </a:endParaRPr>
           </a:p>
           <a:p>
-            <a:pPr marL="571500" indent="-571500">
-              <a:buFont typeface="Arial" panose="020B0604020202020204" pitchFamily="34" charset="0"/>
-              <a:buChar char="•"/>
-            </a:pPr>
-            <a:r>
-              <a:rPr lang="lt-LT" sz="3600" dirty="0">
-                <a:solidFill>
-                  <a:srgbClr val="000000"/>
-                </a:solidFill>
-              </a:rPr>
-              <a:t>React 19.2</a:t>
-            </a:r>
-          </a:p>
-          <a:p>
             <a:pPr marL="571500" indent="-571500" algn="l" rtl="0" eaLnBrk="1" latinLnBrk="0" hangingPunct="1">
               <a:lnSpc>
                 <a:spcPct val="110000"/>
@@ -7727,6 +7755,32 @@
                 <a:cs typeface="Arial" panose="020B0604020202020204" pitchFamily="34" charset="0"/>
               </a:rPr>
               <a:t>Expo 55.0</a:t>
+            </a:r>
+            <a:endParaRPr lang="en-GB" sz="3600" b="0" i="0" kern="1200" noProof="0" dirty="0">
+              <a:solidFill>
+                <a:srgbClr val="000000"/>
+              </a:solidFill>
+              <a:effectLst/>
+              <a:latin typeface="Arial" panose="020B0604020202020204" pitchFamily="34" charset="0"/>
+              <a:ea typeface="Inter" panose="020B0502030000000004"/>
+              <a:cs typeface="Arial" panose="020B0604020202020204" pitchFamily="34" charset="0"/>
+            </a:endParaRPr>
+          </a:p>
+          <a:p>
+            <a:pPr marL="571500" indent="-571500" algn="l" rtl="0" eaLnBrk="1" latinLnBrk="0" hangingPunct="1">
+              <a:lnSpc>
+                <a:spcPct val="110000"/>
+              </a:lnSpc>
+              <a:buFont typeface="Arial" panose="020B0604020202020204" pitchFamily="34" charset="0"/>
+              <a:buChar char="•"/>
+            </a:pPr>
+            <a:r>
+              <a:rPr lang="en-GB" sz="3600" dirty="0">
+                <a:solidFill>
+                  <a:srgbClr val="000000"/>
+                </a:solidFill>
+              </a:rPr>
+              <a:t>Microsoft SQL</a:t>
             </a:r>
             <a:endParaRPr lang="lt-LT" sz="3200" noProof="0" dirty="0">
               <a:effectLst/>
@@ -8514,6 +8568,27 @@
               <a:rPr lang="lt-LT" dirty="0"/>
               <a:t>Rezervuoti įrangą</a:t>
             </a:r>
+            <a:r>
+              <a:rPr lang="en-GB" dirty="0"/>
+              <a:t>,</a:t>
+            </a:r>
+            <a:r>
+              <a:rPr lang="lt-LT" dirty="0"/>
+              <a:t> </a:t>
+            </a:r>
+            <a:r>
+              <a:rPr lang="en-GB" dirty="0" err="1"/>
+              <a:t>nurodytomis</a:t>
+            </a:r>
+            <a:r>
+              <a:rPr lang="en-GB" dirty="0"/>
+              <a:t> </a:t>
+            </a:r>
+            <a:r>
+              <a:rPr lang="en-GB" dirty="0" err="1"/>
+              <a:t>dienomis</a:t>
+            </a:r>
+            <a:endParaRPr lang="lt-LT" dirty="0"/>
           </a:p>
           <a:p>
             <a:pPr marL="742950" indent="-742950">

--- a/Office_stuff/Tarpinio Gynimo skaidrės.pptx
+++ b/Office_stuff/Tarpinio Gynimo skaidrės.pptx
@@ -212,7 +212,7 @@
           <a:p>
             <a:fld id="{94D01F65-ADE3-4424-A0F2-5E1F648B8E51}" type="datetimeFigureOut">
               <a:rPr lang="en-US" smtClean="0"/>
-              <a:t>5/11/2026</a:t>
+              <a:t>5/12/2026</a:t>
             </a:fld>
             <a:endParaRPr lang="en-US"/>
           </a:p>
@@ -523,6 +523,90 @@
           <a:bodyPr/>
           <a:lstStyle/>
           <a:p>
+            <a:endParaRPr lang="en-GB" dirty="0"/>
+          </a:p>
+        </p:txBody>
+      </p:sp>
+      <p:sp>
+        <p:nvSpPr>
+          <p:cNvPr id="4" name="Slide Number Placeholder 3"/>
+          <p:cNvSpPr>
+            <a:spLocks noGrp="1"/>
+          </p:cNvSpPr>
+          <p:nvPr>
+            <p:ph type="sldNum" sz="quarter" idx="5"/>
+          </p:nvPr>
+        </p:nvSpPr>
+        <p:spPr/>
+        <p:txBody>
+          <a:bodyPr/>
+          <a:lstStyle/>
+          <a:p>
+            <a:fld id="{7D3D8D8B-2BC7-463E-BFD7-61670D39E088}" type="slidenum">
+              <a:rPr lang="en-US" smtClean="0"/>
+              <a:t>10</a:t>
+            </a:fld>
+            <a:endParaRPr lang="en-US"/>
+          </a:p>
+        </p:txBody>
+      </p:sp>
+    </p:spTree>
+    <p:extLst>
+      <p:ext uri="{BB962C8B-B14F-4D97-AF65-F5344CB8AC3E}">
+        <p14:creationId xmlns:p14="http://schemas.microsoft.com/office/powerpoint/2010/main" val="407739554"/>
+      </p:ext>
+    </p:extLst>
+  </p:cSld>
+  <p:clrMapOvr>
+    <a:masterClrMapping/>
+  </p:clrMapOvr>
+</p:notes>
+</file>
+
+<file path=ppt/notesSlides/notesSlide2.xml><?xml version="1.0" encoding="utf-8"?>
+<p:notes xmlns:a="http://schemas.openxmlformats.org/drawingml/2006/main" xmlns:r="http://schemas.openxmlformats.org/officeDocument/2006/relationships" xmlns:p="http://schemas.openxmlformats.org/presentationml/2006/main">
+  <p:cSld>
+    <p:spTree>
+      <p:nvGrpSpPr>
+        <p:cNvPr id="1" name=""/>
+        <p:cNvGrpSpPr/>
+        <p:nvPr/>
+      </p:nvGrpSpPr>
+      <p:grpSpPr>
+        <a:xfrm>
+          <a:off x="0" y="0"/>
+          <a:ext cx="0" cy="0"/>
+          <a:chOff x="0" y="0"/>
+          <a:chExt cx="0" cy="0"/>
+        </a:xfrm>
+      </p:grpSpPr>
+      <p:sp>
+        <p:nvSpPr>
+          <p:cNvPr id="2" name="Slide Image Placeholder 1"/>
+          <p:cNvSpPr>
+            <a:spLocks noGrp="1" noRot="1" noChangeAspect="1"/>
+          </p:cNvSpPr>
+          <p:nvPr>
+            <p:ph type="sldImg"/>
+          </p:nvPr>
+        </p:nvSpPr>
+        <p:spPr/>
+      </p:sp>
+      <p:sp>
+        <p:nvSpPr>
+          <p:cNvPr id="3" name="Notes Placeholder 2"/>
+          <p:cNvSpPr>
+            <a:spLocks noGrp="1"/>
+          </p:cNvSpPr>
+          <p:nvPr>
+            <p:ph type="body" idx="1"/>
+          </p:nvPr>
+        </p:nvSpPr>
+        <p:spPr/>
+        <p:txBody>
+          <a:bodyPr/>
+          <a:lstStyle/>
+          <a:p>
             <a:endParaRPr lang="en-US" dirty="0"/>
           </a:p>
         </p:txBody>
@@ -563,7 +647,7 @@
 </p:notes>
 </file>
 
-<file path=ppt/notesSlides/notesSlide2.xml><?xml version="1.0" encoding="utf-8"?>
+<file path=ppt/notesSlides/notesSlide3.xml><?xml version="1.0" encoding="utf-8"?>
 <p:notes xmlns:a="http://schemas.openxmlformats.org/drawingml/2006/main" xmlns:r="http://schemas.openxmlformats.org/officeDocument/2006/relationships" xmlns:p="http://schemas.openxmlformats.org/presentationml/2006/main">
   <p:cSld>
     <p:spTree>
@@ -671,7 +755,7 @@
 </p:notes>
 </file>
 
-<file path=ppt/notesSlides/notesSlide3.xml><?xml version="1.0" encoding="utf-8"?>
+<file path=ppt/notesSlides/notesSlide4.xml><?xml version="1.0" encoding="utf-8"?>
 <p:notes xmlns:a="http://schemas.openxmlformats.org/drawingml/2006/main" xmlns:r="http://schemas.openxmlformats.org/officeDocument/2006/relationships" xmlns:p="http://schemas.openxmlformats.org/presentationml/2006/main">
   <p:cSld>
     <p:spTree>
@@ -779,7 +863,7 @@
 </p:notes>
 </file>
 
-<file path=ppt/notesSlides/notesSlide4.xml><?xml version="1.0" encoding="utf-8"?>
+<file path=ppt/notesSlides/notesSlide5.xml><?xml version="1.0" encoding="utf-8"?>
 <p:notes xmlns:a="http://schemas.openxmlformats.org/drawingml/2006/main" xmlns:r="http://schemas.openxmlformats.org/officeDocument/2006/relationships" xmlns:p="http://schemas.openxmlformats.org/presentationml/2006/main">
   <p:cSld>
     <p:spTree>
@@ -887,7 +971,7 @@
 </p:notes>
 </file>
 
-<file path=ppt/notesSlides/notesSlide5.xml><?xml version="1.0" encoding="utf-8"?>
+<file path=ppt/notesSlides/notesSlide6.xml><?xml version="1.0" encoding="utf-8"?>
 <p:notes xmlns:a="http://schemas.openxmlformats.org/drawingml/2006/main" xmlns:r="http://schemas.openxmlformats.org/officeDocument/2006/relationships" xmlns:p="http://schemas.openxmlformats.org/presentationml/2006/main">
   <p:cSld>
     <p:spTree>
@@ -1126,7 +1210,7 @@
           <a:p>
             <a:fld id="{74F880E5-5F82-415C-9525-1F3631A7AE8F}" type="datetime1">
               <a:rPr lang="en-US" smtClean="0"/>
-              <a:t>5/11/2026</a:t>
+              <a:t>5/12/2026</a:t>
             </a:fld>
             <a:endParaRPr lang="en-US"/>
           </a:p>
@@ -1296,7 +1380,7 @@
           <a:p>
             <a:fld id="{63287B1D-AF4C-43BA-A2CC-3D3995A8E269}" type="datetime1">
               <a:rPr lang="en-US" smtClean="0"/>
-              <a:t>5/11/2026</a:t>
+              <a:t>5/12/2026</a:t>
             </a:fld>
             <a:endParaRPr lang="en-US"/>
           </a:p>
@@ -1476,7 +1560,7 @@
           <a:p>
             <a:fld id="{1EA15F11-500F-40CB-A231-56DAC8067F9F}" type="datetime1">
               <a:rPr lang="en-US" smtClean="0"/>
-              <a:t>5/11/2026</a:t>
+              <a:t>5/12/2026</a:t>
             </a:fld>
             <a:endParaRPr lang="en-US"/>
           </a:p>
@@ -1646,7 +1730,7 @@
           <a:p>
             <a:fld id="{7ED0485C-C0C8-49F5-A85A-1480642569F2}" type="datetime1">
               <a:rPr lang="en-US" smtClean="0"/>
-              <a:t>5/11/2026</a:t>
+              <a:t>5/12/2026</a:t>
             </a:fld>
             <a:endParaRPr lang="en-US"/>
           </a:p>
@@ -1892,7 +1976,7 @@
           <a:p>
             <a:fld id="{AFCA74A8-EEE6-4E2C-969F-BCCD7B351E6C}" type="datetime1">
               <a:rPr lang="en-US" smtClean="0"/>
-              <a:t>5/11/2026</a:t>
+              <a:t>5/12/2026</a:t>
             </a:fld>
             <a:endParaRPr lang="en-US"/>
           </a:p>
@@ -2124,7 +2208,7 @@
           <a:p>
             <a:fld id="{9E6162BC-34BB-45B1-BF1A-3FB9ED2801EB}" type="datetime1">
               <a:rPr lang="en-US" smtClean="0"/>
-              <a:t>5/11/2026</a:t>
+              <a:t>5/12/2026</a:t>
             </a:fld>
             <a:endParaRPr lang="en-US"/>
           </a:p>
@@ -2491,7 +2575,7 @@
           <a:p>
             <a:fld id="{60B5E9F1-B21A-41A2-B2F0-56E2FDED885B}" type="datetime1">
               <a:rPr lang="en-US" smtClean="0"/>
-              <a:t>5/11/2026</a:t>
+              <a:t>5/12/2026</a:t>
             </a:fld>
             <a:endParaRPr lang="en-US"/>
           </a:p>
@@ -2609,7 +2693,7 @@
           <a:p>
             <a:fld id="{F1579879-1CA8-4A23-B24B-EC9F3C303221}" type="datetime1">
               <a:rPr lang="en-US" smtClean="0"/>
-              <a:t>5/11/2026</a:t>
+              <a:t>5/12/2026</a:t>
             </a:fld>
             <a:endParaRPr lang="en-US"/>
           </a:p>
@@ -2704,7 +2788,7 @@
           <a:p>
             <a:fld id="{16B6C98E-CCA0-4AF2-8099-7186DF10A5E7}" type="datetime1">
               <a:rPr lang="en-US" smtClean="0"/>
-              <a:t>5/11/2026</a:t>
+              <a:t>5/12/2026</a:t>
             </a:fld>
             <a:endParaRPr lang="en-US"/>
           </a:p>
@@ -2981,7 +3065,7 @@
           <a:p>
             <a:fld id="{BED2C339-A0F1-478A-AFF9-60088043FEBD}" type="datetime1">
               <a:rPr lang="en-US" smtClean="0"/>
-              <a:t>5/11/2026</a:t>
+              <a:t>5/12/2026</a:t>
             </a:fld>
             <a:endParaRPr lang="en-US"/>
           </a:p>
@@ -3238,7 +3322,7 @@
           <a:p>
             <a:fld id="{8DB4C5FF-1ED0-424D-BFE3-4CED3A90D626}" type="datetime1">
               <a:rPr lang="en-US" smtClean="0"/>
-              <a:t>5/11/2026</a:t>
+              <a:t>5/12/2026</a:t>
             </a:fld>
             <a:endParaRPr lang="en-US"/>
           </a:p>
@@ -3451,7 +3535,7 @@
           <a:p>
             <a:fld id="{9190BF23-92F6-4A4D-B279-6F5D5BFDB7CE}" type="datetime1">
               <a:rPr lang="en-US" smtClean="0"/>
-              <a:t>5/11/2026</a:t>
+              <a:t>5/12/2026</a:t>
             </a:fld>
             <a:endParaRPr lang="en-US"/>
           </a:p>
@@ -4151,7 +4235,7 @@
     <p:bg>
       <p:bgPr>
         <a:blipFill dpi="0" rotWithShape="1">
-          <a:blip r:embed="rId2">
+          <a:blip r:embed="rId3">
             <a:lum/>
           </a:blip>
           <a:srcRect/>
@@ -4270,7 +4354,7 @@
           <p:nvPr/>
         </p:nvPicPr>
         <p:blipFill>
-          <a:blip r:embed="rId3"/>
+          <a:blip r:embed="rId4"/>
           <a:stretch>
             <a:fillRect/>
           </a:stretch>
@@ -4395,7 +4479,12 @@
             <p:ph type="sldNum" sz="quarter" idx="12"/>
           </p:nvPr>
         </p:nvSpPr>
-        <p:spPr/>
+        <p:spPr>
+          <a:xfrm>
+            <a:off x="15067429" y="1229735"/>
+            <a:ext cx="5486043" cy="730250"/>
+          </a:xfrm>
+        </p:spPr>
         <p:txBody>
           <a:bodyPr/>
           <a:lstStyle/>
@@ -4409,10 +4498,10 @@
       </p:sp>
       <p:pic>
         <p:nvPicPr>
-          <p:cNvPr id="6" name="Picture 5">
+          <p:cNvPr id="8" name="Picture 7">
             <a:extLst>
               <a:ext uri="{FF2B5EF4-FFF2-40B4-BE49-F238E27FC236}">
-                <a16:creationId xmlns:a16="http://schemas.microsoft.com/office/drawing/2014/main" id="{1EE2F712-A7DB-3D77-D13C-C1D6CEC5ACE8}"/>
+                <a16:creationId xmlns:a16="http://schemas.microsoft.com/office/drawing/2014/main" id="{93B74C95-9427-86CD-8C10-E2F30E2A782C}"/>
               </a:ext>
             </a:extLst>
           </p:cNvPr>
@@ -4429,38 +4518,8 @@
         </p:blipFill>
         <p:spPr>
           <a:xfrm>
-            <a:off x="152918" y="2936496"/>
-            <a:ext cx="14018831" cy="10506455"/>
-          </a:xfrm>
-          <a:prstGeom prst="rect">
-            <a:avLst/>
-          </a:prstGeom>
-        </p:spPr>
-      </p:pic>
-      <p:pic>
-        <p:nvPicPr>
-          <p:cNvPr id="7" name="Picture 6">
-            <a:extLst>
-              <a:ext uri="{FF2B5EF4-FFF2-40B4-BE49-F238E27FC236}">
-                <a16:creationId xmlns:a16="http://schemas.microsoft.com/office/drawing/2014/main" id="{24826011-4B50-D999-D662-17887662F54B}"/>
-              </a:ext>
-            </a:extLst>
-          </p:cNvPr>
-          <p:cNvPicPr>
-            <a:picLocks noChangeAspect="1"/>
-          </p:cNvPicPr>
-          <p:nvPr/>
-        </p:nvPicPr>
-        <p:blipFill>
-          <a:blip r:embed="rId4"/>
-          <a:stretch>
-            <a:fillRect/>
-          </a:stretch>
-        </p:blipFill>
-        <p:spPr>
-          <a:xfrm>
-            <a:off x="14146131" y="6580882"/>
-            <a:ext cx="9824305" cy="4198622"/>
+            <a:off x="1676290" y="2175553"/>
+            <a:ext cx="21029831" cy="11411536"/>
           </a:xfrm>
           <a:prstGeom prst="rect">
             <a:avLst/>
@@ -4696,12 +4755,45 @@
           </a:p>
         </p:txBody>
       </p:sp>
+      <p:sp>
+        <p:nvSpPr>
+          <p:cNvPr id="2" name="Slide Number Placeholder 1">
+            <a:extLst>
+              <a:ext uri="{FF2B5EF4-FFF2-40B4-BE49-F238E27FC236}">
+                <a16:creationId xmlns:a16="http://schemas.microsoft.com/office/drawing/2014/main" id="{E797DF00-D812-3E5E-C0D4-B596949781D4}"/>
+              </a:ext>
+            </a:extLst>
+          </p:cNvPr>
+          <p:cNvSpPr>
+            <a:spLocks noGrp="1"/>
+          </p:cNvSpPr>
+          <p:nvPr>
+            <p:ph type="sldNum" sz="quarter" idx="12"/>
+          </p:nvPr>
+        </p:nvSpPr>
+        <p:spPr>
+          <a:xfrm>
+            <a:off x="15183498" y="1229735"/>
+            <a:ext cx="5486043" cy="730250"/>
+          </a:xfrm>
+        </p:spPr>
+        <p:txBody>
+          <a:bodyPr/>
+          <a:lstStyle/>
+          <a:p>
+            <a:r>
+              <a:rPr lang="lt-LT" sz="3600" dirty="0"/>
+              <a:t>12</a:t>
+            </a:r>
+          </a:p>
+        </p:txBody>
+      </p:sp>
       <p:pic>
         <p:nvPicPr>
-          <p:cNvPr id="6" name="Picture 5">
+          <p:cNvPr id="10" name="Picture 9">
             <a:extLst>
               <a:ext uri="{FF2B5EF4-FFF2-40B4-BE49-F238E27FC236}">
-                <a16:creationId xmlns:a16="http://schemas.microsoft.com/office/drawing/2014/main" id="{1E5917BD-3993-302D-9834-50EF361604C4}"/>
+                <a16:creationId xmlns:a16="http://schemas.microsoft.com/office/drawing/2014/main" id="{74E003CF-1784-D1FA-4E4E-C208B0D26723}"/>
               </a:ext>
             </a:extLst>
           </p:cNvPr>
@@ -4718,42 +4810,14 @@
         </p:blipFill>
         <p:spPr>
           <a:xfrm>
-            <a:off x="1189754" y="2920424"/>
-            <a:ext cx="23261014" cy="10283512"/>
+            <a:off x="680887" y="3200400"/>
+            <a:ext cx="23020637" cy="10515600"/>
           </a:xfrm>
           <a:prstGeom prst="rect">
             <a:avLst/>
           </a:prstGeom>
         </p:spPr>
       </p:pic>
-      <p:sp>
-        <p:nvSpPr>
-          <p:cNvPr id="2" name="Slide Number Placeholder 1">
-            <a:extLst>
-              <a:ext uri="{FF2B5EF4-FFF2-40B4-BE49-F238E27FC236}">
-                <a16:creationId xmlns:a16="http://schemas.microsoft.com/office/drawing/2014/main" id="{E797DF00-D812-3E5E-C0D4-B596949781D4}"/>
-              </a:ext>
-            </a:extLst>
-          </p:cNvPr>
-          <p:cNvSpPr>
-            <a:spLocks noGrp="1"/>
-          </p:cNvSpPr>
-          <p:nvPr>
-            <p:ph type="sldNum" sz="quarter" idx="12"/>
-          </p:nvPr>
-        </p:nvSpPr>
-        <p:spPr/>
-        <p:txBody>
-          <a:bodyPr/>
-          <a:lstStyle/>
-          <a:p>
-            <a:r>
-              <a:rPr lang="lt-LT" sz="3600" dirty="0"/>
-              <a:t>12</a:t>
-            </a:r>
-          </a:p>
-        </p:txBody>
-      </p:sp>
     </p:spTree>
     <p:extLst>
       <p:ext uri="{BB962C8B-B14F-4D97-AF65-F5344CB8AC3E}">
@@ -5030,7 +5094,11 @@
           <a:p>
             <a:r>
               <a:rPr lang="lt-LT" noProof="0" dirty="0"/>
-              <a:t>Testų kiekis – 256</a:t>
+              <a:t>Testų kiekis – 2</a:t>
+            </a:r>
+            <a:r>
+              <a:rPr lang="lt-LT" dirty="0"/>
+              <a:t>83</a:t>
             </a:r>
           </a:p>
           <a:p>
@@ -5162,7 +5230,7 @@
                 <a:latin typeface="Times New Roman" panose="02020603050405020304" pitchFamily="18" charset="0"/>
                 <a:ea typeface="Calibri" panose="020F0502020204030204" pitchFamily="34" charset="0"/>
               </a:rPr>
-              <a:t>90,5</a:t>
+              <a:t>91</a:t>
             </a:r>
             <a:r>
               <a:rPr lang="lt-LT" sz="3600" noProof="0" dirty="0">
@@ -5180,7 +5248,22 @@
                 <a:latin typeface="Times New Roman" panose="02020603050405020304" pitchFamily="18" charset="0"/>
                 <a:ea typeface="Calibri" panose="020F0502020204030204" pitchFamily="34" charset="0"/>
               </a:rPr>
-              <a:t>Padengta – 75,7% serverio dalies eilučių</a:t>
+              <a:t>Padengta – 7</a:t>
+            </a:r>
+            <a:r>
+              <a:rPr lang="lt-LT" dirty="0">
+                <a:latin typeface="Times New Roman" panose="02020603050405020304" pitchFamily="18" charset="0"/>
+                <a:ea typeface="Calibri" panose="020F0502020204030204" pitchFamily="34" charset="0"/>
+              </a:rPr>
+              <a:t>7,9</a:t>
+            </a:r>
+            <a:r>
+              <a:rPr lang="lt-LT" sz="3600" noProof="0" dirty="0">
+                <a:effectLst/>
+                <a:latin typeface="Times New Roman" panose="02020603050405020304" pitchFamily="18" charset="0"/>
+                <a:ea typeface="Calibri" panose="020F0502020204030204" pitchFamily="34" charset="0"/>
+              </a:rPr>
+              <a:t>% serverio dalies eilučių</a:t>
             </a:r>
           </a:p>
         </p:txBody>
@@ -5894,14 +5977,14 @@
           <p:nvPr>
             <p:extLst>
               <p:ext uri="{D42A27DB-BD31-4B8C-83A1-F6EECF244321}">
-                <p14:modId xmlns:p14="http://schemas.microsoft.com/office/powerpoint/2010/main" val="1834960494"/>
+                <p14:modId xmlns:p14="http://schemas.microsoft.com/office/powerpoint/2010/main" val="18920443"/>
               </p:ext>
             </p:extLst>
           </p:nvPr>
         </p:nvGraphicFramePr>
         <p:xfrm>
           <a:off x="671664" y="4773168"/>
-          <a:ext cx="23039084" cy="5952744"/>
+          <a:ext cx="23039084" cy="6803136"/>
         </p:xfrm>
         <a:graphic>
           <a:graphicData uri="http://schemas.openxmlformats.org/drawingml/2006/table">
@@ -5990,7 +6073,7 @@
                           <a:ea typeface="+mn-ea"/>
                           <a:cs typeface="+mn-cs"/>
                         </a:rPr>
-                        <a:t>Olio</a:t>
+                        <a:t>Stuffly</a:t>
                       </a:r>
                       <a:endParaRPr lang="lt-LT" dirty="0"/>
                     </a:p>
@@ -6013,152 +6096,6 @@
                 <a:extLst>
                   <a:ext uri="{0D108BD9-81ED-4DB2-BD59-A6C34878D82A}">
                     <a16:rowId xmlns:a16="http://schemas.microsoft.com/office/drawing/2014/main" val="2872177194"/>
-                  </a:ext>
-                </a:extLst>
-              </a:tr>
-              <a:tr h="850392">
-                <a:tc>
-                  <a:txBody>
-                    <a:bodyPr/>
-                    <a:lstStyle/>
-                    <a:p>
-                      <a:r>
-                        <a:rPr lang="lt-LT" sz="3600" kern="1200" dirty="0">
-                          <a:solidFill>
-                            <a:schemeClr val="dk1"/>
-                          </a:solidFill>
-                          <a:effectLst/>
-                          <a:latin typeface="+mn-lt"/>
-                          <a:ea typeface="+mn-ea"/>
-                          <a:cs typeface="+mn-cs"/>
-                        </a:rPr>
-                        <a:t>Prekių apmokestinimas</a:t>
-                      </a:r>
-                      <a:endParaRPr lang="lt-LT" dirty="0"/>
-                    </a:p>
-                  </a:txBody>
-                  <a:tcPr/>
-                </a:tc>
-                <a:tc>
-                  <a:txBody>
-                    <a:bodyPr/>
-                    <a:lstStyle/>
-                    <a:p>
-                      <a:pPr marL="0" algn="l" defTabSz="1828709" rtl="0" eaLnBrk="1" latinLnBrk="0" hangingPunct="1">
-                        <a:spcBef>
-                          <a:spcPts val="300"/>
-                        </a:spcBef>
-                        <a:spcAft>
-                          <a:spcPts val="300"/>
-                        </a:spcAft>
-                        <a:buNone/>
-                      </a:pPr>
-                      <a:r>
-                        <a:rPr lang="lt-LT" sz="3600" kern="1200" dirty="0">
-                          <a:solidFill>
-                            <a:schemeClr val="dk1"/>
-                          </a:solidFill>
-                          <a:effectLst/>
-                          <a:latin typeface="+mn-lt"/>
-                          <a:ea typeface="+mn-ea"/>
-                          <a:cs typeface="+mn-cs"/>
-                        </a:rPr>
-                        <a:t>Galimas</a:t>
-                      </a:r>
-                      <a:endParaRPr lang="en-GB" sz="3600" kern="1200" dirty="0">
-                        <a:solidFill>
-                          <a:schemeClr val="dk1"/>
-                        </a:solidFill>
-                        <a:effectLst/>
-                        <a:latin typeface="+mn-lt"/>
-                        <a:ea typeface="+mn-ea"/>
-                        <a:cs typeface="+mn-cs"/>
-                      </a:endParaRPr>
-                    </a:p>
-                  </a:txBody>
-                  <a:tcPr marL="68580" marR="68580" marT="0" marB="0"/>
-                </a:tc>
-                <a:tc>
-                  <a:txBody>
-                    <a:bodyPr/>
-                    <a:lstStyle/>
-                    <a:p>
-                      <a:pPr marL="0" algn="l" defTabSz="1828709" rtl="0" eaLnBrk="1" latinLnBrk="0" hangingPunct="1">
-                        <a:spcBef>
-                          <a:spcPts val="300"/>
-                        </a:spcBef>
-                        <a:spcAft>
-                          <a:spcPts val="300"/>
-                        </a:spcAft>
-                        <a:buNone/>
-                      </a:pPr>
-                      <a:r>
-                        <a:rPr lang="lt-LT" sz="3600" kern="1200">
-                          <a:solidFill>
-                            <a:schemeClr val="dk1"/>
-                          </a:solidFill>
-                          <a:effectLst/>
-                          <a:latin typeface="+mn-lt"/>
-                          <a:ea typeface="+mn-ea"/>
-                          <a:cs typeface="+mn-cs"/>
-                        </a:rPr>
-                        <a:t>Galimas</a:t>
-                      </a:r>
-                      <a:endParaRPr lang="en-GB" sz="3600" kern="1200">
-                        <a:solidFill>
-                          <a:schemeClr val="dk1"/>
-                        </a:solidFill>
-                        <a:effectLst/>
-                        <a:latin typeface="+mn-lt"/>
-                        <a:ea typeface="+mn-ea"/>
-                        <a:cs typeface="+mn-cs"/>
-                      </a:endParaRPr>
-                    </a:p>
-                  </a:txBody>
-                  <a:tcPr marL="68580" marR="68580" marT="0" marB="0"/>
-                </a:tc>
-                <a:tc>
-                  <a:txBody>
-                    <a:bodyPr/>
-                    <a:lstStyle/>
-                    <a:p>
-                      <a:pPr marL="0" algn="l" defTabSz="1828709" rtl="0" eaLnBrk="1" latinLnBrk="0" hangingPunct="1">
-                        <a:spcBef>
-                          <a:spcPts val="300"/>
-                        </a:spcBef>
-                        <a:spcAft>
-                          <a:spcPts val="300"/>
-                        </a:spcAft>
-                        <a:buNone/>
-                      </a:pPr>
-                      <a:r>
-                        <a:rPr lang="lt-LT" sz="3600" kern="1200">
-                          <a:solidFill>
-                            <a:schemeClr val="dk1"/>
-                          </a:solidFill>
-                          <a:effectLst/>
-                          <a:latin typeface="+mn-lt"/>
-                          <a:ea typeface="+mn-ea"/>
-                          <a:cs typeface="+mn-cs"/>
-                        </a:rPr>
-                        <a:t>Nėra</a:t>
-                      </a:r>
-                      <a:endParaRPr lang="en-GB" sz="3600" kern="1200">
-                        <a:solidFill>
-                          <a:schemeClr val="dk1"/>
-                        </a:solidFill>
-                        <a:effectLst/>
-                        <a:latin typeface="+mn-lt"/>
-                        <a:ea typeface="+mn-ea"/>
-                        <a:cs typeface="+mn-cs"/>
-                      </a:endParaRPr>
-                    </a:p>
-                  </a:txBody>
-                  <a:tcPr marL="68580" marR="68580" marT="0" marB="0"/>
-                </a:tc>
-                <a:extLst>
-                  <a:ext uri="{0D108BD9-81ED-4DB2-BD59-A6C34878D82A}">
-                    <a16:rowId xmlns:a16="http://schemas.microsoft.com/office/drawing/2014/main" val="1943936857"/>
                   </a:ext>
                 </a:extLst>
               </a:tr>
@@ -6346,7 +6283,7 @@
                         <a:buNone/>
                       </a:pPr>
                       <a:r>
-                        <a:rPr lang="en-US" sz="3600" kern="1200">
+                        <a:rPr lang="en-US" sz="3600" kern="1200" dirty="0">
                           <a:solidFill>
                             <a:schemeClr val="dk1"/>
                           </a:solidFill>
@@ -6355,9 +6292,21 @@
                           <a:ea typeface="+mn-ea"/>
                           <a:cs typeface="+mn-cs"/>
                         </a:rPr>
-                        <a:t>Olandų, Anglų</a:t>
+                        <a:t>Olandų, </a:t>
                       </a:r>
-                      <a:endParaRPr lang="en-GB" sz="3600" kern="1200">
+                      <a:r>
+                        <a:rPr lang="en-US" sz="3600" kern="1200" dirty="0" err="1">
+                          <a:solidFill>
+                            <a:schemeClr val="dk1"/>
+                          </a:solidFill>
+                          <a:effectLst/>
+                          <a:latin typeface="+mn-lt"/>
+                          <a:ea typeface="+mn-ea"/>
+                          <a:cs typeface="+mn-cs"/>
+                        </a:rPr>
+                        <a:t>Anglų</a:t>
+                      </a:r>
+                      <a:endParaRPr lang="en-GB" sz="3600" kern="1200" dirty="0">
                         <a:solidFill>
                           <a:schemeClr val="dk1"/>
                         </a:solidFill>
@@ -6540,7 +6489,7 @@
                           <a:ea typeface="+mn-ea"/>
                           <a:cs typeface="+mn-cs"/>
                         </a:rPr>
-                        <a:t>Nėra</a:t>
+                        <a:t>Rezervavimas kalendoriuje</a:t>
                       </a:r>
                       <a:endParaRPr lang="en-GB" sz="3600" kern="1200" dirty="0">
                         <a:solidFill>
@@ -6686,7 +6635,7 @@
                           <a:ea typeface="+mn-ea"/>
                           <a:cs typeface="+mn-cs"/>
                         </a:rPr>
-                        <a:t>Maistas/ne maistas</a:t>
+                        <a:t>Platus pasirinkimas</a:t>
                       </a:r>
                       <a:endParaRPr lang="en-GB" sz="3600" kern="1200" dirty="0">
                         <a:solidFill>
@@ -6753,6 +6702,28 @@
                     <a:lstStyle/>
                     <a:p>
                       <a:r>
+                        <a:rPr lang="lt-LT" dirty="0"/>
+                        <a:t>Paplitimas</a:t>
+                      </a:r>
+                    </a:p>
+                  </a:txBody>
+                  <a:tcPr/>
+                </a:tc>
+                <a:tc>
+                  <a:txBody>
+                    <a:bodyPr/>
+                    <a:lstStyle/>
+                    <a:p>
+                      <a:pPr marL="0" algn="l" defTabSz="1828709" rtl="0" eaLnBrk="1" latinLnBrk="0" hangingPunct="1">
+                        <a:spcBef>
+                          <a:spcPts val="300"/>
+                        </a:spcBef>
+                        <a:spcAft>
+                          <a:spcPts val="300"/>
+                        </a:spcAft>
+                        <a:buNone/>
+                      </a:pPr>
+                      <a:r>
                         <a:rPr lang="lt-LT" sz="3600" kern="1200" dirty="0">
                           <a:solidFill>
                             <a:schemeClr val="dk1"/>
@@ -6762,12 +6733,157 @@
                           <a:ea typeface="+mn-ea"/>
                           <a:cs typeface="+mn-cs"/>
                         </a:rPr>
-                        <a:t>Nemokamas atidavimas</a:t>
+                        <a:t>Olandija, Belgija</a:t>
                       </a:r>
-                      <a:endParaRPr lang="lt-LT" dirty="0"/>
+                      <a:endParaRPr lang="en-GB" sz="3600" kern="1200" dirty="0">
+                        <a:solidFill>
+                          <a:schemeClr val="dk1"/>
+                        </a:solidFill>
+                        <a:effectLst/>
+                        <a:latin typeface="+mn-lt"/>
+                        <a:ea typeface="+mn-ea"/>
+                        <a:cs typeface="+mn-cs"/>
+                      </a:endParaRPr>
+                    </a:p>
+                  </a:txBody>
+                  <a:tcPr marL="68580" marR="68580" marT="0" marB="0"/>
+                </a:tc>
+                <a:tc>
+                  <a:txBody>
+                    <a:bodyPr/>
+                    <a:lstStyle/>
+                    <a:p>
+                      <a:pPr marL="0" algn="l" defTabSz="1828709" rtl="0" eaLnBrk="1" latinLnBrk="0" hangingPunct="1">
+                        <a:spcBef>
+                          <a:spcPts val="300"/>
+                        </a:spcBef>
+                        <a:spcAft>
+                          <a:spcPts val="300"/>
+                        </a:spcAft>
+                        <a:buNone/>
+                      </a:pPr>
+                      <a:r>
+                        <a:rPr lang="lt-LT" sz="3600" kern="1200" dirty="0">
+                          <a:solidFill>
+                            <a:schemeClr val="dk1"/>
+                          </a:solidFill>
+                          <a:effectLst/>
+                          <a:latin typeface="+mn-lt"/>
+                          <a:ea typeface="+mn-ea"/>
+                          <a:cs typeface="+mn-cs"/>
+                        </a:rPr>
+                        <a:t>Belgija, Vokietija</a:t>
+                      </a:r>
+                      <a:endParaRPr lang="en-GB" sz="3600" kern="1200" dirty="0">
+                        <a:solidFill>
+                          <a:schemeClr val="dk1"/>
+                        </a:solidFill>
+                        <a:effectLst/>
+                        <a:latin typeface="+mn-lt"/>
+                        <a:ea typeface="+mn-ea"/>
+                        <a:cs typeface="+mn-cs"/>
+                      </a:endParaRPr>
+                    </a:p>
+                  </a:txBody>
+                  <a:tcPr marL="68580" marR="68580" marT="0" marB="0"/>
+                </a:tc>
+                <a:tc>
+                  <a:txBody>
+                    <a:bodyPr/>
+                    <a:lstStyle/>
+                    <a:p>
+                      <a:pPr marL="0" algn="l" defTabSz="1828709" rtl="0" eaLnBrk="1" latinLnBrk="0" hangingPunct="1">
+                        <a:spcBef>
+                          <a:spcPts val="300"/>
+                        </a:spcBef>
+                        <a:spcAft>
+                          <a:spcPts val="300"/>
+                        </a:spcAft>
+                        <a:buNone/>
+                      </a:pPr>
+                      <a:r>
+                        <a:rPr lang="lt-LT" sz="3600" kern="1200" dirty="0">
+                          <a:solidFill>
+                            <a:schemeClr val="dk1"/>
+                          </a:solidFill>
+                          <a:effectLst/>
+                          <a:latin typeface="+mn-lt"/>
+                          <a:ea typeface="+mn-ea"/>
+                          <a:cs typeface="+mn-cs"/>
+                        </a:rPr>
+                        <a:t>Lietuva</a:t>
+                      </a:r>
+                      <a:endParaRPr lang="en-GB" sz="3600" kern="1200" dirty="0">
+                        <a:solidFill>
+                          <a:schemeClr val="dk1"/>
+                        </a:solidFill>
+                        <a:effectLst/>
+                        <a:latin typeface="+mn-lt"/>
+                        <a:ea typeface="+mn-ea"/>
+                        <a:cs typeface="+mn-cs"/>
+                      </a:endParaRPr>
+                    </a:p>
+                  </a:txBody>
+                  <a:tcPr marL="68580" marR="68580" marT="0" marB="0"/>
+                </a:tc>
+                <a:extLst>
+                  <a:ext uri="{0D108BD9-81ED-4DB2-BD59-A6C34878D82A}">
+                    <a16:rowId xmlns:a16="http://schemas.microsoft.com/office/drawing/2014/main" val="1720776639"/>
+                  </a:ext>
+                </a:extLst>
+              </a:tr>
+              <a:tr h="850392">
+                <a:tc>
+                  <a:txBody>
+                    <a:bodyPr/>
+                    <a:lstStyle/>
+                    <a:p>
+                      <a:r>
+                        <a:rPr lang="lt-LT" dirty="0"/>
+                        <a:t>Daiktas žemėlapyje</a:t>
+                      </a:r>
                     </a:p>
                   </a:txBody>
                   <a:tcPr/>
+                </a:tc>
+                <a:tc>
+                  <a:txBody>
+                    <a:bodyPr/>
+                    <a:lstStyle/>
+                    <a:p>
+                      <a:pPr marL="0" algn="l" defTabSz="1828709" rtl="0" eaLnBrk="1" latinLnBrk="0" hangingPunct="1">
+                        <a:spcBef>
+                          <a:spcPts val="300"/>
+                        </a:spcBef>
+                        <a:spcAft>
+                          <a:spcPts val="300"/>
+                        </a:spcAft>
+                        <a:buNone/>
+                      </a:pPr>
+                      <a:r>
+                        <a:rPr lang="lt-LT" sz="3600" kern="1200" dirty="0">
+                          <a:solidFill>
+                            <a:schemeClr val="dk1"/>
+                          </a:solidFill>
+                          <a:effectLst/>
+                          <a:latin typeface="+mn-lt"/>
+                          <a:ea typeface="+mn-ea"/>
+                          <a:cs typeface="+mn-cs"/>
+                        </a:rPr>
+                        <a:t>Apytikslė vieta</a:t>
+                      </a:r>
+                      <a:endParaRPr lang="en-GB" sz="3600" kern="1200" dirty="0">
+                        <a:solidFill>
+                          <a:schemeClr val="dk1"/>
+                        </a:solidFill>
+                        <a:effectLst/>
+                        <a:latin typeface="+mn-lt"/>
+                        <a:ea typeface="+mn-ea"/>
+                        <a:cs typeface="+mn-cs"/>
+                      </a:endParaRPr>
+                    </a:p>
+                  </a:txBody>
+                  <a:tcPr marL="68580" marR="68580" marT="0" marB="0"/>
                 </a:tc>
                 <a:tc>
                   <a:txBody>
@@ -6832,7 +6948,66 @@
                           <a:ea typeface="+mn-ea"/>
                           <a:cs typeface="+mn-cs"/>
                         </a:rPr>
-                        <a:t>Yra </a:t>
+                        <a:t>Tikslus adresas</a:t>
+                      </a:r>
+                      <a:endParaRPr lang="en-GB" sz="3600" kern="1200" dirty="0">
+                        <a:solidFill>
+                          <a:schemeClr val="dk1"/>
+                        </a:solidFill>
+                        <a:effectLst/>
+                        <a:latin typeface="+mn-lt"/>
+                        <a:ea typeface="+mn-ea"/>
+                        <a:cs typeface="+mn-cs"/>
+                      </a:endParaRPr>
+                    </a:p>
+                  </a:txBody>
+                  <a:tcPr marL="68580" marR="68580" marT="0" marB="0"/>
+                </a:tc>
+                <a:extLst>
+                  <a:ext uri="{0D108BD9-81ED-4DB2-BD59-A6C34878D82A}">
+                    <a16:rowId xmlns:a16="http://schemas.microsoft.com/office/drawing/2014/main" val="1149401783"/>
+                  </a:ext>
+                </a:extLst>
+              </a:tr>
+              <a:tr h="850392">
+                <a:tc>
+                  <a:txBody>
+                    <a:bodyPr/>
+                    <a:lstStyle/>
+                    <a:p>
+                      <a:r>
+                        <a:rPr lang="lt-LT" dirty="0"/>
+                        <a:t>Auditorija</a:t>
+                      </a:r>
+                    </a:p>
+                  </a:txBody>
+                  <a:tcPr/>
+                </a:tc>
+                <a:tc>
+                  <a:txBody>
+                    <a:bodyPr/>
+                    <a:lstStyle/>
+                    <a:p>
+                      <a:pPr marL="0" algn="l" defTabSz="1828709" rtl="0" eaLnBrk="1" latinLnBrk="0" hangingPunct="1">
+                        <a:spcBef>
+                          <a:spcPts val="300"/>
+                        </a:spcBef>
+                        <a:spcAft>
+                          <a:spcPts val="300"/>
+                        </a:spcAft>
+                        <a:buNone/>
+                      </a:pPr>
+                      <a:r>
+                        <a:rPr lang="lt-LT" sz="3600" kern="1200" dirty="0">
+                          <a:solidFill>
+                            <a:schemeClr val="dk1"/>
+                          </a:solidFill>
+                          <a:effectLst/>
+                          <a:latin typeface="+mn-lt"/>
+                          <a:ea typeface="+mn-ea"/>
+                          <a:cs typeface="+mn-cs"/>
+                        </a:rPr>
+                        <a:t>Vieši skelbimai</a:t>
                       </a:r>
                       <a:endParaRPr lang="en-GB" sz="3600" kern="1200" dirty="0">
                         <a:solidFill>
@@ -6871,7 +7046,46 @@
                           <a:ea typeface="+mn-ea"/>
                           <a:cs typeface="+mn-cs"/>
                         </a:rPr>
-                        <a:t>Nėra</a:t>
+                        <a:t>Vieši ir privatūs skelbimai</a:t>
+                      </a:r>
+                      <a:endParaRPr lang="en-GB" sz="3600" kern="1200" dirty="0">
+                        <a:solidFill>
+                          <a:schemeClr val="dk1"/>
+                        </a:solidFill>
+                        <a:effectLst/>
+                        <a:latin typeface="+mn-lt"/>
+                        <a:ea typeface="+mn-ea"/>
+                        <a:cs typeface="+mn-cs"/>
+                      </a:endParaRPr>
+                    </a:p>
+                  </a:txBody>
+                  <a:tcPr marL="68580" marR="68580" marT="0" marB="0"/>
+                </a:tc>
+                <a:tc>
+                  <a:txBody>
+                    <a:bodyPr/>
+                    <a:lstStyle/>
+                    <a:p>
+                      <a:pPr marL="0" algn="l" defTabSz="1828709" rtl="0" eaLnBrk="1" latinLnBrk="0" hangingPunct="1">
+                        <a:spcBef>
+                          <a:spcPts val="300"/>
+                        </a:spcBef>
+                        <a:spcAft>
+                          <a:spcPts val="300"/>
+                        </a:spcAft>
+                        <a:buNone/>
+                      </a:pPr>
+                      <a:r>
+                        <a:rPr lang="lt-LT" sz="3600" kern="1200" dirty="0">
+                          <a:solidFill>
+                            <a:schemeClr val="dk1"/>
+                          </a:solidFill>
+                          <a:effectLst/>
+                          <a:latin typeface="+mn-lt"/>
+                          <a:ea typeface="+mn-ea"/>
+                          <a:cs typeface="+mn-cs"/>
+                        </a:rPr>
+                        <a:t>Privatūs skelbimai</a:t>
                       </a:r>
                       <a:endParaRPr lang="en-GB" sz="3600" kern="1200" dirty="0">
                         <a:solidFill>
@@ -6888,7 +7102,7 @@
                 </a:tc>
                 <a:extLst>
                   <a:ext uri="{0D108BD9-81ED-4DB2-BD59-A6C34878D82A}">
-                    <a16:rowId xmlns:a16="http://schemas.microsoft.com/office/drawing/2014/main" val="184427955"/>
+                    <a16:rowId xmlns:a16="http://schemas.microsoft.com/office/drawing/2014/main" val="3993849208"/>
                   </a:ext>
                 </a:extLst>
               </a:tr>
@@ -7143,7 +7357,7 @@
                   <a:schemeClr val="tx1"/>
                 </a:solidFill>
               </a:rPr>
-              <a:t>Bendras projekto kodo eilučių skaičius – 12651</a:t>
+              <a:t>Bendras projekto kodo eilučių skaičius – 10372</a:t>
             </a:r>
           </a:p>
         </p:txBody>
@@ -7196,16 +7410,13 @@
                 <a:latin typeface="Times New Roman" panose="02020603050405020304" pitchFamily="18" charset="0"/>
                 <a:ea typeface="Calibri" panose="020F0502020204030204" pitchFamily="34" charset="0"/>
               </a:rPr>
-              <a:t>7</a:t>
-            </a:r>
-            <a:r>
-              <a:rPr lang="lt-LT" sz="4000" noProof="0" dirty="0">
-                <a:effectLst/>
-                <a:latin typeface="Times New Roman" panose="02020603050405020304" pitchFamily="18" charset="0"/>
-                <a:ea typeface="Calibri" panose="020F0502020204030204" pitchFamily="34" charset="0"/>
-              </a:rPr>
-              <a:t>733</a:t>
-            </a:r>
+              <a:t>5359</a:t>
+            </a:r>
+            <a:endParaRPr lang="lt-LT" sz="4000" noProof="0" dirty="0">
+              <a:effectLst/>
+              <a:latin typeface="Times New Roman" panose="02020603050405020304" pitchFamily="18" charset="0"/>
+              <a:ea typeface="Calibri" panose="020F0502020204030204" pitchFamily="34" charset="0"/>
+            </a:endParaRPr>
           </a:p>
           <a:p>
             <a:pPr marL="342900" lvl="0" indent="-342900" algn="just">
@@ -7221,7 +7432,7 @@
                 <a:latin typeface="Times New Roman" panose="02020603050405020304" pitchFamily="18" charset="0"/>
                 <a:ea typeface="Calibri" panose="020F0502020204030204" pitchFamily="34" charset="0"/>
               </a:rPr>
-              <a:t>Serverinės dalies programinio kodo eilučių kiekis: 4918</a:t>
+              <a:t>Serverinės dalies programinio kodo eilučių kiekis: 5013</a:t>
             </a:r>
           </a:p>
           <a:p>
@@ -7262,7 +7473,7 @@
                 <a:latin typeface="Times New Roman" panose="02020603050405020304" pitchFamily="18" charset="0"/>
                 <a:ea typeface="Calibri" panose="020F0502020204030204" pitchFamily="34" charset="0"/>
               </a:rPr>
-              <a:t>čių padengimas vienetų testais serverio dalyje procentais: 76%</a:t>
+              <a:t>čių padengimas vienetų testais serverio dalyje procentais: 78%</a:t>
             </a:r>
           </a:p>
           <a:p>
@@ -7279,8 +7490,20 @@
                 <a:latin typeface="Times New Roman" panose="02020603050405020304" pitchFamily="18" charset="0"/>
                 <a:ea typeface="Calibri" panose="020F0502020204030204" pitchFamily="34" charset="0"/>
               </a:rPr>
-              <a:t>Projekto metu parašytas bendras testų kiekis: 268 </a:t>
-            </a:r>
+              <a:t>Projekto metu parašytas bendras testų kiekis: 2</a:t>
+            </a:r>
+            <a:r>
+              <a:rPr lang="lt-LT" sz="4000" dirty="0">
+                <a:latin typeface="Times New Roman" panose="02020603050405020304" pitchFamily="18" charset="0"/>
+                <a:ea typeface="Calibri" panose="020F0502020204030204" pitchFamily="34" charset="0"/>
+              </a:rPr>
+              <a:t>91</a:t>
+            </a:r>
+            <a:endParaRPr lang="lt-LT" sz="4000" noProof="0" dirty="0">
+              <a:effectLst/>
+              <a:latin typeface="Times New Roman" panose="02020603050405020304" pitchFamily="18" charset="0"/>
+              <a:ea typeface="Calibri" panose="020F0502020204030204" pitchFamily="34" charset="0"/>
+            </a:endParaRPr>
           </a:p>
           <a:p>
             <a:pPr marL="342900" lvl="0" indent="-342900" algn="just">
@@ -8458,7 +8681,7 @@
         </p:nvSpPr>
         <p:spPr>
           <a:xfrm>
-            <a:off x="3783616" y="4243346"/>
+            <a:off x="2691416" y="5391140"/>
             <a:ext cx="17710880" cy="3416320"/>
           </a:xfrm>
           <a:prstGeom prst="rect">
@@ -8523,92 +8746,6 @@
               <a:buChar char="•"/>
             </a:pPr>
             <a:endParaRPr lang="lt-LT" dirty="0"/>
-          </a:p>
-        </p:txBody>
-      </p:sp>
-      <p:sp>
-        <p:nvSpPr>
-          <p:cNvPr id="3" name="TextBox 2">
-            <a:extLst>
-              <a:ext uri="{FF2B5EF4-FFF2-40B4-BE49-F238E27FC236}">
-                <a16:creationId xmlns:a16="http://schemas.microsoft.com/office/drawing/2014/main" id="{ED17524D-8C86-E421-1115-5142FD58BFCE}"/>
-              </a:ext>
-            </a:extLst>
-          </p:cNvPr>
-          <p:cNvSpPr txBox="1"/>
-          <p:nvPr/>
-        </p:nvSpPr>
-        <p:spPr>
-          <a:xfrm>
-            <a:off x="3631216" y="8982589"/>
-            <a:ext cx="17710880" cy="2308324"/>
-          </a:xfrm>
-          <a:prstGeom prst="rect">
-            <a:avLst/>
-          </a:prstGeom>
-          <a:noFill/>
-        </p:spPr>
-        <p:txBody>
-          <a:bodyPr wrap="square" rtlCol="0">
-            <a:spAutoFit/>
-          </a:bodyPr>
-          <a:lstStyle/>
-          <a:p>
-            <a:r>
-              <a:rPr lang="lt-LT" b="1" dirty="0"/>
-              <a:t>Funkciniai reikalavimai -</a:t>
-            </a:r>
-          </a:p>
-          <a:p>
-            <a:pPr marL="742950" indent="-742950">
-              <a:buFont typeface="+mj-lt"/>
-              <a:buAutoNum type="arabicPeriod"/>
-            </a:pPr>
-            <a:r>
-              <a:rPr lang="lt-LT" dirty="0"/>
-              <a:t>Rezervuoti įrangą</a:t>
-            </a:r>
-            <a:r>
-              <a:rPr lang="en-GB" dirty="0"/>
-              <a:t>,</a:t>
-            </a:r>
-            <a:r>
-              <a:rPr lang="lt-LT" dirty="0"/>
-              <a:t> </a:t>
-            </a:r>
-            <a:r>
-              <a:rPr lang="en-GB" dirty="0" err="1"/>
-              <a:t>nurodytomis</a:t>
-            </a:r>
-            <a:r>
-              <a:rPr lang="en-GB" dirty="0"/>
-              <a:t> </a:t>
-            </a:r>
-            <a:r>
-              <a:rPr lang="en-GB" dirty="0" err="1"/>
-              <a:t>dienomis</a:t>
-            </a:r>
-            <a:endParaRPr lang="lt-LT" dirty="0"/>
-          </a:p>
-          <a:p>
-            <a:pPr marL="742950" indent="-742950">
-              <a:buFont typeface="+mj-lt"/>
-              <a:buAutoNum type="arabicPeriod"/>
-            </a:pPr>
-            <a:r>
-              <a:rPr lang="lt-LT" dirty="0"/>
-              <a:t>Pokalbių galimybė tarp vartotojų</a:t>
-            </a:r>
-          </a:p>
-          <a:p>
-            <a:pPr marL="742950" indent="-742950">
-              <a:buFont typeface="+mj-lt"/>
-              <a:buAutoNum type="arabicPeriod"/>
-            </a:pPr>
-            <a:r>
-              <a:rPr lang="lt-LT" dirty="0"/>
-              <a:t>Galimybė užsiregistruoti išoriniais tapatybės tiekėjais (Google,Facebook,Microsoft)</a:t>
-            </a:r>
           </a:p>
         </p:txBody>
       </p:sp>
